--- a/teaching/csci112-fall-2024/lectures/ppts/CSCI_112_Programming_with_C_20240117.pptx
+++ b/teaching/csci112-fall-2024/lectures/ppts/CSCI_112_Programming_with_C_20240117.pptx
@@ -131,7 +131,17 @@
   <p:extLst>
     <p:ext uri="{EFAFB233-063F-42B5-8137-9DF3F51BA10A}">
       <p15:sldGuideLst xmlns:p15="http://schemas.microsoft.com/office/powerpoint/2012/main">
-        <p15:guide id="2" pos="2164" userDrawn="1">
+        <p15:guide id="1" orient="horz" pos="2160" userDrawn="1">
+          <p15:clr>
+            <a:srgbClr val="A4A3A4"/>
+          </p15:clr>
+        </p15:guide>
+        <p15:guide id="2" pos="3840" userDrawn="1">
+          <p15:clr>
+            <a:srgbClr val="A4A3A4"/>
+          </p15:clr>
+        </p15:guide>
+        <p15:guide id="2" pos="2199" userDrawn="1">
           <p15:clr>
             <a:srgbClr val="A4A3A4"/>
           </p15:clr>
@@ -146,7 +156,7 @@
             <a:srgbClr val="A4A3A4"/>
           </p15:clr>
         </p15:guide>
-        <p15:guide id="5" orient="horz" pos="4031" userDrawn="1">
+        <p15:guide id="5" orient="horz" pos="3634" userDrawn="1">
           <p15:clr>
             <a:srgbClr val="A4A3A4"/>
           </p15:clr>
@@ -14371,7 +14381,7 @@
                 <a:ea typeface="华文楷体" panose="02010600040101010101" pitchFamily="2" charset="-122"/>
                 <a:cs typeface="Arial" panose="020B0604020202020204" pitchFamily="34" charset="0"/>
               </a:rPr>
-              <a:t>2024.01.17</a:t>
+              <a:t>2024.08.21</a:t>
             </a:r>
             <a:endParaRPr lang="en-US" altLang="zh-CN" sz="2000" b="1" dirty="0">
               <a:solidFill>
@@ -15424,7 +15434,7 @@
                 <a:ea typeface="MS PGothic" panose="020B0600070205080204" charset="-128"/>
                 <a:cs typeface="Arial" panose="020B0604020202020204" pitchFamily="34" charset="0"/>
               </a:rPr>
-              <a:t>13 labs (lowest two dropped): 60%</a:t>
+              <a:t>13 labs (lowest two dropped): 40%</a:t>
             </a:r>
             <a:endParaRPr lang="en-US" sz="3000" dirty="0">
               <a:latin typeface="Arial" panose="020B0604020202020204" pitchFamily="34" charset="0"/>
@@ -15448,7 +15458,7 @@
                 <a:ea typeface="MS PGothic" panose="020B0600070205080204" charset="-128"/>
                 <a:cs typeface="Arial" panose="020B0604020202020204" pitchFamily="34" charset="0"/>
               </a:rPr>
-              <a:t> 6 in-class quizzes (or replace with final): 20%</a:t>
+              <a:t> 12 in-class quizzes: 40%</a:t>
             </a:r>
             <a:endParaRPr lang="en-US" sz="3000" dirty="0">
               <a:latin typeface="Arial" panose="020B0604020202020204" pitchFamily="34" charset="0"/>
@@ -17302,7 +17312,7 @@
                 <a:latin typeface="Arial" panose="020B0604020202020204" pitchFamily="34" charset="0"/>
                 <a:cs typeface="Arial" panose="020B0604020202020204" pitchFamily="34" charset="0"/>
               </a:rPr>
-              <a:t>If you find an error in any of the course materials (typo, incorrect statement, etc.), post in the #errors-in-course-material channel on Slack. I will decide whether it’s truly an error and not a duplicate. If it is really an error, you get a quarter of a point. Only the first person to post about an error gets the points. You can earn a max of 1 total point toward your 100 for the course (for four errors).</a:t>
+              <a:t>If you find an error in any of the course materials (typo, incorrect statement, etc.), post in the #errors_capture channel on Slack. I will decide whether it’s truly an error and not a duplicate. If it is really an error, you get a quarter of a point. Only the first person to post about an error gets the points. You can earn a max of 1 total point toward your 100 for the course (for four errors).</a:t>
             </a:r>
             <a:endParaRPr lang="en-US" dirty="0">
               <a:solidFill>
@@ -17979,8 +17989,8 @@
         </p:nvSpPr>
         <p:spPr>
           <a:xfrm>
-            <a:off x="1292225" y="2813050"/>
-            <a:ext cx="9607550" cy="927735"/>
+            <a:off x="1292225" y="2755265"/>
+            <a:ext cx="9607550" cy="1149350"/>
           </a:xfrm>
           <a:prstGeom prst="roundRect">
             <a:avLst/>
@@ -18019,14 +18029,44 @@
           <a:p>
             <a:pPr algn="just"/>
             <a:r>
-              <a:rPr sz="2400">
+              <a:rPr lang="en-US" sz="2400">
                 <a:solidFill>
                   <a:schemeClr val="tx1"/>
                 </a:solidFill>
                 <a:latin typeface="Times New Roman" panose="02020603050405020304" charset="0"/>
                 <a:cs typeface="Times New Roman" panose="02020603050405020304" charset="0"/>
               </a:rPr>
-              <a:t>1 point for a score of 75% or more on any lab beyond your required 11, and</a:t>
+              <a:t>0.5</a:t>
+            </a:r>
+            <a:r>
+              <a:rPr sz="2400">
+                <a:solidFill>
+                  <a:schemeClr val="tx1"/>
+                </a:solidFill>
+                <a:latin typeface="Times New Roman" panose="02020603050405020304" charset="0"/>
+                <a:cs typeface="Times New Roman" panose="02020603050405020304" charset="0"/>
+              </a:rPr>
+              <a:t> point for a score of </a:t>
+            </a:r>
+            <a:r>
+              <a:rPr lang="en-US" sz="2400">
+                <a:solidFill>
+                  <a:schemeClr val="tx1"/>
+                </a:solidFill>
+                <a:latin typeface="Times New Roman" panose="02020603050405020304" charset="0"/>
+                <a:cs typeface="Times New Roman" panose="02020603050405020304" charset="0"/>
+              </a:rPr>
+              <a:t>80</a:t>
+            </a:r>
+            <a:r>
+              <a:rPr sz="2400">
+                <a:solidFill>
+                  <a:schemeClr val="tx1"/>
+                </a:solidFill>
+                <a:latin typeface="Times New Roman" panose="02020603050405020304" charset="0"/>
+                <a:cs typeface="Times New Roman" panose="02020603050405020304" charset="0"/>
+              </a:rPr>
+              <a:t>% or more on any lab beyond your required 11, and</a:t>
             </a:r>
             <a:r>
               <a:rPr lang="en-US" sz="2400">
@@ -18048,7 +18088,17 @@
               </a:rPr>
               <a:t>0.1 point for any completed classwork beyond your required 24.</a:t>
             </a:r>
-            <a:endParaRPr sz="2400">
+            <a:r>
+              <a:rPr lang="en-US" sz="2400">
+                <a:solidFill>
+                  <a:schemeClr val="tx1"/>
+                </a:solidFill>
+                <a:latin typeface="Times New Roman" panose="02020603050405020304" charset="0"/>
+                <a:cs typeface="Times New Roman" panose="02020603050405020304" charset="0"/>
+              </a:rPr>
+              <a:t> 0.5 point for a score of 80% or more on any quiz beyond your required 10.</a:t>
+            </a:r>
+            <a:endParaRPr lang="en-US" sz="2400">
               <a:solidFill>
                 <a:schemeClr val="tx1"/>
               </a:solidFill>
@@ -20367,7 +20417,7 @@
                 <a:ea typeface="华文楷体" panose="02010600040101010101" pitchFamily="2" charset="-122"/>
                 <a:cs typeface="Arial" panose="020B0604020202020204" pitchFamily="34" charset="0"/>
               </a:rPr>
-              <a:t>2024.01.17</a:t>
+              <a:t>2024.08.21</a:t>
             </a:r>
             <a:endParaRPr lang="en-US" altLang="zh-CN" sz="2000" b="1" dirty="0">
               <a:solidFill>
@@ -21076,21 +21126,21 @@
       </p:grpSpPr>
       <p:grpSp>
         <p:nvGrpSpPr>
-          <p:cNvPr id="22" name="组合 21"/>
+          <p:cNvPr id="30" name="Group 29"/>
           <p:cNvGrpSpPr/>
           <p:nvPr/>
         </p:nvGrpSpPr>
         <p:grpSpPr>
           <a:xfrm>
-            <a:off x="7595870" y="2604135"/>
-            <a:ext cx="4470400" cy="3129280"/>
-            <a:chOff x="11962" y="4101"/>
-            <a:chExt cx="7040" cy="4928"/>
+            <a:off x="4391660" y="3276600"/>
+            <a:ext cx="5321300" cy="1125855"/>
+            <a:chOff x="6916" y="5160"/>
+            <a:chExt cx="8380" cy="1773"/>
           </a:xfrm>
         </p:grpSpPr>
         <p:sp>
           <p:nvSpPr>
-            <p:cNvPr id="19" name="圆角矩形 18"/>
+            <p:cNvPr id="198" name="圆角矩形 197"/>
             <p:cNvSpPr/>
             <p:nvPr>
               <p:custDataLst>
@@ -21100,8 +21150,137 @@
           </p:nvSpPr>
           <p:spPr>
             <a:xfrm>
-              <a:off x="11962" y="7281"/>
-              <a:ext cx="7040" cy="1748"/>
+              <a:off x="6916" y="5595"/>
+              <a:ext cx="8380" cy="1339"/>
+            </a:xfrm>
+            <a:prstGeom prst="roundRect">
+              <a:avLst/>
+            </a:prstGeom>
+            <a:solidFill>
+              <a:srgbClr val="03A9F5">
+                <a:alpha val="20000"/>
+              </a:srgbClr>
+            </a:solidFill>
+            <a:ln w="12700">
+              <a:solidFill>
+                <a:srgbClr val="00B0F0"/>
+              </a:solidFill>
+              <a:prstDash val="solid"/>
+            </a:ln>
+          </p:spPr>
+          <p:style>
+            <a:lnRef idx="2">
+              <a:srgbClr val="005CA2">
+                <a:shade val="50000"/>
+              </a:srgbClr>
+            </a:lnRef>
+            <a:fillRef idx="1">
+              <a:srgbClr val="005CA2"/>
+            </a:fillRef>
+            <a:effectRef idx="0">
+              <a:srgbClr val="005CA2"/>
+            </a:effectRef>
+            <a:fontRef idx="minor">
+              <a:sysClr val="window" lastClr="FFFFFF"/>
+            </a:fontRef>
+          </p:style>
+          <p:txBody>
+            <a:bodyPr rtlCol="0" anchor="ctr"/>
+            <a:p>
+              <a:pPr algn="ctr"/>
+              <a:endParaRPr lang="zh-CN" altLang="en-US">
+                <a:solidFill>
+                  <a:sysClr val="window" lastClr="FFFFFF"/>
+                </a:solidFill>
+                <a:latin typeface="Segoe UI" panose="020B0502040204020203" charset="0"/>
+                <a:ea typeface="Microsoft YaHei Light" panose="020B0502040204020203" charset="-122"/>
+              </a:endParaRPr>
+            </a:p>
+          </p:txBody>
+        </p:sp>
+        <p:sp>
+          <p:nvSpPr>
+            <p:cNvPr id="199" name="文本框 198"/>
+            <p:cNvSpPr txBox="1"/>
+            <p:nvPr>
+              <p:custDataLst>
+                <p:tags r:id="rId2"/>
+              </p:custDataLst>
+            </p:nvPr>
+          </p:nvSpPr>
+          <p:spPr>
+            <a:xfrm>
+              <a:off x="10399" y="5160"/>
+              <a:ext cx="1794" cy="872"/>
+            </a:xfrm>
+            <a:prstGeom prst="rect">
+              <a:avLst/>
+            </a:prstGeom>
+            <a:solidFill>
+              <a:srgbClr val="03A9F5"/>
+            </a:solidFill>
+            <a:ln w="12700">
+              <a:solidFill>
+                <a:srgbClr val="03A9F5"/>
+              </a:solidFill>
+              <a:prstDash val="solid"/>
+            </a:ln>
+          </p:spPr>
+          <p:txBody>
+            <a:bodyPr wrap="square" rtlCol="0">
+              <a:spAutoFit/>
+            </a:bodyPr>
+            <a:p>
+              <a:pPr algn="ctr"/>
+              <a:r>
+                <a:rPr lang="zh-CN" altLang="en-US" sz="1500" b="1" dirty="0">
+                  <a:solidFill>
+                    <a:sysClr val="window" lastClr="FFFFFF"/>
+                  </a:solidFill>
+                  <a:latin typeface="Arial" panose="020B0604020202020204" pitchFamily="34" charset="0"/>
+                  <a:cs typeface="Arial" panose="020B0604020202020204" pitchFamily="34" charset="0"/>
+                </a:rPr>
+                <a:t>Security Assistant</a:t>
+              </a:r>
+              <a:endParaRPr lang="zh-CN" altLang="en-US" sz="1500" b="1" dirty="0">
+                <a:solidFill>
+                  <a:sysClr val="window" lastClr="FFFFFF"/>
+                </a:solidFill>
+                <a:latin typeface="Arial" panose="020B0604020202020204" pitchFamily="34" charset="0"/>
+                <a:cs typeface="Arial" panose="020B0604020202020204" pitchFamily="34" charset="0"/>
+              </a:endParaRPr>
+            </a:p>
+          </p:txBody>
+        </p:sp>
+      </p:grpSp>
+      <p:grpSp>
+        <p:nvGrpSpPr>
+          <p:cNvPr id="29" name="Group 28"/>
+          <p:cNvGrpSpPr/>
+          <p:nvPr/>
+        </p:nvGrpSpPr>
+        <p:grpSpPr>
+          <a:xfrm>
+            <a:off x="7923530" y="2676525"/>
+            <a:ext cx="4197350" cy="3056890"/>
+            <a:chOff x="12478" y="4215"/>
+            <a:chExt cx="6610" cy="4814"/>
+          </a:xfrm>
+        </p:grpSpPr>
+        <p:sp>
+          <p:nvSpPr>
+            <p:cNvPr id="19" name="圆角矩形 18"/>
+            <p:cNvSpPr/>
+            <p:nvPr>
+              <p:custDataLst>
+                <p:tags r:id="rId3"/>
+              </p:custDataLst>
+            </p:nvPr>
+          </p:nvSpPr>
+          <p:spPr>
+            <a:xfrm>
+              <a:off x="12478" y="7281"/>
+              <a:ext cx="6611" cy="1748"/>
             </a:xfrm>
             <a:prstGeom prst="roundRect">
               <a:avLst/>
@@ -21154,13 +21333,13 @@
             <p:cNvSpPr txBox="1"/>
             <p:nvPr>
               <p:custDataLst>
-                <p:tags r:id="rId2"/>
+                <p:tags r:id="rId4"/>
               </p:custDataLst>
             </p:nvPr>
           </p:nvSpPr>
           <p:spPr>
             <a:xfrm>
-              <a:off x="16741" y="4101"/>
+              <a:off x="16808" y="4215"/>
               <a:ext cx="2163" cy="1234"/>
             </a:xfrm>
             <a:prstGeom prst="rect">
@@ -21220,8 +21399,8 @@
           </p:nvCxnSpPr>
           <p:spPr>
             <a:xfrm flipH="1" flipV="1">
-              <a:off x="17823" y="5400"/>
-              <a:ext cx="0" cy="1832"/>
+              <a:off x="17890" y="5449"/>
+              <a:ext cx="448" cy="1832"/>
             </a:xfrm>
             <a:prstGeom prst="straightConnector1">
               <a:avLst/>
@@ -21238,320 +21417,24 @@
           </p:spPr>
         </p:cxnSp>
       </p:grpSp>
-      <p:sp>
-        <p:nvSpPr>
-          <p:cNvPr id="33" name="内容占位符 9"/>
-          <p:cNvSpPr txBox="1"/>
-          <p:nvPr>
-            <p:custDataLst>
-              <p:tags r:id="rId3"/>
-            </p:custDataLst>
-          </p:nvPr>
-        </p:nvSpPr>
-        <p:spPr>
-          <a:xfrm>
-            <a:off x="110490" y="215265"/>
-            <a:ext cx="4605655" cy="594360"/>
-          </a:xfrm>
-          <a:prstGeom prst="rect">
-            <a:avLst/>
-          </a:prstGeom>
-        </p:spPr>
-        <p:txBody>
-          <a:bodyPr/>
-          <a:lstStyle>
-            <a:lvl1pPr marL="0" indent="0" algn="l" defTabSz="914400" rtl="0" eaLnBrk="1" latinLnBrk="0" hangingPunct="1">
-              <a:lnSpc>
-                <a:spcPct val="90000"/>
-              </a:lnSpc>
-              <a:spcBef>
-                <a:spcPts val="1000"/>
-              </a:spcBef>
-              <a:buFont typeface="Arial" panose="020B0604020202020204" pitchFamily="34" charset="0"/>
-              <a:buNone/>
-              <a:defRPr sz="3600" b="1" kern="1200">
-                <a:solidFill>
-                  <a:srgbClr val="D1202F"/>
-                </a:solidFill>
-                <a:latin typeface="Arial" panose="020B0604020202020204" pitchFamily="34" charset="0"/>
-                <a:ea typeface="Microsoft YaHei" panose="020B0503020204020204" charset="-122"/>
-                <a:cs typeface="+mn-cs"/>
-              </a:defRPr>
-            </a:lvl1pPr>
-            <a:lvl2pPr marL="457200" indent="0" algn="l" defTabSz="914400" rtl="0" eaLnBrk="1" latinLnBrk="0" hangingPunct="1">
-              <a:lnSpc>
-                <a:spcPct val="90000"/>
-              </a:lnSpc>
-              <a:spcBef>
-                <a:spcPts val="500"/>
-              </a:spcBef>
-              <a:buFont typeface="Arial" panose="020B0604020202020204" pitchFamily="34" charset="0"/>
-              <a:buNone/>
-              <a:defRPr sz="2400" b="1" kern="1200">
-                <a:solidFill>
-                  <a:schemeClr val="accent1"/>
-                </a:solidFill>
-                <a:latin typeface="+mj-ea"/>
-                <a:ea typeface="+mj-ea"/>
-                <a:cs typeface="+mn-cs"/>
-              </a:defRPr>
-            </a:lvl2pPr>
-            <a:lvl3pPr marL="1143000" indent="-228600" algn="l" defTabSz="914400" rtl="0" eaLnBrk="1" latinLnBrk="0" hangingPunct="1">
-              <a:lnSpc>
-                <a:spcPct val="90000"/>
-              </a:lnSpc>
-              <a:spcBef>
-                <a:spcPts val="500"/>
-              </a:spcBef>
-              <a:buFont typeface="Arial" panose="020B0604020202020204" pitchFamily="34" charset="0"/>
-              <a:buChar char="•"/>
-              <a:defRPr sz="2000" kern="1200">
-                <a:solidFill>
-                  <a:schemeClr val="tx1"/>
-                </a:solidFill>
-                <a:latin typeface="+mn-lt"/>
-                <a:ea typeface="+mn-ea"/>
-                <a:cs typeface="+mn-cs"/>
-              </a:defRPr>
-            </a:lvl3pPr>
-            <a:lvl4pPr marL="1600200" indent="-228600" algn="l" defTabSz="914400" rtl="0" eaLnBrk="1" latinLnBrk="0" hangingPunct="1">
-              <a:lnSpc>
-                <a:spcPct val="90000"/>
-              </a:lnSpc>
-              <a:spcBef>
-                <a:spcPts val="500"/>
-              </a:spcBef>
-              <a:buFont typeface="Arial" panose="020B0604020202020204" pitchFamily="34" charset="0"/>
-              <a:buChar char="•"/>
-              <a:defRPr sz="1800" kern="1200">
-                <a:solidFill>
-                  <a:schemeClr val="tx1"/>
-                </a:solidFill>
-                <a:latin typeface="+mn-lt"/>
-                <a:ea typeface="+mn-ea"/>
-                <a:cs typeface="+mn-cs"/>
-              </a:defRPr>
-            </a:lvl4pPr>
-            <a:lvl5pPr marL="2057400" indent="-228600" algn="l" defTabSz="914400" rtl="0" eaLnBrk="1" latinLnBrk="0" hangingPunct="1">
-              <a:lnSpc>
-                <a:spcPct val="90000"/>
-              </a:lnSpc>
-              <a:spcBef>
-                <a:spcPts val="500"/>
-              </a:spcBef>
-              <a:buFont typeface="Arial" panose="020B0604020202020204" pitchFamily="34" charset="0"/>
-              <a:buChar char="•"/>
-              <a:defRPr sz="1800" kern="1200">
-                <a:solidFill>
-                  <a:schemeClr val="tx1"/>
-                </a:solidFill>
-                <a:latin typeface="+mn-lt"/>
-                <a:ea typeface="+mn-ea"/>
-                <a:cs typeface="+mn-cs"/>
-              </a:defRPr>
-            </a:lvl5pPr>
-            <a:lvl6pPr marL="2514600" indent="-228600" algn="l" defTabSz="914400" rtl="0" eaLnBrk="1" latinLnBrk="0" hangingPunct="1">
-              <a:lnSpc>
-                <a:spcPct val="90000"/>
-              </a:lnSpc>
-              <a:spcBef>
-                <a:spcPts val="500"/>
-              </a:spcBef>
-              <a:buFont typeface="Arial" panose="020B0604020202020204" pitchFamily="34" charset="0"/>
-              <a:buChar char="•"/>
-              <a:defRPr sz="1800" kern="1200">
-                <a:solidFill>
-                  <a:schemeClr val="tx1"/>
-                </a:solidFill>
-                <a:latin typeface="+mn-lt"/>
-                <a:ea typeface="+mn-ea"/>
-                <a:cs typeface="+mn-cs"/>
-              </a:defRPr>
-            </a:lvl6pPr>
-            <a:lvl7pPr marL="2971800" indent="-228600" algn="l" defTabSz="914400" rtl="0" eaLnBrk="1" latinLnBrk="0" hangingPunct="1">
-              <a:lnSpc>
-                <a:spcPct val="90000"/>
-              </a:lnSpc>
-              <a:spcBef>
-                <a:spcPts val="500"/>
-              </a:spcBef>
-              <a:buFont typeface="Arial" panose="020B0604020202020204" pitchFamily="34" charset="0"/>
-              <a:buChar char="•"/>
-              <a:defRPr sz="1800" kern="1200">
-                <a:solidFill>
-                  <a:schemeClr val="tx1"/>
-                </a:solidFill>
-                <a:latin typeface="+mn-lt"/>
-                <a:ea typeface="+mn-ea"/>
-                <a:cs typeface="+mn-cs"/>
-              </a:defRPr>
-            </a:lvl7pPr>
-            <a:lvl8pPr marL="3429000" indent="-228600" algn="l" defTabSz="914400" rtl="0" eaLnBrk="1" latinLnBrk="0" hangingPunct="1">
-              <a:lnSpc>
-                <a:spcPct val="90000"/>
-              </a:lnSpc>
-              <a:spcBef>
-                <a:spcPts val="500"/>
-              </a:spcBef>
-              <a:buFont typeface="Arial" panose="020B0604020202020204" pitchFamily="34" charset="0"/>
-              <a:buChar char="•"/>
-              <a:defRPr sz="1800" kern="1200">
-                <a:solidFill>
-                  <a:schemeClr val="tx1"/>
-                </a:solidFill>
-                <a:latin typeface="+mn-lt"/>
-                <a:ea typeface="+mn-ea"/>
-                <a:cs typeface="+mn-cs"/>
-              </a:defRPr>
-            </a:lvl8pPr>
-            <a:lvl9pPr marL="3886200" indent="-228600" algn="l" defTabSz="914400" rtl="0" eaLnBrk="1" latinLnBrk="0" hangingPunct="1">
-              <a:lnSpc>
-                <a:spcPct val="90000"/>
-              </a:lnSpc>
-              <a:spcBef>
-                <a:spcPts val="500"/>
-              </a:spcBef>
-              <a:buFont typeface="Arial" panose="020B0604020202020204" pitchFamily="34" charset="0"/>
-              <a:buChar char="•"/>
-              <a:defRPr sz="1800" kern="1200">
-                <a:solidFill>
-                  <a:schemeClr val="tx1"/>
-                </a:solidFill>
-                <a:latin typeface="+mn-lt"/>
-                <a:ea typeface="+mn-ea"/>
-                <a:cs typeface="+mn-cs"/>
-              </a:defRPr>
-            </a:lvl9pPr>
-          </a:lstStyle>
-          <a:p>
-            <a:pPr marL="0" marR="0" lvl="0" indent="0" algn="l" defTabSz="914400" rtl="0" eaLnBrk="1" fontAlgn="auto" latinLnBrk="0" hangingPunct="1">
-              <a:lnSpc>
-                <a:spcPct val="90000"/>
-              </a:lnSpc>
-              <a:spcBef>
-                <a:spcPts val="1000"/>
-              </a:spcBef>
-              <a:spcAft>
-                <a:spcPts val="0"/>
-              </a:spcAft>
-              <a:buClrTx/>
-              <a:buSzTx/>
-              <a:buFont typeface="Arial" panose="020B0604020202020204" pitchFamily="34" charset="0"/>
-              <a:buNone/>
-              <a:defRPr/>
-            </a:pPr>
-            <a:r>
-              <a:rPr kumimoji="0" lang="en-US" altLang="zh-CN" b="1" i="0" u="none" strike="noStrike" kern="1200" cap="none" spc="0" normalizeH="0" baseline="0" noProof="0">
-                <a:ln>
-                  <a:noFill/>
-                </a:ln>
-                <a:solidFill>
-                  <a:srgbClr val="FF0000"/>
-                </a:solidFill>
-                <a:effectLst/>
-                <a:uLnTx/>
-                <a:uFillTx/>
-                <a:latin typeface="Arial" panose="020B0604020202020204" pitchFamily="34" charset="0"/>
-                <a:ea typeface="Microsoft YaHei" panose="020B0503020204020204" charset="-122"/>
-                <a:cs typeface="+mn-cs"/>
-              </a:rPr>
-              <a:t> Research Roadmap</a:t>
-            </a:r>
-            <a:endParaRPr kumimoji="0" lang="en-US" altLang="zh-CN" b="1" i="0" u="none" strike="noStrike" kern="1200" cap="none" spc="0" normalizeH="0" baseline="0" noProof="0">
-              <a:ln>
-                <a:noFill/>
-              </a:ln>
-              <a:solidFill>
-                <a:srgbClr val="FF0000"/>
-              </a:solidFill>
-              <a:effectLst/>
-              <a:uLnTx/>
-              <a:uFillTx/>
-              <a:latin typeface="Arial" panose="020B0604020202020204" pitchFamily="34" charset="0"/>
-              <a:ea typeface="Microsoft YaHei" panose="020B0503020204020204" charset="-122"/>
-              <a:cs typeface="+mn-cs"/>
-            </a:endParaRPr>
-          </a:p>
-        </p:txBody>
-      </p:sp>
       <p:grpSp>
         <p:nvGrpSpPr>
-          <p:cNvPr id="202" name="组合 201"/>
+          <p:cNvPr id="28" name="Group 27"/>
           <p:cNvGrpSpPr/>
           <p:nvPr/>
         </p:nvGrpSpPr>
         <p:grpSpPr>
           <a:xfrm>
-            <a:off x="4363085" y="3276600"/>
-            <a:ext cx="4996815" cy="1126490"/>
-            <a:chOff x="7751" y="5160"/>
-            <a:chExt cx="7869" cy="1774"/>
+            <a:off x="2820035" y="3460115"/>
+            <a:ext cx="4921885" cy="2273300"/>
+            <a:chOff x="4441" y="5449"/>
+            <a:chExt cx="7751" cy="3580"/>
           </a:xfrm>
         </p:grpSpPr>
         <p:sp>
           <p:nvSpPr>
-            <p:cNvPr id="198" name="圆角矩形 197"/>
+            <p:cNvPr id="195" name="圆角矩形 194"/>
             <p:cNvSpPr/>
-            <p:nvPr>
-              <p:custDataLst>
-                <p:tags r:id="rId4"/>
-              </p:custDataLst>
-            </p:nvPr>
-          </p:nvSpPr>
-          <p:spPr>
-            <a:xfrm>
-              <a:off x="7751" y="5595"/>
-              <a:ext cx="7869" cy="1339"/>
-            </a:xfrm>
-            <a:prstGeom prst="roundRect">
-              <a:avLst/>
-            </a:prstGeom>
-            <a:solidFill>
-              <a:srgbClr val="03A9F5">
-                <a:alpha val="20000"/>
-              </a:srgbClr>
-            </a:solidFill>
-            <a:ln w="12700">
-              <a:solidFill>
-                <a:srgbClr val="00B0F0"/>
-              </a:solidFill>
-              <a:prstDash val="solid"/>
-            </a:ln>
-          </p:spPr>
-          <p:style>
-            <a:lnRef idx="2">
-              <a:srgbClr val="005CA2">
-                <a:shade val="50000"/>
-              </a:srgbClr>
-            </a:lnRef>
-            <a:fillRef idx="1">
-              <a:srgbClr val="005CA2"/>
-            </a:fillRef>
-            <a:effectRef idx="0">
-              <a:srgbClr val="005CA2"/>
-            </a:effectRef>
-            <a:fontRef idx="minor">
-              <a:sysClr val="window" lastClr="FFFFFF"/>
-            </a:fontRef>
-          </p:style>
-          <p:txBody>
-            <a:bodyPr rtlCol="0" anchor="ctr"/>
-            <a:p>
-              <a:pPr algn="ctr"/>
-              <a:endParaRPr lang="zh-CN" altLang="en-US">
-                <a:solidFill>
-                  <a:sysClr val="window" lastClr="FFFFFF"/>
-                </a:solidFill>
-                <a:latin typeface="Segoe UI" panose="020B0502040204020203" charset="0"/>
-                <a:ea typeface="Microsoft YaHei Light" panose="020B0502040204020203" charset="-122"/>
-              </a:endParaRPr>
-            </a:p>
-          </p:txBody>
-        </p:sp>
-        <p:sp>
-          <p:nvSpPr>
-            <p:cNvPr id="199" name="文本框 198"/>
-            <p:cNvSpPr txBox="1"/>
             <p:nvPr>
               <p:custDataLst>
                 <p:tags r:id="rId5"/>
@@ -21560,77 +21443,8 @@
           </p:nvSpPr>
           <p:spPr>
             <a:xfrm>
-              <a:off x="11234" y="5160"/>
-              <a:ext cx="1794" cy="872"/>
-            </a:xfrm>
-            <a:prstGeom prst="rect">
-              <a:avLst/>
-            </a:prstGeom>
-            <a:solidFill>
-              <a:srgbClr val="03A9F5"/>
-            </a:solidFill>
-            <a:ln w="12700">
-              <a:solidFill>
-                <a:srgbClr val="03A9F5"/>
-              </a:solidFill>
-              <a:prstDash val="solid"/>
-            </a:ln>
-          </p:spPr>
-          <p:txBody>
-            <a:bodyPr wrap="square" rtlCol="0">
-              <a:spAutoFit/>
-            </a:bodyPr>
-            <a:p>
-              <a:pPr algn="ctr"/>
-              <a:r>
-                <a:rPr lang="zh-CN" altLang="en-US" sz="1500" b="1" dirty="0">
-                  <a:solidFill>
-                    <a:sysClr val="window" lastClr="FFFFFF"/>
-                  </a:solidFill>
-                  <a:latin typeface="Arial" panose="020B0604020202020204" pitchFamily="34" charset="0"/>
-                  <a:cs typeface="Arial" panose="020B0604020202020204" pitchFamily="34" charset="0"/>
-                </a:rPr>
-                <a:t>Security Assistant</a:t>
-              </a:r>
-              <a:endParaRPr lang="zh-CN" altLang="en-US" sz="1500" b="1" dirty="0">
-                <a:solidFill>
-                  <a:sysClr val="window" lastClr="FFFFFF"/>
-                </a:solidFill>
-                <a:latin typeface="Arial" panose="020B0604020202020204" pitchFamily="34" charset="0"/>
-                <a:cs typeface="Arial" panose="020B0604020202020204" pitchFamily="34" charset="0"/>
-              </a:endParaRPr>
-            </a:p>
-          </p:txBody>
-        </p:sp>
-      </p:grpSp>
-      <p:grpSp>
-        <p:nvGrpSpPr>
-          <p:cNvPr id="201" name="组合 200"/>
-          <p:cNvGrpSpPr/>
-          <p:nvPr/>
-        </p:nvGrpSpPr>
-        <p:grpSpPr>
-          <a:xfrm>
-            <a:off x="3635375" y="4623435"/>
-            <a:ext cx="4138295" cy="1827530"/>
-            <a:chOff x="6605" y="7281"/>
-            <a:chExt cx="6517" cy="2878"/>
-          </a:xfrm>
-        </p:grpSpPr>
-        <p:sp>
-          <p:nvSpPr>
-            <p:cNvPr id="195" name="圆角矩形 194"/>
-            <p:cNvSpPr/>
-            <p:nvPr>
-              <p:custDataLst>
-                <p:tags r:id="rId6"/>
-              </p:custDataLst>
-            </p:nvPr>
-          </p:nvSpPr>
-          <p:spPr>
-            <a:xfrm>
-              <a:off x="6605" y="7281"/>
-              <a:ext cx="5866" cy="1748"/>
+              <a:off x="4900" y="7281"/>
+              <a:ext cx="7292" cy="1748"/>
             </a:xfrm>
             <a:prstGeom prst="roundRect">
               <a:avLst/>
@@ -21683,13 +21497,13 @@
             <p:cNvSpPr txBox="1"/>
             <p:nvPr>
               <p:custDataLst>
-                <p:tags r:id="rId7"/>
+                <p:tags r:id="rId6"/>
               </p:custDataLst>
             </p:nvPr>
           </p:nvSpPr>
           <p:spPr>
             <a:xfrm>
-              <a:off x="11174" y="8925"/>
+              <a:off x="4441" y="5449"/>
               <a:ext cx="1949" cy="1234"/>
             </a:xfrm>
             <a:prstGeom prst="rect">
@@ -21731,7 +21545,268 @@
             </a:p>
           </p:txBody>
         </p:sp>
+        <p:cxnSp>
+          <p:nvCxnSpPr>
+            <p:cNvPr id="23" name="直接箭头连接符 20"/>
+            <p:cNvCxnSpPr/>
+            <p:nvPr/>
+          </p:nvCxnSpPr>
+          <p:spPr>
+            <a:xfrm flipH="1" flipV="1">
+              <a:off x="5319" y="6683"/>
+              <a:ext cx="126" cy="612"/>
+            </a:xfrm>
+            <a:prstGeom prst="straightConnector1">
+              <a:avLst/>
+            </a:prstGeom>
+            <a:noFill/>
+            <a:ln w="28575" cap="flat" cmpd="sng" algn="ctr">
+              <a:solidFill>
+                <a:srgbClr val="03A9F5"/>
+              </a:solidFill>
+              <a:prstDash val="solid"/>
+              <a:miter lim="800000"/>
+              <a:tailEnd type="triangle" w="lg" len="lg"/>
+            </a:ln>
+          </p:spPr>
+        </p:cxnSp>
       </p:grpSp>
+      <p:sp>
+        <p:nvSpPr>
+          <p:cNvPr id="33" name="内容占位符 9"/>
+          <p:cNvSpPr txBox="1"/>
+          <p:nvPr>
+            <p:custDataLst>
+              <p:tags r:id="rId7"/>
+            </p:custDataLst>
+          </p:nvPr>
+        </p:nvSpPr>
+        <p:spPr>
+          <a:xfrm>
+            <a:off x="-13335" y="196215"/>
+            <a:ext cx="4605655" cy="594360"/>
+          </a:xfrm>
+          <a:prstGeom prst="rect">
+            <a:avLst/>
+          </a:prstGeom>
+        </p:spPr>
+        <p:txBody>
+          <a:bodyPr/>
+          <a:lstStyle>
+            <a:lvl1pPr marL="0" indent="0" algn="l" defTabSz="914400" rtl="0" eaLnBrk="1" latinLnBrk="0" hangingPunct="1">
+              <a:lnSpc>
+                <a:spcPct val="90000"/>
+              </a:lnSpc>
+              <a:spcBef>
+                <a:spcPts val="1000"/>
+              </a:spcBef>
+              <a:buFont typeface="Arial" panose="020B0604020202020204" pitchFamily="34" charset="0"/>
+              <a:buNone/>
+              <a:defRPr sz="3600" b="1" kern="1200">
+                <a:solidFill>
+                  <a:srgbClr val="D1202F"/>
+                </a:solidFill>
+                <a:latin typeface="Arial" panose="020B0604020202020204" pitchFamily="34" charset="0"/>
+                <a:ea typeface="Microsoft YaHei" panose="020B0503020204020204" charset="-122"/>
+                <a:cs typeface="+mn-cs"/>
+              </a:defRPr>
+            </a:lvl1pPr>
+            <a:lvl2pPr marL="457200" indent="0" algn="l" defTabSz="914400" rtl="0" eaLnBrk="1" latinLnBrk="0" hangingPunct="1">
+              <a:lnSpc>
+                <a:spcPct val="90000"/>
+              </a:lnSpc>
+              <a:spcBef>
+                <a:spcPts val="500"/>
+              </a:spcBef>
+              <a:buFont typeface="Arial" panose="020B0604020202020204" pitchFamily="34" charset="0"/>
+              <a:buNone/>
+              <a:defRPr sz="2400" b="1" kern="1200">
+                <a:solidFill>
+                  <a:schemeClr val="accent1"/>
+                </a:solidFill>
+                <a:latin typeface="+mj-ea"/>
+                <a:ea typeface="+mj-ea"/>
+                <a:cs typeface="+mn-cs"/>
+              </a:defRPr>
+            </a:lvl2pPr>
+            <a:lvl3pPr marL="1143000" indent="-228600" algn="l" defTabSz="914400" rtl="0" eaLnBrk="1" latinLnBrk="0" hangingPunct="1">
+              <a:lnSpc>
+                <a:spcPct val="90000"/>
+              </a:lnSpc>
+              <a:spcBef>
+                <a:spcPts val="500"/>
+              </a:spcBef>
+              <a:buFont typeface="Arial" panose="020B0604020202020204" pitchFamily="34" charset="0"/>
+              <a:buChar char="•"/>
+              <a:defRPr sz="2000" kern="1200">
+                <a:solidFill>
+                  <a:schemeClr val="tx1"/>
+                </a:solidFill>
+                <a:latin typeface="+mn-lt"/>
+                <a:ea typeface="+mn-ea"/>
+                <a:cs typeface="+mn-cs"/>
+              </a:defRPr>
+            </a:lvl3pPr>
+            <a:lvl4pPr marL="1600200" indent="-228600" algn="l" defTabSz="914400" rtl="0" eaLnBrk="1" latinLnBrk="0" hangingPunct="1">
+              <a:lnSpc>
+                <a:spcPct val="90000"/>
+              </a:lnSpc>
+              <a:spcBef>
+                <a:spcPts val="500"/>
+              </a:spcBef>
+              <a:buFont typeface="Arial" panose="020B0604020202020204" pitchFamily="34" charset="0"/>
+              <a:buChar char="•"/>
+              <a:defRPr sz="1800" kern="1200">
+                <a:solidFill>
+                  <a:schemeClr val="tx1"/>
+                </a:solidFill>
+                <a:latin typeface="+mn-lt"/>
+                <a:ea typeface="+mn-ea"/>
+                <a:cs typeface="+mn-cs"/>
+              </a:defRPr>
+            </a:lvl4pPr>
+            <a:lvl5pPr marL="2057400" indent="-228600" algn="l" defTabSz="914400" rtl="0" eaLnBrk="1" latinLnBrk="0" hangingPunct="1">
+              <a:lnSpc>
+                <a:spcPct val="90000"/>
+              </a:lnSpc>
+              <a:spcBef>
+                <a:spcPts val="500"/>
+              </a:spcBef>
+              <a:buFont typeface="Arial" panose="020B0604020202020204" pitchFamily="34" charset="0"/>
+              <a:buChar char="•"/>
+              <a:defRPr sz="1800" kern="1200">
+                <a:solidFill>
+                  <a:schemeClr val="tx1"/>
+                </a:solidFill>
+                <a:latin typeface="+mn-lt"/>
+                <a:ea typeface="+mn-ea"/>
+                <a:cs typeface="+mn-cs"/>
+              </a:defRPr>
+            </a:lvl5pPr>
+            <a:lvl6pPr marL="2514600" indent="-228600" algn="l" defTabSz="914400" rtl="0" eaLnBrk="1" latinLnBrk="0" hangingPunct="1">
+              <a:lnSpc>
+                <a:spcPct val="90000"/>
+              </a:lnSpc>
+              <a:spcBef>
+                <a:spcPts val="500"/>
+              </a:spcBef>
+              <a:buFont typeface="Arial" panose="020B0604020202020204" pitchFamily="34" charset="0"/>
+              <a:buChar char="•"/>
+              <a:defRPr sz="1800" kern="1200">
+                <a:solidFill>
+                  <a:schemeClr val="tx1"/>
+                </a:solidFill>
+                <a:latin typeface="+mn-lt"/>
+                <a:ea typeface="+mn-ea"/>
+                <a:cs typeface="+mn-cs"/>
+              </a:defRPr>
+            </a:lvl6pPr>
+            <a:lvl7pPr marL="2971800" indent="-228600" algn="l" defTabSz="914400" rtl="0" eaLnBrk="1" latinLnBrk="0" hangingPunct="1">
+              <a:lnSpc>
+                <a:spcPct val="90000"/>
+              </a:lnSpc>
+              <a:spcBef>
+                <a:spcPts val="500"/>
+              </a:spcBef>
+              <a:buFont typeface="Arial" panose="020B0604020202020204" pitchFamily="34" charset="0"/>
+              <a:buChar char="•"/>
+              <a:defRPr sz="1800" kern="1200">
+                <a:solidFill>
+                  <a:schemeClr val="tx1"/>
+                </a:solidFill>
+                <a:latin typeface="+mn-lt"/>
+                <a:ea typeface="+mn-ea"/>
+                <a:cs typeface="+mn-cs"/>
+              </a:defRPr>
+            </a:lvl7pPr>
+            <a:lvl8pPr marL="3429000" indent="-228600" algn="l" defTabSz="914400" rtl="0" eaLnBrk="1" latinLnBrk="0" hangingPunct="1">
+              <a:lnSpc>
+                <a:spcPct val="90000"/>
+              </a:lnSpc>
+              <a:spcBef>
+                <a:spcPts val="500"/>
+              </a:spcBef>
+              <a:buFont typeface="Arial" panose="020B0604020202020204" pitchFamily="34" charset="0"/>
+              <a:buChar char="•"/>
+              <a:defRPr sz="1800" kern="1200">
+                <a:solidFill>
+                  <a:schemeClr val="tx1"/>
+                </a:solidFill>
+                <a:latin typeface="+mn-lt"/>
+                <a:ea typeface="+mn-ea"/>
+                <a:cs typeface="+mn-cs"/>
+              </a:defRPr>
+            </a:lvl8pPr>
+            <a:lvl9pPr marL="3886200" indent="-228600" algn="l" defTabSz="914400" rtl="0" eaLnBrk="1" latinLnBrk="0" hangingPunct="1">
+              <a:lnSpc>
+                <a:spcPct val="90000"/>
+              </a:lnSpc>
+              <a:spcBef>
+                <a:spcPts val="500"/>
+              </a:spcBef>
+              <a:buFont typeface="Arial" panose="020B0604020202020204" pitchFamily="34" charset="0"/>
+              <a:buChar char="•"/>
+              <a:defRPr sz="1800" kern="1200">
+                <a:solidFill>
+                  <a:schemeClr val="tx1"/>
+                </a:solidFill>
+                <a:latin typeface="+mn-lt"/>
+                <a:ea typeface="+mn-ea"/>
+                <a:cs typeface="+mn-cs"/>
+              </a:defRPr>
+            </a:lvl9pPr>
+          </a:lstStyle>
+          <a:p>
+            <a:pPr marL="0" marR="0" lvl="0" indent="0" algn="l" defTabSz="914400" rtl="0" eaLnBrk="1" fontAlgn="auto" latinLnBrk="0" hangingPunct="1">
+              <a:lnSpc>
+                <a:spcPct val="90000"/>
+              </a:lnSpc>
+              <a:spcBef>
+                <a:spcPts val="1000"/>
+              </a:spcBef>
+              <a:spcAft>
+                <a:spcPts val="0"/>
+              </a:spcAft>
+              <a:buClrTx/>
+              <a:buSzTx/>
+              <a:buFont typeface="Arial" panose="020B0604020202020204" pitchFamily="34" charset="0"/>
+              <a:buNone/>
+              <a:defRPr/>
+            </a:pPr>
+            <a:r>
+              <a:rPr kumimoji="0" lang="en-US" altLang="zh-CN" b="1" i="0" u="none" strike="noStrike" kern="1200" cap="none" spc="0" normalizeH="0" baseline="0" noProof="0">
+                <a:ln>
+                  <a:noFill/>
+                </a:ln>
+                <a:solidFill>
+                  <a:srgbClr val="FF0000"/>
+                </a:solidFill>
+                <a:effectLst/>
+                <a:uLnTx/>
+                <a:uFillTx/>
+                <a:latin typeface="Arial" panose="020B0604020202020204" pitchFamily="34" charset="0"/>
+                <a:ea typeface="Microsoft YaHei" panose="020B0503020204020204" charset="-122"/>
+                <a:cs typeface="+mn-cs"/>
+              </a:rPr>
+              <a:t> Research Roadmap</a:t>
+            </a:r>
+            <a:endParaRPr kumimoji="0" lang="en-US" altLang="zh-CN" b="1" i="0" u="none" strike="noStrike" kern="1200" cap="none" spc="0" normalizeH="0" baseline="0" noProof="0">
+              <a:ln>
+                <a:noFill/>
+              </a:ln>
+              <a:solidFill>
+                <a:srgbClr val="FF0000"/>
+              </a:solidFill>
+              <a:effectLst/>
+              <a:uLnTx/>
+              <a:uFillTx/>
+              <a:latin typeface="Arial" panose="020B0604020202020204" pitchFamily="34" charset="0"/>
+              <a:ea typeface="Microsoft YaHei" panose="020B0503020204020204" charset="-122"/>
+              <a:cs typeface="+mn-cs"/>
+            </a:endParaRPr>
+          </a:p>
+        </p:txBody>
+      </p:sp>
       <p:sp>
         <p:nvSpPr>
           <p:cNvPr id="129" name="椭圆 128"/>
@@ -21746,7 +21821,7 @@
         </p:nvSpPr>
         <p:spPr>
           <a:xfrm>
-            <a:off x="4716145" y="215265"/>
+            <a:off x="4744720" y="215265"/>
             <a:ext cx="2879725" cy="2879725"/>
           </a:xfrm>
           <a:prstGeom prst="ellipse">
@@ -21803,7 +21878,7 @@
         </p:nvSpPr>
         <p:spPr>
           <a:xfrm>
-            <a:off x="5103495" y="989330"/>
+            <a:off x="5132070" y="989330"/>
             <a:ext cx="2105660" cy="2105660"/>
           </a:xfrm>
           <a:prstGeom prst="ellipse">
@@ -21860,7 +21935,7 @@
         </p:nvSpPr>
         <p:spPr>
           <a:xfrm>
-            <a:off x="5490845" y="1764030"/>
+            <a:off x="5519420" y="1764030"/>
             <a:ext cx="1330960" cy="1330960"/>
           </a:xfrm>
           <a:prstGeom prst="ellipse">
@@ -21916,7 +21991,7 @@
         </p:nvSpPr>
         <p:spPr>
           <a:xfrm>
-            <a:off x="4951730" y="309880"/>
+            <a:off x="4980305" y="309880"/>
             <a:ext cx="2409190" cy="645160"/>
           </a:xfrm>
           <a:prstGeom prst="rect">
@@ -21962,7 +22037,7 @@
         </p:nvSpPr>
         <p:spPr>
           <a:xfrm>
-            <a:off x="5441315" y="1129030"/>
+            <a:off x="5469890" y="1129030"/>
             <a:ext cx="1429385" cy="645160"/>
           </a:xfrm>
           <a:prstGeom prst="rect">
@@ -22028,7 +22103,7 @@
         </p:nvSpPr>
         <p:spPr>
           <a:xfrm>
-            <a:off x="5338445" y="2139315"/>
+            <a:off x="5367020" y="2139315"/>
             <a:ext cx="1635125" cy="645160"/>
           </a:xfrm>
           <a:prstGeom prst="rect">
@@ -22094,8 +22169,8 @@
         </p:nvCxnSpPr>
         <p:spPr>
           <a:xfrm flipH="1" flipV="1">
-            <a:off x="3634740" y="2513965"/>
-            <a:ext cx="1871980" cy="0"/>
+            <a:off x="3454400" y="2513965"/>
+            <a:ext cx="2072005" cy="0"/>
           </a:xfrm>
           <a:prstGeom prst="line">
             <a:avLst/>
@@ -22132,9 +22207,9 @@
           </p:nvPr>
         </p:nvCxnSpPr>
         <p:spPr>
-          <a:xfrm flipH="1" flipV="1">
-            <a:off x="1816735" y="3261360"/>
-            <a:ext cx="3636010" cy="0"/>
+          <a:xfrm flipH="1">
+            <a:off x="1548765" y="3253105"/>
+            <a:ext cx="3829050" cy="0"/>
           </a:xfrm>
           <a:prstGeom prst="line">
             <a:avLst/>
@@ -22172,7 +22247,7 @@
         </p:nvCxnSpPr>
         <p:spPr>
           <a:xfrm rot="16200000" flipH="1" flipV="1">
-            <a:off x="1529080" y="3540760"/>
+            <a:off x="1260475" y="3549015"/>
             <a:ext cx="575945" cy="0"/>
           </a:xfrm>
           <a:prstGeom prst="line">
@@ -22212,7 +22287,7 @@
         </p:nvCxnSpPr>
         <p:spPr>
           <a:xfrm rot="16200000" flipH="1" flipV="1">
-            <a:off x="5173345" y="3540125"/>
+            <a:off x="5081270" y="3540125"/>
             <a:ext cx="575945" cy="0"/>
           </a:xfrm>
           <a:prstGeom prst="line">
@@ -22251,9 +22326,9 @@
           </p:nvPr>
         </p:nvCxnSpPr>
         <p:spPr>
-          <a:xfrm rot="16200000" flipH="1" flipV="1">
-            <a:off x="3256740" y="2873200"/>
-            <a:ext cx="756000" cy="0"/>
+          <a:xfrm flipH="1">
+            <a:off x="3454400" y="2514250"/>
+            <a:ext cx="3175" cy="741045"/>
           </a:xfrm>
           <a:prstGeom prst="line">
             <a:avLst/>
@@ -22291,9 +22366,9 @@
           </p:nvPr>
         </p:nvCxnSpPr>
         <p:spPr>
-          <a:xfrm flipH="1">
-            <a:off x="7040245" y="1480820"/>
-            <a:ext cx="2326640" cy="0"/>
+          <a:xfrm flipH="1" flipV="1">
+            <a:off x="7139305" y="1655445"/>
+            <a:ext cx="2572385" cy="3175"/>
           </a:xfrm>
           <a:prstGeom prst="line">
             <a:avLst/>
@@ -22330,9 +22405,9 @@
           </p:nvPr>
         </p:nvCxnSpPr>
         <p:spPr>
-          <a:xfrm rot="16200000" flipH="1" flipV="1">
-            <a:off x="8466885" y="2368345"/>
-            <a:ext cx="1800000" cy="0"/>
+          <a:xfrm>
+            <a:off x="9700260" y="1655035"/>
+            <a:ext cx="0" cy="1626235"/>
           </a:xfrm>
           <a:prstGeom prst="line">
             <a:avLst/>
@@ -22359,2263 +22434,1923 @@
           </a:fontRef>
         </p:style>
       </p:cxnSp>
-      <p:grpSp>
-        <p:nvGrpSpPr>
-          <p:cNvPr id="3" name="组合 2"/>
-          <p:cNvGrpSpPr/>
-          <p:nvPr/>
-        </p:nvGrpSpPr>
-        <p:grpSpPr>
+      <p:sp>
+        <p:nvSpPr>
+          <p:cNvPr id="138" name="矩形 137"/>
+          <p:cNvSpPr/>
+          <p:nvPr>
+            <p:custDataLst>
+              <p:tags r:id="rId21"/>
+            </p:custDataLst>
+          </p:nvPr>
+        </p:nvSpPr>
+        <p:spPr>
           <a:xfrm>
-            <a:off x="247015" y="3829050"/>
-            <a:ext cx="3140710" cy="2538730"/>
-            <a:chOff x="1269" y="6030"/>
-            <a:chExt cx="4946" cy="3998"/>
+            <a:off x="77470" y="4796155"/>
+            <a:ext cx="935990" cy="791845"/>
           </a:xfrm>
-        </p:grpSpPr>
-        <p:sp>
-          <p:nvSpPr>
-            <p:cNvPr id="138" name="矩形 137"/>
-            <p:cNvSpPr/>
-            <p:nvPr>
-              <p:custDataLst>
-                <p:tags r:id="rId21"/>
-              </p:custDataLst>
-            </p:nvPr>
-          </p:nvSpPr>
-          <p:spPr>
-            <a:xfrm>
-              <a:off x="1269" y="7553"/>
-              <a:ext cx="1474" cy="1247"/>
-            </a:xfrm>
-            <a:prstGeom prst="rect">
-              <a:avLst/>
-            </a:prstGeom>
-            <a:noFill/>
-            <a:ln w="12700">
+          <a:prstGeom prst="rect">
+            <a:avLst/>
+          </a:prstGeom>
+          <a:noFill/>
+          <a:ln w="12700">
+            <a:solidFill>
+              <a:sysClr val="windowText" lastClr="000000"/>
+            </a:solidFill>
+          </a:ln>
+        </p:spPr>
+        <p:style>
+          <a:lnRef idx="2">
+            <a:srgbClr val="005CA2">
+              <a:shade val="50000"/>
+            </a:srgbClr>
+          </a:lnRef>
+          <a:fillRef idx="1">
+            <a:srgbClr val="005CA2"/>
+          </a:fillRef>
+          <a:effectRef idx="0">
+            <a:srgbClr val="005CA2"/>
+          </a:effectRef>
+          <a:fontRef idx="minor">
+            <a:sysClr val="window" lastClr="FFFFFF"/>
+          </a:fontRef>
+        </p:style>
+        <p:txBody>
+          <a:bodyPr rtlCol="0" anchor="ctr"/>
+          <a:p>
+            <a:pPr algn="ctr" fontAlgn="auto">
+              <a:lnSpc>
+                <a:spcPct val="100000"/>
+              </a:lnSpc>
+            </a:pPr>
+            <a:r>
+              <a:rPr lang="zh-CN" altLang="en-US" sz="1500" dirty="0">
+                <a:solidFill>
+                  <a:sysClr val="windowText" lastClr="000000"/>
+                </a:solidFill>
+                <a:latin typeface="Arial" panose="020B0604020202020204" pitchFamily="34" charset="0"/>
+                <a:ea typeface="Microsoft YaHei Light" panose="020B0502040204020203" charset="-122"/>
+                <a:cs typeface="Arial" panose="020B0604020202020204" pitchFamily="34" charset="0"/>
+              </a:rPr>
+              <a:t>Android Malware Attacks</a:t>
+            </a:r>
+            <a:endParaRPr lang="zh-CN" altLang="en-US" sz="1500" dirty="0">
               <a:solidFill>
                 <a:sysClr val="windowText" lastClr="000000"/>
               </a:solidFill>
-            </a:ln>
-          </p:spPr>
-          <p:style>
-            <a:lnRef idx="2">
-              <a:srgbClr val="005CA2">
-                <a:shade val="50000"/>
-              </a:srgbClr>
-            </a:lnRef>
-            <a:fillRef idx="1">
-              <a:srgbClr val="005CA2"/>
-            </a:fillRef>
-            <a:effectRef idx="0">
-              <a:srgbClr val="005CA2"/>
-            </a:effectRef>
-            <a:fontRef idx="minor">
-              <a:sysClr val="window" lastClr="FFFFFF"/>
-            </a:fontRef>
-          </p:style>
-          <p:txBody>
-            <a:bodyPr rtlCol="0" anchor="ctr"/>
-            <a:p>
-              <a:pPr algn="ctr" fontAlgn="auto">
-                <a:lnSpc>
-                  <a:spcPct val="100000"/>
-                </a:lnSpc>
-              </a:pPr>
-              <a:r>
-                <a:rPr lang="zh-CN" altLang="en-US" sz="1500" dirty="0">
-                  <a:solidFill>
-                    <a:sysClr val="windowText" lastClr="000000"/>
-                  </a:solidFill>
-                  <a:latin typeface="Arial" panose="020B0604020202020204" pitchFamily="34" charset="0"/>
-                  <a:ea typeface="Microsoft YaHei Light" panose="020B0502040204020203" charset="-122"/>
-                  <a:cs typeface="Arial" panose="020B0604020202020204" pitchFamily="34" charset="0"/>
-                </a:rPr>
-                <a:t>Android Malware Attacks</a:t>
-              </a:r>
-              <a:endParaRPr lang="zh-CN" altLang="en-US" sz="1500" dirty="0">
+              <a:latin typeface="Arial" panose="020B0604020202020204" pitchFamily="34" charset="0"/>
+              <a:ea typeface="Microsoft YaHei Light" panose="020B0502040204020203" charset="-122"/>
+              <a:cs typeface="Arial" panose="020B0604020202020204" pitchFamily="34" charset="0"/>
+            </a:endParaRPr>
+          </a:p>
+        </p:txBody>
+      </p:sp>
+      <p:sp>
+        <p:nvSpPr>
+          <p:cNvPr id="139" name="矩形 138"/>
+          <p:cNvSpPr/>
+          <p:nvPr>
+            <p:custDataLst>
+              <p:tags r:id="rId22"/>
+            </p:custDataLst>
+          </p:nvPr>
+        </p:nvSpPr>
+        <p:spPr>
+          <a:xfrm>
+            <a:off x="1080770" y="4796155"/>
+            <a:ext cx="935990" cy="791845"/>
+          </a:xfrm>
+          <a:prstGeom prst="rect">
+            <a:avLst/>
+          </a:prstGeom>
+          <a:noFill/>
+          <a:ln w="12700">
+            <a:solidFill>
+              <a:sysClr val="windowText" lastClr="000000"/>
+            </a:solidFill>
+          </a:ln>
+        </p:spPr>
+        <p:style>
+          <a:lnRef idx="2">
+            <a:srgbClr val="005CA2">
+              <a:shade val="50000"/>
+            </a:srgbClr>
+          </a:lnRef>
+          <a:fillRef idx="1">
+            <a:srgbClr val="005CA2"/>
+          </a:fillRef>
+          <a:effectRef idx="0">
+            <a:srgbClr val="005CA2"/>
+          </a:effectRef>
+          <a:fontRef idx="minor">
+            <a:sysClr val="window" lastClr="FFFFFF"/>
+          </a:fontRef>
+        </p:style>
+        <p:txBody>
+          <a:bodyPr rtlCol="0" anchor="ctr"/>
+          <a:p>
+            <a:pPr algn="ctr" fontAlgn="auto">
+              <a:lnSpc>
+                <a:spcPct val="100000"/>
+              </a:lnSpc>
+            </a:pPr>
+            <a:r>
+              <a:rPr lang="zh-CN" altLang="en-US" sz="1500" dirty="0">
                 <a:solidFill>
                   <a:sysClr val="windowText" lastClr="000000"/>
                 </a:solidFill>
                 <a:latin typeface="Arial" panose="020B0604020202020204" pitchFamily="34" charset="0"/>
                 <a:ea typeface="Microsoft YaHei Light" panose="020B0502040204020203" charset="-122"/>
                 <a:cs typeface="Arial" panose="020B0604020202020204" pitchFamily="34" charset="0"/>
-              </a:endParaRPr>
-            </a:p>
-          </p:txBody>
-        </p:sp>
-        <p:sp>
-          <p:nvSpPr>
-            <p:cNvPr id="139" name="矩形 138"/>
-            <p:cNvSpPr/>
-            <p:nvPr>
-              <p:custDataLst>
-                <p:tags r:id="rId22"/>
-              </p:custDataLst>
-            </p:nvPr>
-          </p:nvSpPr>
-          <p:spPr>
-            <a:xfrm>
-              <a:off x="3005" y="7553"/>
-              <a:ext cx="1474" cy="1247"/>
-            </a:xfrm>
-            <a:prstGeom prst="rect">
-              <a:avLst/>
-            </a:prstGeom>
-            <a:noFill/>
-            <a:ln w="12700">
+                <a:sym typeface="Microsoft YaHei Light" panose="020B0502040204020203" charset="-122"/>
+              </a:rPr>
+              <a:t>Window</a:t>
+            </a:r>
+            <a:r>
+              <a:rPr lang="zh-CN" altLang="en-US" sz="1500" dirty="0">
+                <a:solidFill>
+                  <a:sysClr val="windowText" lastClr="000000"/>
+                </a:solidFill>
+                <a:latin typeface="Arial" panose="020B0604020202020204" pitchFamily="34" charset="0"/>
+                <a:ea typeface="Microsoft YaHei Light" panose="020B0502040204020203" charset="-122"/>
+                <a:cs typeface="Arial" panose="020B0604020202020204" pitchFamily="34" charset="0"/>
+              </a:rPr>
+              <a:t> Malware Attacks</a:t>
+            </a:r>
+            <a:endParaRPr lang="zh-CN" altLang="en-US" sz="1500" dirty="0">
               <a:solidFill>
                 <a:sysClr val="windowText" lastClr="000000"/>
               </a:solidFill>
-            </a:ln>
-          </p:spPr>
-          <p:style>
-            <a:lnRef idx="2">
-              <a:srgbClr val="005CA2">
-                <a:shade val="50000"/>
-              </a:srgbClr>
-            </a:lnRef>
-            <a:fillRef idx="1">
-              <a:srgbClr val="005CA2"/>
-            </a:fillRef>
-            <a:effectRef idx="0">
-              <a:srgbClr val="005CA2"/>
-            </a:effectRef>
-            <a:fontRef idx="minor">
-              <a:sysClr val="window" lastClr="FFFFFF"/>
-            </a:fontRef>
-          </p:style>
-          <p:txBody>
-            <a:bodyPr rtlCol="0" anchor="ctr"/>
-            <a:p>
-              <a:pPr algn="ctr" fontAlgn="auto">
-                <a:lnSpc>
-                  <a:spcPct val="100000"/>
-                </a:lnSpc>
-              </a:pPr>
-              <a:r>
-                <a:rPr lang="zh-CN" altLang="en-US" sz="1500" dirty="0">
-                  <a:solidFill>
-                    <a:sysClr val="windowText" lastClr="000000"/>
-                  </a:solidFill>
-                  <a:latin typeface="Arial" panose="020B0604020202020204" pitchFamily="34" charset="0"/>
-                  <a:ea typeface="Microsoft YaHei Light" panose="020B0502040204020203" charset="-122"/>
-                  <a:cs typeface="Arial" panose="020B0604020202020204" pitchFamily="34" charset="0"/>
-                  <a:sym typeface="Microsoft YaHei Light" panose="020B0502040204020203" charset="-122"/>
-                </a:rPr>
-                <a:t>Window</a:t>
-              </a:r>
-              <a:r>
-                <a:rPr lang="zh-CN" altLang="en-US" sz="1500" dirty="0">
-                  <a:solidFill>
-                    <a:sysClr val="windowText" lastClr="000000"/>
-                  </a:solidFill>
-                  <a:latin typeface="Arial" panose="020B0604020202020204" pitchFamily="34" charset="0"/>
-                  <a:ea typeface="Microsoft YaHei Light" panose="020B0502040204020203" charset="-122"/>
-                  <a:cs typeface="Arial" panose="020B0604020202020204" pitchFamily="34" charset="0"/>
-                </a:rPr>
-                <a:t> Malware Attacks</a:t>
-              </a:r>
-              <a:endParaRPr lang="zh-CN" altLang="en-US" sz="1500" dirty="0">
+              <a:latin typeface="Arial" panose="020B0604020202020204" pitchFamily="34" charset="0"/>
+              <a:ea typeface="Microsoft YaHei Light" panose="020B0502040204020203" charset="-122"/>
+              <a:cs typeface="Arial" panose="020B0604020202020204" pitchFamily="34" charset="0"/>
+            </a:endParaRPr>
+          </a:p>
+        </p:txBody>
+      </p:sp>
+      <p:sp>
+        <p:nvSpPr>
+          <p:cNvPr id="140" name="矩形 139"/>
+          <p:cNvSpPr/>
+          <p:nvPr>
+            <p:custDataLst>
+              <p:tags r:id="rId23"/>
+            </p:custDataLst>
+          </p:nvPr>
+        </p:nvSpPr>
+        <p:spPr>
+          <a:xfrm>
+            <a:off x="2084070" y="4796155"/>
+            <a:ext cx="935990" cy="791845"/>
+          </a:xfrm>
+          <a:prstGeom prst="rect">
+            <a:avLst/>
+          </a:prstGeom>
+          <a:noFill/>
+          <a:ln w="12700">
+            <a:solidFill>
+              <a:sysClr val="windowText" lastClr="000000"/>
+            </a:solidFill>
+          </a:ln>
+        </p:spPr>
+        <p:style>
+          <a:lnRef idx="2">
+            <a:srgbClr val="005CA2">
+              <a:shade val="50000"/>
+            </a:srgbClr>
+          </a:lnRef>
+          <a:fillRef idx="1">
+            <a:srgbClr val="005CA2"/>
+          </a:fillRef>
+          <a:effectRef idx="0">
+            <a:srgbClr val="005CA2"/>
+          </a:effectRef>
+          <a:fontRef idx="minor">
+            <a:sysClr val="window" lastClr="FFFFFF"/>
+          </a:fontRef>
+        </p:style>
+        <p:txBody>
+          <a:bodyPr rtlCol="0" anchor="ctr"/>
+          <a:p>
+            <a:pPr algn="ctr" fontAlgn="auto">
+              <a:lnSpc>
+                <a:spcPct val="100000"/>
+              </a:lnSpc>
+            </a:pPr>
+            <a:r>
+              <a:rPr lang="zh-CN" altLang="en-US" sz="1500">
                 <a:solidFill>
                   <a:sysClr val="windowText" lastClr="000000"/>
                 </a:solidFill>
                 <a:latin typeface="Arial" panose="020B0604020202020204" pitchFamily="34" charset="0"/>
                 <a:ea typeface="Microsoft YaHei Light" panose="020B0502040204020203" charset="-122"/>
                 <a:cs typeface="Arial" panose="020B0604020202020204" pitchFamily="34" charset="0"/>
-              </a:endParaRPr>
-            </a:p>
-          </p:txBody>
-        </p:sp>
-        <p:sp>
-          <p:nvSpPr>
-            <p:cNvPr id="140" name="矩形 139"/>
-            <p:cNvSpPr/>
-            <p:nvPr>
-              <p:custDataLst>
-                <p:tags r:id="rId23"/>
-              </p:custDataLst>
-            </p:nvPr>
-          </p:nvSpPr>
-          <p:spPr>
-            <a:xfrm>
-              <a:off x="4741" y="7553"/>
-              <a:ext cx="1474" cy="1247"/>
-            </a:xfrm>
-            <a:prstGeom prst="rect">
-              <a:avLst/>
-            </a:prstGeom>
-            <a:noFill/>
-            <a:ln w="12700">
+              </a:rPr>
+              <a:t>Linux Malware Attacks</a:t>
+            </a:r>
+            <a:endParaRPr lang="zh-CN" altLang="en-US" sz="1500">
               <a:solidFill>
                 <a:sysClr val="windowText" lastClr="000000"/>
               </a:solidFill>
-            </a:ln>
-          </p:spPr>
-          <p:style>
-            <a:lnRef idx="2">
-              <a:srgbClr val="005CA2">
-                <a:shade val="50000"/>
-              </a:srgbClr>
-            </a:lnRef>
-            <a:fillRef idx="1">
-              <a:srgbClr val="005CA2"/>
-            </a:fillRef>
-            <a:effectRef idx="0">
-              <a:srgbClr val="005CA2"/>
-            </a:effectRef>
-            <a:fontRef idx="minor">
-              <a:sysClr val="window" lastClr="FFFFFF"/>
-            </a:fontRef>
-          </p:style>
-          <p:txBody>
-            <a:bodyPr rtlCol="0" anchor="ctr"/>
-            <a:p>
-              <a:pPr algn="ctr" fontAlgn="auto">
-                <a:lnSpc>
-                  <a:spcPct val="100000"/>
-                </a:lnSpc>
-              </a:pPr>
-              <a:r>
-                <a:rPr lang="zh-CN" altLang="en-US" sz="1500">
-                  <a:solidFill>
-                    <a:sysClr val="windowText" lastClr="000000"/>
-                  </a:solidFill>
-                  <a:latin typeface="Arial" panose="020B0604020202020204" pitchFamily="34" charset="0"/>
-                  <a:ea typeface="Microsoft YaHei Light" panose="020B0502040204020203" charset="-122"/>
-                  <a:cs typeface="Arial" panose="020B0604020202020204" pitchFamily="34" charset="0"/>
-                </a:rPr>
-                <a:t>Linux Malware Attacks</a:t>
-              </a:r>
-              <a:endParaRPr lang="zh-CN" altLang="en-US" sz="1500">
+              <a:latin typeface="Arial" panose="020B0604020202020204" pitchFamily="34" charset="0"/>
+              <a:ea typeface="Microsoft YaHei Light" panose="020B0502040204020203" charset="-122"/>
+              <a:cs typeface="Arial" panose="020B0604020202020204" pitchFamily="34" charset="0"/>
+            </a:endParaRPr>
+          </a:p>
+        </p:txBody>
+      </p:sp>
+      <p:sp>
+        <p:nvSpPr>
+          <p:cNvPr id="141" name="矩形 140" descr="7b0a20202020227461726765744964223a202270726f636573734f6e6c696e65576f7264417274220a7d0a"/>
+          <p:cNvSpPr/>
+          <p:nvPr>
+            <p:custDataLst>
+              <p:tags r:id="rId24"/>
+            </p:custDataLst>
+          </p:nvPr>
+        </p:nvSpPr>
+        <p:spPr>
+          <a:xfrm>
+            <a:off x="602615" y="6115685"/>
+            <a:ext cx="899795" cy="360045"/>
+          </a:xfrm>
+          <a:prstGeom prst="rect">
+            <a:avLst/>
+          </a:prstGeom>
+          <a:noFill/>
+          <a:ln w="12700">
+            <a:solidFill>
+              <a:sysClr val="windowText" lastClr="000000"/>
+            </a:solidFill>
+            <a:prstDash val="solid"/>
+          </a:ln>
+        </p:spPr>
+        <p:style>
+          <a:lnRef idx="2">
+            <a:srgbClr val="005CA2">
+              <a:shade val="50000"/>
+            </a:srgbClr>
+          </a:lnRef>
+          <a:fillRef idx="1">
+            <a:srgbClr val="005CA2"/>
+          </a:fillRef>
+          <a:effectRef idx="0">
+            <a:srgbClr val="005CA2"/>
+          </a:effectRef>
+          <a:fontRef idx="minor">
+            <a:sysClr val="window" lastClr="FFFFFF"/>
+          </a:fontRef>
+        </p:style>
+        <p:txBody>
+          <a:bodyPr rtlCol="0" anchor="ctr"/>
+          <a:p>
+            <a:pPr algn="ctr"/>
+            <a:r>
+              <a:rPr lang="zh-CN" altLang="en-US" sz="1500" dirty="0">
                 <a:solidFill>
                   <a:sysClr val="windowText" lastClr="000000"/>
                 </a:solidFill>
                 <a:latin typeface="Arial" panose="020B0604020202020204" pitchFamily="34" charset="0"/>
                 <a:ea typeface="Microsoft YaHei Light" panose="020B0502040204020203" charset="-122"/>
                 <a:cs typeface="Arial" panose="020B0604020202020204" pitchFamily="34" charset="0"/>
-              </a:endParaRPr>
-            </a:p>
-          </p:txBody>
-        </p:sp>
-        <p:sp>
-          <p:nvSpPr>
-            <p:cNvPr id="141" name="矩形 140" descr="7b0a20202020227461726765744964223a202270726f636573734f6e6c696e65576f7264417274220a7d0a"/>
-            <p:cNvSpPr/>
-            <p:nvPr>
-              <p:custDataLst>
-                <p:tags r:id="rId24"/>
-              </p:custDataLst>
-            </p:nvPr>
-          </p:nvSpPr>
-          <p:spPr>
-            <a:xfrm>
-              <a:off x="2161" y="9462"/>
-              <a:ext cx="1417" cy="567"/>
-            </a:xfrm>
-            <a:prstGeom prst="rect">
-              <a:avLst/>
-            </a:prstGeom>
-            <a:noFill/>
-            <a:ln w="12700">
+              </a:rPr>
+              <a:t>MalFox</a:t>
+            </a:r>
+            <a:endParaRPr lang="zh-CN" altLang="en-US" sz="1500" dirty="0">
               <a:solidFill>
                 <a:sysClr val="windowText" lastClr="000000"/>
               </a:solidFill>
-              <a:prstDash val="solid"/>
-            </a:ln>
-          </p:spPr>
-          <p:style>
-            <a:lnRef idx="2">
-              <a:srgbClr val="005CA2">
-                <a:shade val="50000"/>
-              </a:srgbClr>
-            </a:lnRef>
-            <a:fillRef idx="1">
-              <a:srgbClr val="005CA2"/>
-            </a:fillRef>
-            <a:effectRef idx="0">
-              <a:srgbClr val="005CA2"/>
-            </a:effectRef>
-            <a:fontRef idx="minor">
-              <a:sysClr val="window" lastClr="FFFFFF"/>
-            </a:fontRef>
-          </p:style>
-          <p:txBody>
-            <a:bodyPr rtlCol="0" anchor="ctr"/>
-            <a:p>
-              <a:pPr algn="ctr"/>
-              <a:r>
-                <a:rPr lang="zh-CN" altLang="en-US" sz="1500" dirty="0">
-                  <a:solidFill>
-                    <a:sysClr val="windowText" lastClr="000000"/>
-                  </a:solidFill>
-                  <a:latin typeface="Arial" panose="020B0604020202020204" pitchFamily="34" charset="0"/>
-                  <a:ea typeface="Microsoft YaHei Light" panose="020B0502040204020203" charset="-122"/>
-                  <a:cs typeface="Arial" panose="020B0604020202020204" pitchFamily="34" charset="0"/>
-                </a:rPr>
-                <a:t>MalFox</a:t>
-              </a:r>
-              <a:endParaRPr lang="zh-CN" altLang="en-US" sz="1500" dirty="0">
+              <a:latin typeface="Arial" panose="020B0604020202020204" pitchFamily="34" charset="0"/>
+              <a:ea typeface="Microsoft YaHei Light" panose="020B0502040204020203" charset="-122"/>
+              <a:cs typeface="Arial" panose="020B0604020202020204" pitchFamily="34" charset="0"/>
+            </a:endParaRPr>
+          </a:p>
+        </p:txBody>
+      </p:sp>
+      <p:sp>
+        <p:nvSpPr>
+          <p:cNvPr id="142" name="矩形 141"/>
+          <p:cNvSpPr/>
+          <p:nvPr>
+            <p:custDataLst>
+              <p:tags r:id="rId25"/>
+            </p:custDataLst>
+          </p:nvPr>
+        </p:nvSpPr>
+        <p:spPr>
+          <a:xfrm>
+            <a:off x="1711325" y="6115685"/>
+            <a:ext cx="899795" cy="360045"/>
+          </a:xfrm>
+          <a:prstGeom prst="rect">
+            <a:avLst/>
+          </a:prstGeom>
+          <a:noFill/>
+          <a:ln w="12700">
+            <a:solidFill>
+              <a:sysClr val="windowText" lastClr="000000"/>
+            </a:solidFill>
+            <a:prstDash val="solid"/>
+          </a:ln>
+        </p:spPr>
+        <p:style>
+          <a:lnRef idx="2">
+            <a:srgbClr val="005CA2">
+              <a:shade val="50000"/>
+            </a:srgbClr>
+          </a:lnRef>
+          <a:fillRef idx="1">
+            <a:srgbClr val="005CA2"/>
+          </a:fillRef>
+          <a:effectRef idx="0">
+            <a:srgbClr val="005CA2"/>
+          </a:effectRef>
+          <a:fontRef idx="minor">
+            <a:sysClr val="window" lastClr="FFFFFF"/>
+          </a:fontRef>
+        </p:style>
+        <p:txBody>
+          <a:bodyPr rtlCol="0" anchor="ctr"/>
+          <a:p>
+            <a:pPr algn="ctr"/>
+            <a:r>
+              <a:rPr lang="zh-CN" altLang="en-US" sz="1500" dirty="0">
                 <a:solidFill>
                   <a:sysClr val="windowText" lastClr="000000"/>
                 </a:solidFill>
                 <a:latin typeface="Arial" panose="020B0604020202020204" pitchFamily="34" charset="0"/>
                 <a:ea typeface="Microsoft YaHei Light" panose="020B0502040204020203" charset="-122"/>
                 <a:cs typeface="Arial" panose="020B0604020202020204" pitchFamily="34" charset="0"/>
-              </a:endParaRPr>
-            </a:p>
-          </p:txBody>
-        </p:sp>
-        <p:sp>
-          <p:nvSpPr>
-            <p:cNvPr id="142" name="矩形 141"/>
-            <p:cNvSpPr/>
-            <p:nvPr>
-              <p:custDataLst>
-                <p:tags r:id="rId25"/>
-              </p:custDataLst>
-            </p:nvPr>
-          </p:nvSpPr>
-          <p:spPr>
-            <a:xfrm>
-              <a:off x="3907" y="9462"/>
-              <a:ext cx="1417" cy="567"/>
-            </a:xfrm>
-            <a:prstGeom prst="rect">
-              <a:avLst/>
-            </a:prstGeom>
-            <a:noFill/>
-            <a:ln w="12700">
+              </a:rPr>
+              <a:t>MalInfo</a:t>
+            </a:r>
+            <a:endParaRPr lang="zh-CN" altLang="en-US" sz="1500" dirty="0">
               <a:solidFill>
                 <a:sysClr val="windowText" lastClr="000000"/>
               </a:solidFill>
-              <a:prstDash val="solid"/>
-            </a:ln>
-          </p:spPr>
-          <p:style>
-            <a:lnRef idx="2">
-              <a:srgbClr val="005CA2">
-                <a:shade val="50000"/>
-              </a:srgbClr>
-            </a:lnRef>
-            <a:fillRef idx="1">
-              <a:srgbClr val="005CA2"/>
-            </a:fillRef>
-            <a:effectRef idx="0">
-              <a:srgbClr val="005CA2"/>
-            </a:effectRef>
-            <a:fontRef idx="minor">
-              <a:sysClr val="window" lastClr="FFFFFF"/>
-            </a:fontRef>
-          </p:style>
-          <p:txBody>
-            <a:bodyPr rtlCol="0" anchor="ctr"/>
-            <a:p>
-              <a:pPr algn="ctr"/>
-              <a:r>
-                <a:rPr lang="zh-CN" altLang="en-US" sz="1500" dirty="0">
-                  <a:solidFill>
-                    <a:sysClr val="windowText" lastClr="000000"/>
-                  </a:solidFill>
-                  <a:latin typeface="Arial" panose="020B0604020202020204" pitchFamily="34" charset="0"/>
-                  <a:ea typeface="Microsoft YaHei Light" panose="020B0502040204020203" charset="-122"/>
-                  <a:cs typeface="Arial" panose="020B0604020202020204" pitchFamily="34" charset="0"/>
-                </a:rPr>
-                <a:t>MalInfo</a:t>
-              </a:r>
-              <a:endParaRPr lang="zh-CN" altLang="en-US" sz="1500" dirty="0">
+              <a:latin typeface="Arial" panose="020B0604020202020204" pitchFamily="34" charset="0"/>
+              <a:ea typeface="Microsoft YaHei Light" panose="020B0502040204020203" charset="-122"/>
+              <a:cs typeface="Arial" panose="020B0604020202020204" pitchFamily="34" charset="0"/>
+            </a:endParaRPr>
+          </a:p>
+        </p:txBody>
+      </p:sp>
+      <p:cxnSp>
+        <p:nvCxnSpPr>
+          <p:cNvPr id="154" name="直接连接符 153"/>
+          <p:cNvCxnSpPr/>
+          <p:nvPr>
+            <p:custDataLst>
+              <p:tags r:id="rId26"/>
+            </p:custDataLst>
+          </p:nvPr>
+        </p:nvCxnSpPr>
+        <p:spPr>
+          <a:xfrm rot="16200000" flipH="1" flipV="1">
+            <a:off x="1386840" y="4395470"/>
+            <a:ext cx="323850" cy="0"/>
+          </a:xfrm>
+          <a:prstGeom prst="line">
+            <a:avLst/>
+          </a:prstGeom>
+          <a:ln w="25400">
+            <a:solidFill>
+              <a:srgbClr val="C00000"/>
+            </a:solidFill>
+            <a:tailEnd type="none" w="med" len="lg"/>
+          </a:ln>
+        </p:spPr>
+        <p:style>
+          <a:lnRef idx="1">
+            <a:srgbClr val="005CA2"/>
+          </a:lnRef>
+          <a:fillRef idx="0">
+            <a:srgbClr val="005CA2"/>
+          </a:fillRef>
+          <a:effectRef idx="0">
+            <a:srgbClr val="005CA2"/>
+          </a:effectRef>
+          <a:fontRef idx="minor">
+            <a:sysClr val="windowText" lastClr="000000"/>
+          </a:fontRef>
+        </p:style>
+      </p:cxnSp>
+      <p:cxnSp>
+        <p:nvCxnSpPr>
+          <p:cNvPr id="155" name="直接连接符 154"/>
+          <p:cNvCxnSpPr/>
+          <p:nvPr>
+            <p:custDataLst>
+              <p:tags r:id="rId27"/>
+            </p:custDataLst>
+          </p:nvPr>
+        </p:nvCxnSpPr>
+        <p:spPr>
+          <a:xfrm flipH="1">
+            <a:off x="539750" y="4529455"/>
+            <a:ext cx="2009775" cy="0"/>
+          </a:xfrm>
+          <a:prstGeom prst="line">
+            <a:avLst/>
+          </a:prstGeom>
+          <a:ln w="25400">
+            <a:solidFill>
+              <a:srgbClr val="C00000"/>
+            </a:solidFill>
+          </a:ln>
+        </p:spPr>
+        <p:style>
+          <a:lnRef idx="1">
+            <a:srgbClr val="005CA2"/>
+          </a:lnRef>
+          <a:fillRef idx="0">
+            <a:srgbClr val="005CA2"/>
+          </a:fillRef>
+          <a:effectRef idx="0">
+            <a:srgbClr val="005CA2"/>
+          </a:effectRef>
+          <a:fontRef idx="minor">
+            <a:sysClr val="windowText" lastClr="000000"/>
+          </a:fontRef>
+        </p:style>
+      </p:cxnSp>
+      <p:cxnSp>
+        <p:nvCxnSpPr>
+          <p:cNvPr id="156" name="直接连接符 155"/>
+          <p:cNvCxnSpPr/>
+          <p:nvPr>
+            <p:custDataLst>
+              <p:tags r:id="rId28"/>
+            </p:custDataLst>
+          </p:nvPr>
+        </p:nvCxnSpPr>
+        <p:spPr>
+          <a:xfrm rot="16200000" flipH="1" flipV="1">
+            <a:off x="401320" y="4673600"/>
+            <a:ext cx="288290" cy="0"/>
+          </a:xfrm>
+          <a:prstGeom prst="line">
+            <a:avLst/>
+          </a:prstGeom>
+          <a:ln w="25400">
+            <a:solidFill>
+              <a:srgbClr val="C00000"/>
+            </a:solidFill>
+            <a:tailEnd type="triangle" w="med" len="lg"/>
+          </a:ln>
+        </p:spPr>
+        <p:style>
+          <a:lnRef idx="1">
+            <a:srgbClr val="005CA2"/>
+          </a:lnRef>
+          <a:fillRef idx="0">
+            <a:srgbClr val="005CA2"/>
+          </a:fillRef>
+          <a:effectRef idx="0">
+            <a:srgbClr val="005CA2"/>
+          </a:effectRef>
+          <a:fontRef idx="minor">
+            <a:sysClr val="windowText" lastClr="000000"/>
+          </a:fontRef>
+        </p:style>
+      </p:cxnSp>
+      <p:cxnSp>
+        <p:nvCxnSpPr>
+          <p:cNvPr id="157" name="直接连接符 156"/>
+          <p:cNvCxnSpPr/>
+          <p:nvPr>
+            <p:custDataLst>
+              <p:tags r:id="rId29"/>
+            </p:custDataLst>
+          </p:nvPr>
+        </p:nvCxnSpPr>
+        <p:spPr>
+          <a:xfrm rot="16200000" flipH="1" flipV="1">
+            <a:off x="1404620" y="4658360"/>
+            <a:ext cx="288290" cy="0"/>
+          </a:xfrm>
+          <a:prstGeom prst="line">
+            <a:avLst/>
+          </a:prstGeom>
+          <a:ln w="25400">
+            <a:solidFill>
+              <a:srgbClr val="C00000"/>
+            </a:solidFill>
+            <a:tailEnd type="triangle" w="med" len="lg"/>
+          </a:ln>
+        </p:spPr>
+        <p:style>
+          <a:lnRef idx="1">
+            <a:srgbClr val="005CA2"/>
+          </a:lnRef>
+          <a:fillRef idx="0">
+            <a:srgbClr val="005CA2"/>
+          </a:fillRef>
+          <a:effectRef idx="0">
+            <a:srgbClr val="005CA2"/>
+          </a:effectRef>
+          <a:fontRef idx="minor">
+            <a:sysClr val="windowText" lastClr="000000"/>
+          </a:fontRef>
+        </p:style>
+      </p:cxnSp>
+      <p:cxnSp>
+        <p:nvCxnSpPr>
+          <p:cNvPr id="158" name="直接连接符 157"/>
+          <p:cNvCxnSpPr/>
+          <p:nvPr>
+            <p:custDataLst>
+              <p:tags r:id="rId30"/>
+            </p:custDataLst>
+          </p:nvPr>
+        </p:nvCxnSpPr>
+        <p:spPr>
+          <a:xfrm rot="16200000" flipH="1" flipV="1">
+            <a:off x="2407920" y="4658360"/>
+            <a:ext cx="288290" cy="0"/>
+          </a:xfrm>
+          <a:prstGeom prst="line">
+            <a:avLst/>
+          </a:prstGeom>
+          <a:ln w="25400">
+            <a:solidFill>
+              <a:srgbClr val="C00000"/>
+            </a:solidFill>
+            <a:tailEnd type="triangle" w="med" len="lg"/>
+          </a:ln>
+        </p:spPr>
+        <p:style>
+          <a:lnRef idx="1">
+            <a:srgbClr val="005CA2"/>
+          </a:lnRef>
+          <a:fillRef idx="0">
+            <a:srgbClr val="005CA2"/>
+          </a:fillRef>
+          <a:effectRef idx="0">
+            <a:srgbClr val="005CA2"/>
+          </a:effectRef>
+          <a:fontRef idx="minor">
+            <a:sysClr val="windowText" lastClr="000000"/>
+          </a:fontRef>
+        </p:style>
+      </p:cxnSp>
+      <p:sp>
+        <p:nvSpPr>
+          <p:cNvPr id="168" name="矩形 167"/>
+          <p:cNvSpPr/>
+          <p:nvPr>
+            <p:custDataLst>
+              <p:tags r:id="rId31"/>
+            </p:custDataLst>
+          </p:nvPr>
+        </p:nvSpPr>
+        <p:spPr>
+          <a:xfrm>
+            <a:off x="663575" y="3829050"/>
+            <a:ext cx="1764030" cy="396240"/>
+          </a:xfrm>
+          <a:prstGeom prst="rect">
+            <a:avLst/>
+          </a:prstGeom>
+          <a:noFill/>
+          <a:ln>
+            <a:solidFill>
+              <a:sysClr val="windowText" lastClr="000000"/>
+            </a:solidFill>
+          </a:ln>
+        </p:spPr>
+        <p:style>
+          <a:lnRef idx="2">
+            <a:srgbClr val="005CA2">
+              <a:shade val="50000"/>
+            </a:srgbClr>
+          </a:lnRef>
+          <a:fillRef idx="1">
+            <a:srgbClr val="005CA2"/>
+          </a:fillRef>
+          <a:effectRef idx="0">
+            <a:srgbClr val="005CA2"/>
+          </a:effectRef>
+          <a:fontRef idx="minor">
+            <a:sysClr val="window" lastClr="FFFFFF"/>
+          </a:fontRef>
+        </p:style>
+        <p:txBody>
+          <a:bodyPr rtlCol="0" anchor="ctr"/>
+          <a:p>
+            <a:pPr algn="ctr"/>
+            <a:r>
+              <a:rPr lang="zh-CN" altLang="en-US" sz="1500">
                 <a:solidFill>
                   <a:sysClr val="windowText" lastClr="000000"/>
                 </a:solidFill>
                 <a:latin typeface="Arial" panose="020B0604020202020204" pitchFamily="34" charset="0"/>
                 <a:ea typeface="Microsoft YaHei Light" panose="020B0502040204020203" charset="-122"/>
                 <a:cs typeface="Arial" panose="020B0604020202020204" pitchFamily="34" charset="0"/>
-              </a:endParaRPr>
-            </a:p>
-          </p:txBody>
-        </p:sp>
-        <p:cxnSp>
-          <p:nvCxnSpPr>
-            <p:cNvPr id="154" name="直接连接符 153"/>
-            <p:cNvCxnSpPr/>
-            <p:nvPr>
-              <p:custDataLst>
-                <p:tags r:id="rId26"/>
-              </p:custDataLst>
-            </p:nvPr>
-          </p:nvCxnSpPr>
-          <p:spPr>
-            <a:xfrm rot="16200000" flipH="1" flipV="1">
-              <a:off x="3487" y="6900"/>
-              <a:ext cx="510" cy="0"/>
-            </a:xfrm>
-            <a:prstGeom prst="line">
-              <a:avLst/>
-            </a:prstGeom>
-            <a:ln w="25400">
-              <a:solidFill>
-                <a:srgbClr val="C00000"/>
-              </a:solidFill>
-              <a:tailEnd type="none" w="med" len="lg"/>
-            </a:ln>
-          </p:spPr>
-          <p:style>
-            <a:lnRef idx="1">
-              <a:srgbClr val="005CA2"/>
-            </a:lnRef>
-            <a:fillRef idx="0">
-              <a:srgbClr val="005CA2"/>
-            </a:fillRef>
-            <a:effectRef idx="0">
-              <a:srgbClr val="005CA2"/>
-            </a:effectRef>
-            <a:fontRef idx="minor">
-              <a:sysClr val="windowText" lastClr="000000"/>
-            </a:fontRef>
-          </p:style>
-        </p:cxnSp>
-        <p:cxnSp>
-          <p:nvCxnSpPr>
-            <p:cNvPr id="155" name="直接连接符 154"/>
-            <p:cNvCxnSpPr/>
-            <p:nvPr>
-              <p:custDataLst>
-                <p:tags r:id="rId27"/>
-              </p:custDataLst>
-            </p:nvPr>
-          </p:nvCxnSpPr>
-          <p:spPr>
-            <a:xfrm flipH="1" flipV="1">
-              <a:off x="2006" y="7109"/>
-              <a:ext cx="3480" cy="0"/>
-            </a:xfrm>
-            <a:prstGeom prst="line">
-              <a:avLst/>
-            </a:prstGeom>
-            <a:ln w="25400">
-              <a:solidFill>
-                <a:srgbClr val="C00000"/>
-              </a:solidFill>
-            </a:ln>
-          </p:spPr>
-          <p:style>
-            <a:lnRef idx="1">
-              <a:srgbClr val="005CA2"/>
-            </a:lnRef>
-            <a:fillRef idx="0">
-              <a:srgbClr val="005CA2"/>
-            </a:fillRef>
-            <a:effectRef idx="0">
-              <a:srgbClr val="005CA2"/>
-            </a:effectRef>
-            <a:fontRef idx="minor">
-              <a:sysClr val="windowText" lastClr="000000"/>
-            </a:fontRef>
-          </p:style>
-        </p:cxnSp>
-        <p:cxnSp>
-          <p:nvCxnSpPr>
-            <p:cNvPr id="156" name="直接连接符 155"/>
-            <p:cNvCxnSpPr/>
-            <p:nvPr>
-              <p:custDataLst>
-                <p:tags r:id="rId28"/>
-              </p:custDataLst>
-            </p:nvPr>
-          </p:nvCxnSpPr>
-          <p:spPr>
-            <a:xfrm rot="16200000" flipH="1" flipV="1">
-              <a:off x="1780" y="7335"/>
-              <a:ext cx="454" cy="0"/>
-            </a:xfrm>
-            <a:prstGeom prst="line">
-              <a:avLst/>
-            </a:prstGeom>
-            <a:ln w="25400">
-              <a:solidFill>
-                <a:srgbClr val="C00000"/>
-              </a:solidFill>
-              <a:tailEnd type="triangle" w="med" len="lg"/>
-            </a:ln>
-          </p:spPr>
-          <p:style>
-            <a:lnRef idx="1">
-              <a:srgbClr val="005CA2"/>
-            </a:lnRef>
-            <a:fillRef idx="0">
-              <a:srgbClr val="005CA2"/>
-            </a:fillRef>
-            <a:effectRef idx="0">
-              <a:srgbClr val="005CA2"/>
-            </a:effectRef>
-            <a:fontRef idx="minor">
-              <a:sysClr val="windowText" lastClr="000000"/>
-            </a:fontRef>
-          </p:style>
-        </p:cxnSp>
-        <p:cxnSp>
-          <p:nvCxnSpPr>
-            <p:cNvPr id="157" name="直接连接符 156"/>
-            <p:cNvCxnSpPr/>
-            <p:nvPr>
-              <p:custDataLst>
-                <p:tags r:id="rId29"/>
-              </p:custDataLst>
-            </p:nvPr>
-          </p:nvCxnSpPr>
-          <p:spPr>
-            <a:xfrm rot="16200000" flipH="1" flipV="1">
-              <a:off x="3516" y="7335"/>
-              <a:ext cx="454" cy="0"/>
-            </a:xfrm>
-            <a:prstGeom prst="line">
-              <a:avLst/>
-            </a:prstGeom>
-            <a:ln w="25400">
-              <a:solidFill>
-                <a:srgbClr val="C00000"/>
-              </a:solidFill>
-              <a:tailEnd type="triangle" w="med" len="lg"/>
-            </a:ln>
-          </p:spPr>
-          <p:style>
-            <a:lnRef idx="1">
-              <a:srgbClr val="005CA2"/>
-            </a:lnRef>
-            <a:fillRef idx="0">
-              <a:srgbClr val="005CA2"/>
-            </a:fillRef>
-            <a:effectRef idx="0">
-              <a:srgbClr val="005CA2"/>
-            </a:effectRef>
-            <a:fontRef idx="minor">
-              <a:sysClr val="windowText" lastClr="000000"/>
-            </a:fontRef>
-          </p:style>
-        </p:cxnSp>
-        <p:cxnSp>
-          <p:nvCxnSpPr>
-            <p:cNvPr id="158" name="直接连接符 157"/>
-            <p:cNvCxnSpPr/>
-            <p:nvPr>
-              <p:custDataLst>
-                <p:tags r:id="rId30"/>
-              </p:custDataLst>
-            </p:nvPr>
-          </p:nvCxnSpPr>
-          <p:spPr>
-            <a:xfrm rot="16200000" flipH="1" flipV="1">
-              <a:off x="5252" y="7335"/>
-              <a:ext cx="454" cy="0"/>
-            </a:xfrm>
-            <a:prstGeom prst="line">
-              <a:avLst/>
-            </a:prstGeom>
-            <a:ln w="25400">
-              <a:solidFill>
-                <a:srgbClr val="C00000"/>
-              </a:solidFill>
-              <a:tailEnd type="triangle" w="med" len="lg"/>
-            </a:ln>
-          </p:spPr>
-          <p:style>
-            <a:lnRef idx="1">
-              <a:srgbClr val="005CA2"/>
-            </a:lnRef>
-            <a:fillRef idx="0">
-              <a:srgbClr val="005CA2"/>
-            </a:fillRef>
-            <a:effectRef idx="0">
-              <a:srgbClr val="005CA2"/>
-            </a:effectRef>
-            <a:fontRef idx="minor">
-              <a:sysClr val="windowText" lastClr="000000"/>
-            </a:fontRef>
-          </p:style>
-        </p:cxnSp>
-        <p:sp>
-          <p:nvSpPr>
-            <p:cNvPr id="168" name="矩形 167"/>
-            <p:cNvSpPr/>
-            <p:nvPr>
-              <p:custDataLst>
-                <p:tags r:id="rId31"/>
-              </p:custDataLst>
-            </p:nvPr>
-          </p:nvSpPr>
-          <p:spPr>
-            <a:xfrm>
-              <a:off x="2353" y="6030"/>
-              <a:ext cx="2778" cy="624"/>
-            </a:xfrm>
-            <a:prstGeom prst="rect">
-              <a:avLst/>
-            </a:prstGeom>
-            <a:noFill/>
-            <a:ln>
+              </a:rPr>
+              <a:t>Malware Attacks</a:t>
+            </a:r>
+            <a:endParaRPr lang="zh-CN" altLang="en-US" sz="1500">
               <a:solidFill>
                 <a:sysClr val="windowText" lastClr="000000"/>
               </a:solidFill>
-            </a:ln>
-          </p:spPr>
-          <p:style>
-            <a:lnRef idx="2">
-              <a:srgbClr val="005CA2">
-                <a:shade val="50000"/>
-              </a:srgbClr>
-            </a:lnRef>
-            <a:fillRef idx="1">
-              <a:srgbClr val="005CA2"/>
-            </a:fillRef>
-            <a:effectRef idx="0">
-              <a:srgbClr val="005CA2"/>
-            </a:effectRef>
-            <a:fontRef idx="minor">
-              <a:sysClr val="window" lastClr="FFFFFF"/>
-            </a:fontRef>
-          </p:style>
-          <p:txBody>
-            <a:bodyPr rtlCol="0" anchor="ctr"/>
-            <a:p>
-              <a:pPr algn="ctr"/>
-              <a:r>
-                <a:rPr lang="zh-CN" altLang="en-US" sz="1500">
-                  <a:solidFill>
-                    <a:sysClr val="windowText" lastClr="000000"/>
-                  </a:solidFill>
-                  <a:latin typeface="Arial" panose="020B0604020202020204" pitchFamily="34" charset="0"/>
-                  <a:ea typeface="Microsoft YaHei Light" panose="020B0502040204020203" charset="-122"/>
-                  <a:cs typeface="Arial" panose="020B0604020202020204" pitchFamily="34" charset="0"/>
-                </a:rPr>
-                <a:t>Malware Attacks</a:t>
-              </a:r>
-              <a:endParaRPr lang="zh-CN" altLang="en-US" sz="1500">
+              <a:latin typeface="Arial" panose="020B0604020202020204" pitchFamily="34" charset="0"/>
+              <a:ea typeface="Microsoft YaHei Light" panose="020B0502040204020203" charset="-122"/>
+              <a:cs typeface="Arial" panose="020B0604020202020204" pitchFamily="34" charset="0"/>
+            </a:endParaRPr>
+          </a:p>
+        </p:txBody>
+      </p:sp>
+      <p:cxnSp>
+        <p:nvCxnSpPr>
+          <p:cNvPr id="169" name="直接连接符 168"/>
+          <p:cNvCxnSpPr/>
+          <p:nvPr>
+            <p:custDataLst>
+              <p:tags r:id="rId32"/>
+            </p:custDataLst>
+          </p:nvPr>
+        </p:nvCxnSpPr>
+        <p:spPr>
+          <a:xfrm rot="16200000" flipH="1" flipV="1">
+            <a:off x="926465" y="5997575"/>
+            <a:ext cx="252095" cy="0"/>
+          </a:xfrm>
+          <a:prstGeom prst="line">
+            <a:avLst/>
+          </a:prstGeom>
+          <a:ln w="25400">
+            <a:solidFill>
+              <a:srgbClr val="C00000"/>
+            </a:solidFill>
+            <a:tailEnd type="triangle" w="med" len="lg"/>
+          </a:ln>
+        </p:spPr>
+        <p:style>
+          <a:lnRef idx="1">
+            <a:srgbClr val="005CA2"/>
+          </a:lnRef>
+          <a:fillRef idx="0">
+            <a:srgbClr val="005CA2"/>
+          </a:fillRef>
+          <a:effectRef idx="0">
+            <a:srgbClr val="005CA2"/>
+          </a:effectRef>
+          <a:fontRef idx="minor">
+            <a:sysClr val="windowText" lastClr="000000"/>
+          </a:fontRef>
+        </p:style>
+      </p:cxnSp>
+      <p:cxnSp>
+        <p:nvCxnSpPr>
+          <p:cNvPr id="170" name="直接连接符 169"/>
+          <p:cNvCxnSpPr/>
+          <p:nvPr>
+            <p:custDataLst>
+              <p:tags r:id="rId33"/>
+            </p:custDataLst>
+          </p:nvPr>
+        </p:nvCxnSpPr>
+        <p:spPr>
+          <a:xfrm rot="16200000" flipH="1" flipV="1">
+            <a:off x="2035810" y="5997575"/>
+            <a:ext cx="252095" cy="0"/>
+          </a:xfrm>
+          <a:prstGeom prst="line">
+            <a:avLst/>
+          </a:prstGeom>
+          <a:ln w="25400">
+            <a:solidFill>
+              <a:srgbClr val="C00000"/>
+            </a:solidFill>
+            <a:tailEnd type="triangle" w="med" len="lg"/>
+          </a:ln>
+        </p:spPr>
+        <p:style>
+          <a:lnRef idx="1">
+            <a:srgbClr val="005CA2"/>
+          </a:lnRef>
+          <a:fillRef idx="0">
+            <a:srgbClr val="005CA2"/>
+          </a:fillRef>
+          <a:effectRef idx="0">
+            <a:srgbClr val="005CA2"/>
+          </a:effectRef>
+          <a:fontRef idx="minor">
+            <a:sysClr val="windowText" lastClr="000000"/>
+          </a:fontRef>
+        </p:style>
+      </p:cxnSp>
+      <p:cxnSp>
+        <p:nvCxnSpPr>
+          <p:cNvPr id="171" name="直接连接符 170"/>
+          <p:cNvCxnSpPr/>
+          <p:nvPr>
+            <p:custDataLst>
+              <p:tags r:id="rId34"/>
+            </p:custDataLst>
+          </p:nvPr>
+        </p:nvCxnSpPr>
+        <p:spPr>
+          <a:xfrm flipH="1">
+            <a:off x="1052195" y="5871210"/>
+            <a:ext cx="1108075" cy="635"/>
+          </a:xfrm>
+          <a:prstGeom prst="line">
+            <a:avLst/>
+          </a:prstGeom>
+          <a:ln w="25400">
+            <a:solidFill>
+              <a:srgbClr val="C00000"/>
+            </a:solidFill>
+          </a:ln>
+        </p:spPr>
+        <p:style>
+          <a:lnRef idx="1">
+            <a:srgbClr val="005CA2"/>
+          </a:lnRef>
+          <a:fillRef idx="0">
+            <a:srgbClr val="005CA2"/>
+          </a:fillRef>
+          <a:effectRef idx="0">
+            <a:srgbClr val="005CA2"/>
+          </a:effectRef>
+          <a:fontRef idx="minor">
+            <a:sysClr val="windowText" lastClr="000000"/>
+          </a:fontRef>
+        </p:style>
+      </p:cxnSp>
+      <p:cxnSp>
+        <p:nvCxnSpPr>
+          <p:cNvPr id="172" name="直接连接符 171"/>
+          <p:cNvCxnSpPr/>
+          <p:nvPr>
+            <p:custDataLst>
+              <p:tags r:id="rId35"/>
+            </p:custDataLst>
+          </p:nvPr>
+        </p:nvCxnSpPr>
+        <p:spPr>
+          <a:xfrm>
+            <a:off x="1609408" y="5585778"/>
+            <a:ext cx="4445" cy="288925"/>
+          </a:xfrm>
+          <a:prstGeom prst="line">
+            <a:avLst/>
+          </a:prstGeom>
+          <a:ln w="25400">
+            <a:solidFill>
+              <a:srgbClr val="C00000"/>
+            </a:solidFill>
+            <a:tailEnd type="none" w="med" len="lg"/>
+          </a:ln>
+        </p:spPr>
+        <p:style>
+          <a:lnRef idx="1">
+            <a:srgbClr val="005CA2"/>
+          </a:lnRef>
+          <a:fillRef idx="0">
+            <a:srgbClr val="005CA2"/>
+          </a:fillRef>
+          <a:effectRef idx="0">
+            <a:srgbClr val="005CA2"/>
+          </a:effectRef>
+          <a:fontRef idx="minor">
+            <a:sysClr val="windowText" lastClr="000000"/>
+          </a:fontRef>
+        </p:style>
+      </p:cxnSp>
+      <p:sp>
+        <p:nvSpPr>
+          <p:cNvPr id="143" name="矩形 142"/>
+          <p:cNvSpPr/>
+          <p:nvPr>
+            <p:custDataLst>
+              <p:tags r:id="rId36"/>
+            </p:custDataLst>
+          </p:nvPr>
+        </p:nvSpPr>
+        <p:spPr>
+          <a:xfrm>
+            <a:off x="4331335" y="4796155"/>
+            <a:ext cx="1007745" cy="791845"/>
+          </a:xfrm>
+          <a:prstGeom prst="rect">
+            <a:avLst/>
+          </a:prstGeom>
+          <a:solidFill>
+            <a:sysClr val="window" lastClr="FFFFFF"/>
+          </a:solidFill>
+          <a:ln w="12700">
+            <a:solidFill>
+              <a:sysClr val="windowText" lastClr="000000"/>
+            </a:solidFill>
+          </a:ln>
+        </p:spPr>
+        <p:style>
+          <a:lnRef idx="2">
+            <a:srgbClr val="005CA2">
+              <a:shade val="50000"/>
+            </a:srgbClr>
+          </a:lnRef>
+          <a:fillRef idx="1">
+            <a:srgbClr val="005CA2"/>
+          </a:fillRef>
+          <a:effectRef idx="0">
+            <a:srgbClr val="005CA2"/>
+          </a:effectRef>
+          <a:fontRef idx="minor">
+            <a:sysClr val="window" lastClr="FFFFFF"/>
+          </a:fontRef>
+        </p:style>
+        <p:txBody>
+          <a:bodyPr rtlCol="0" anchor="ctr"/>
+          <a:p>
+            <a:pPr algn="ctr" fontAlgn="auto">
+              <a:lnSpc>
+                <a:spcPct val="100000"/>
+              </a:lnSpc>
+            </a:pPr>
+            <a:r>
+              <a:rPr lang="zh-CN" altLang="en-US" sz="1500">
                 <a:solidFill>
                   <a:sysClr val="windowText" lastClr="000000"/>
                 </a:solidFill>
                 <a:latin typeface="Arial" panose="020B0604020202020204" pitchFamily="34" charset="0"/>
                 <a:ea typeface="Microsoft YaHei Light" panose="020B0502040204020203" charset="-122"/>
                 <a:cs typeface="Arial" panose="020B0604020202020204" pitchFamily="34" charset="0"/>
-              </a:endParaRPr>
-            </a:p>
-          </p:txBody>
-        </p:sp>
-        <p:cxnSp>
-          <p:nvCxnSpPr>
-            <p:cNvPr id="169" name="直接连接符 168"/>
-            <p:cNvCxnSpPr/>
-            <p:nvPr>
-              <p:custDataLst>
-                <p:tags r:id="rId32"/>
-              </p:custDataLst>
-            </p:nvPr>
-          </p:nvCxnSpPr>
-          <p:spPr>
-            <a:xfrm rot="16200000" flipH="1" flipV="1">
-              <a:off x="2671" y="9276"/>
-              <a:ext cx="397" cy="0"/>
-            </a:xfrm>
-            <a:prstGeom prst="line">
-              <a:avLst/>
-            </a:prstGeom>
-            <a:ln w="25400">
-              <a:solidFill>
-                <a:srgbClr val="C00000"/>
-              </a:solidFill>
-              <a:tailEnd type="triangle" w="med" len="lg"/>
-            </a:ln>
-          </p:spPr>
-          <p:style>
-            <a:lnRef idx="1">
-              <a:srgbClr val="005CA2"/>
-            </a:lnRef>
-            <a:fillRef idx="0">
-              <a:srgbClr val="005CA2"/>
-            </a:fillRef>
-            <a:effectRef idx="0">
-              <a:srgbClr val="005CA2"/>
-            </a:effectRef>
-            <a:fontRef idx="minor">
-              <a:sysClr val="windowText" lastClr="000000"/>
-            </a:fontRef>
-          </p:style>
-        </p:cxnSp>
-        <p:cxnSp>
-          <p:nvCxnSpPr>
-            <p:cNvPr id="170" name="直接连接符 169"/>
-            <p:cNvCxnSpPr/>
-            <p:nvPr>
-              <p:custDataLst>
-                <p:tags r:id="rId33"/>
-              </p:custDataLst>
-            </p:nvPr>
-          </p:nvCxnSpPr>
-          <p:spPr>
-            <a:xfrm rot="16200000" flipH="1" flipV="1">
-              <a:off x="4418" y="9276"/>
-              <a:ext cx="397" cy="0"/>
-            </a:xfrm>
-            <a:prstGeom prst="line">
-              <a:avLst/>
-            </a:prstGeom>
-            <a:ln w="25400">
-              <a:solidFill>
-                <a:srgbClr val="C00000"/>
-              </a:solidFill>
-              <a:tailEnd type="triangle" w="med" len="lg"/>
-            </a:ln>
-          </p:spPr>
-          <p:style>
-            <a:lnRef idx="1">
-              <a:srgbClr val="005CA2"/>
-            </a:lnRef>
-            <a:fillRef idx="0">
-              <a:srgbClr val="005CA2"/>
-            </a:fillRef>
-            <a:effectRef idx="0">
-              <a:srgbClr val="005CA2"/>
-            </a:effectRef>
-            <a:fontRef idx="minor">
-              <a:sysClr val="windowText" lastClr="000000"/>
-            </a:fontRef>
-          </p:style>
-        </p:cxnSp>
-        <p:cxnSp>
-          <p:nvCxnSpPr>
-            <p:cNvPr id="171" name="直接连接符 170"/>
-            <p:cNvCxnSpPr/>
-            <p:nvPr>
-              <p:custDataLst>
-                <p:tags r:id="rId34"/>
-              </p:custDataLst>
-            </p:nvPr>
-          </p:nvCxnSpPr>
-          <p:spPr>
-            <a:xfrm flipH="1">
-              <a:off x="2869" y="9077"/>
-              <a:ext cx="1745" cy="1"/>
-            </a:xfrm>
-            <a:prstGeom prst="line">
-              <a:avLst/>
-            </a:prstGeom>
-            <a:ln w="25400">
-              <a:solidFill>
-                <a:srgbClr val="C00000"/>
-              </a:solidFill>
-            </a:ln>
-          </p:spPr>
-          <p:style>
-            <a:lnRef idx="1">
-              <a:srgbClr val="005CA2"/>
-            </a:lnRef>
-            <a:fillRef idx="0">
-              <a:srgbClr val="005CA2"/>
-            </a:fillRef>
-            <a:effectRef idx="0">
-              <a:srgbClr val="005CA2"/>
-            </a:effectRef>
-            <a:fontRef idx="minor">
-              <a:sysClr val="windowText" lastClr="000000"/>
-            </a:fontRef>
-          </p:style>
-        </p:cxnSp>
-        <p:cxnSp>
-          <p:nvCxnSpPr>
-            <p:cNvPr id="172" name="直接连接符 171"/>
-            <p:cNvCxnSpPr/>
-            <p:nvPr>
-              <p:custDataLst>
-                <p:tags r:id="rId35"/>
-              </p:custDataLst>
-            </p:nvPr>
-          </p:nvCxnSpPr>
-          <p:spPr>
-            <a:xfrm rot="16200000" flipH="1" flipV="1">
-              <a:off x="3605" y="8937"/>
-              <a:ext cx="283" cy="0"/>
-            </a:xfrm>
-            <a:prstGeom prst="line">
-              <a:avLst/>
-            </a:prstGeom>
-            <a:ln w="25400">
-              <a:solidFill>
-                <a:srgbClr val="C00000"/>
-              </a:solidFill>
-              <a:tailEnd type="none" w="med" len="lg"/>
-            </a:ln>
-          </p:spPr>
-          <p:style>
-            <a:lnRef idx="1">
-              <a:srgbClr val="005CA2"/>
-            </a:lnRef>
-            <a:fillRef idx="0">
-              <a:srgbClr val="005CA2"/>
-            </a:fillRef>
-            <a:effectRef idx="0">
-              <a:srgbClr val="005CA2"/>
-            </a:effectRef>
-            <a:fontRef idx="minor">
-              <a:sysClr val="windowText" lastClr="000000"/>
-            </a:fontRef>
-          </p:style>
-        </p:cxnSp>
-      </p:grpSp>
-      <p:grpSp>
-        <p:nvGrpSpPr>
-          <p:cNvPr id="5" name="组合 4"/>
-          <p:cNvGrpSpPr/>
-          <p:nvPr/>
-        </p:nvGrpSpPr>
-        <p:grpSpPr>
-          <a:xfrm>
-            <a:off x="3770630" y="3829050"/>
-            <a:ext cx="3384550" cy="2538730"/>
-            <a:chOff x="6818" y="6030"/>
-            <a:chExt cx="5330" cy="3998"/>
-          </a:xfrm>
-        </p:grpSpPr>
-        <p:sp>
-          <p:nvSpPr>
-            <p:cNvPr id="143" name="矩形 142"/>
-            <p:cNvSpPr/>
-            <p:nvPr>
-              <p:custDataLst>
-                <p:tags r:id="rId36"/>
-              </p:custDataLst>
-            </p:nvPr>
-          </p:nvSpPr>
-          <p:spPr>
-            <a:xfrm>
-              <a:off x="6818" y="7553"/>
-              <a:ext cx="1587" cy="1247"/>
-            </a:xfrm>
-            <a:prstGeom prst="rect">
-              <a:avLst/>
-            </a:prstGeom>
-            <a:solidFill>
-              <a:sysClr val="window" lastClr="FFFFFF"/>
-            </a:solidFill>
-            <a:ln w="12700">
+                <a:sym typeface="Microsoft YaHei Light" panose="020B0502040204020203" charset="-122"/>
+              </a:rPr>
+              <a:t>Android</a:t>
+            </a:r>
+            <a:r>
+              <a:rPr lang="zh-CN" altLang="en-US" sz="1500">
+                <a:solidFill>
+                  <a:sysClr val="windowText" lastClr="000000"/>
+                </a:solidFill>
+                <a:latin typeface="Arial" panose="020B0604020202020204" pitchFamily="34" charset="0"/>
+                <a:ea typeface="Microsoft YaHei Light" panose="020B0502040204020203" charset="-122"/>
+                <a:cs typeface="Arial" panose="020B0604020202020204" pitchFamily="34" charset="0"/>
+              </a:rPr>
+              <a:t> Malware Defenses</a:t>
+            </a:r>
+            <a:endParaRPr lang="zh-CN" altLang="en-US" sz="1500">
               <a:solidFill>
                 <a:sysClr val="windowText" lastClr="000000"/>
               </a:solidFill>
-            </a:ln>
-          </p:spPr>
-          <p:style>
-            <a:lnRef idx="2">
-              <a:srgbClr val="005CA2">
-                <a:shade val="50000"/>
-              </a:srgbClr>
-            </a:lnRef>
-            <a:fillRef idx="1">
-              <a:srgbClr val="005CA2"/>
-            </a:fillRef>
-            <a:effectRef idx="0">
-              <a:srgbClr val="005CA2"/>
-            </a:effectRef>
-            <a:fontRef idx="minor">
-              <a:sysClr val="window" lastClr="FFFFFF"/>
-            </a:fontRef>
-          </p:style>
-          <p:txBody>
-            <a:bodyPr rtlCol="0" anchor="ctr"/>
-            <a:p>
-              <a:pPr algn="ctr" fontAlgn="auto">
-                <a:lnSpc>
-                  <a:spcPct val="100000"/>
-                </a:lnSpc>
-              </a:pPr>
-              <a:r>
-                <a:rPr lang="zh-CN" altLang="en-US" sz="1500">
-                  <a:solidFill>
-                    <a:sysClr val="windowText" lastClr="000000"/>
-                  </a:solidFill>
-                  <a:latin typeface="Arial" panose="020B0604020202020204" pitchFamily="34" charset="0"/>
-                  <a:ea typeface="Microsoft YaHei Light" panose="020B0502040204020203" charset="-122"/>
-                  <a:cs typeface="Arial" panose="020B0604020202020204" pitchFamily="34" charset="0"/>
-                  <a:sym typeface="Microsoft YaHei Light" panose="020B0502040204020203" charset="-122"/>
-                </a:rPr>
-                <a:t>Android</a:t>
-              </a:r>
-              <a:r>
-                <a:rPr lang="zh-CN" altLang="en-US" sz="1500">
-                  <a:solidFill>
-                    <a:sysClr val="windowText" lastClr="000000"/>
-                  </a:solidFill>
-                  <a:latin typeface="Arial" panose="020B0604020202020204" pitchFamily="34" charset="0"/>
-                  <a:ea typeface="Microsoft YaHei Light" panose="020B0502040204020203" charset="-122"/>
-                  <a:cs typeface="Arial" panose="020B0604020202020204" pitchFamily="34" charset="0"/>
-                </a:rPr>
-                <a:t> Malware Defenses</a:t>
-              </a:r>
-              <a:endParaRPr lang="zh-CN" altLang="en-US" sz="1500">
+              <a:latin typeface="Arial" panose="020B0604020202020204" pitchFamily="34" charset="0"/>
+              <a:ea typeface="Microsoft YaHei Light" panose="020B0502040204020203" charset="-122"/>
+              <a:cs typeface="Arial" panose="020B0604020202020204" pitchFamily="34" charset="0"/>
+            </a:endParaRPr>
+          </a:p>
+        </p:txBody>
+      </p:sp>
+      <p:sp>
+        <p:nvSpPr>
+          <p:cNvPr id="144" name="矩形 143"/>
+          <p:cNvSpPr/>
+          <p:nvPr>
+            <p:custDataLst>
+              <p:tags r:id="rId37"/>
+            </p:custDataLst>
+          </p:nvPr>
+        </p:nvSpPr>
+        <p:spPr>
+          <a:xfrm>
+            <a:off x="6532880" y="4796155"/>
+            <a:ext cx="1005205" cy="791845"/>
+          </a:xfrm>
+          <a:prstGeom prst="rect">
+            <a:avLst/>
+          </a:prstGeom>
+          <a:solidFill>
+            <a:sysClr val="window" lastClr="FFFFFF"/>
+          </a:solidFill>
+          <a:ln w="12700">
+            <a:solidFill>
+              <a:sysClr val="windowText" lastClr="000000"/>
+            </a:solidFill>
+          </a:ln>
+        </p:spPr>
+        <p:style>
+          <a:lnRef idx="2">
+            <a:srgbClr val="005CA2">
+              <a:shade val="50000"/>
+            </a:srgbClr>
+          </a:lnRef>
+          <a:fillRef idx="1">
+            <a:srgbClr val="005CA2"/>
+          </a:fillRef>
+          <a:effectRef idx="0">
+            <a:srgbClr val="005CA2"/>
+          </a:effectRef>
+          <a:fontRef idx="minor">
+            <a:sysClr val="window" lastClr="FFFFFF"/>
+          </a:fontRef>
+        </p:style>
+        <p:txBody>
+          <a:bodyPr rtlCol="0" anchor="ctr"/>
+          <a:p>
+            <a:pPr algn="ctr" fontAlgn="auto">
+              <a:lnSpc>
+                <a:spcPct val="100000"/>
+              </a:lnSpc>
+            </a:pPr>
+            <a:r>
+              <a:rPr lang="en-US" altLang="zh-CN" sz="1500">
                 <a:solidFill>
                   <a:sysClr val="windowText" lastClr="000000"/>
                 </a:solidFill>
                 <a:latin typeface="Arial" panose="020B0604020202020204" pitchFamily="34" charset="0"/>
                 <a:ea typeface="Microsoft YaHei Light" panose="020B0502040204020203" charset="-122"/>
                 <a:cs typeface="Arial" panose="020B0604020202020204" pitchFamily="34" charset="0"/>
-              </a:endParaRPr>
-            </a:p>
-          </p:txBody>
-        </p:sp>
-        <p:sp>
-          <p:nvSpPr>
-            <p:cNvPr id="144" name="矩形 143"/>
-            <p:cNvSpPr/>
-            <p:nvPr>
-              <p:custDataLst>
-                <p:tags r:id="rId37"/>
-              </p:custDataLst>
-            </p:nvPr>
-          </p:nvSpPr>
-          <p:spPr>
-            <a:xfrm>
-              <a:off x="10562" y="7553"/>
-              <a:ext cx="1587" cy="1247"/>
-            </a:xfrm>
-            <a:prstGeom prst="rect">
-              <a:avLst/>
-            </a:prstGeom>
-            <a:solidFill>
-              <a:sysClr val="window" lastClr="FFFFFF"/>
-            </a:solidFill>
-            <a:ln w="12700">
+              </a:rPr>
+              <a:t>Windows</a:t>
+            </a:r>
+            <a:r>
+              <a:rPr lang="zh-CN" altLang="en-US" sz="1500">
+                <a:solidFill>
+                  <a:sysClr val="windowText" lastClr="000000"/>
+                </a:solidFill>
+                <a:latin typeface="Arial" panose="020B0604020202020204" pitchFamily="34" charset="0"/>
+                <a:ea typeface="Microsoft YaHei Light" panose="020B0502040204020203" charset="-122"/>
+                <a:cs typeface="Arial" panose="020B0604020202020204" pitchFamily="34" charset="0"/>
+              </a:rPr>
+              <a:t> Malware Defenses</a:t>
+            </a:r>
+            <a:endParaRPr lang="zh-CN" altLang="en-US" sz="1500">
               <a:solidFill>
                 <a:sysClr val="windowText" lastClr="000000"/>
               </a:solidFill>
-            </a:ln>
-          </p:spPr>
-          <p:style>
-            <a:lnRef idx="2">
-              <a:srgbClr val="005CA2">
-                <a:shade val="50000"/>
-              </a:srgbClr>
-            </a:lnRef>
-            <a:fillRef idx="1">
-              <a:srgbClr val="005CA2"/>
-            </a:fillRef>
-            <a:effectRef idx="0">
-              <a:srgbClr val="005CA2"/>
-            </a:effectRef>
-            <a:fontRef idx="minor">
-              <a:sysClr val="window" lastClr="FFFFFF"/>
-            </a:fontRef>
-          </p:style>
-          <p:txBody>
-            <a:bodyPr rtlCol="0" anchor="ctr"/>
-            <a:p>
-              <a:pPr algn="ctr" fontAlgn="auto">
-                <a:lnSpc>
-                  <a:spcPct val="100000"/>
-                </a:lnSpc>
-              </a:pPr>
-              <a:r>
-                <a:rPr lang="zh-CN" altLang="en-US" sz="1500">
-                  <a:solidFill>
-                    <a:sysClr val="windowText" lastClr="000000"/>
-                  </a:solidFill>
-                  <a:latin typeface="Arial" panose="020B0604020202020204" pitchFamily="34" charset="0"/>
-                  <a:ea typeface="Microsoft YaHei Light" panose="020B0502040204020203" charset="-122"/>
-                  <a:cs typeface="Arial" panose="020B0604020202020204" pitchFamily="34" charset="0"/>
-                </a:rPr>
-                <a:t>Linux Malware Defenses</a:t>
-              </a:r>
-              <a:endParaRPr lang="zh-CN" altLang="en-US" sz="1500">
+              <a:latin typeface="Arial" panose="020B0604020202020204" pitchFamily="34" charset="0"/>
+              <a:ea typeface="Microsoft YaHei Light" panose="020B0502040204020203" charset="-122"/>
+              <a:cs typeface="Arial" panose="020B0604020202020204" pitchFamily="34" charset="0"/>
+            </a:endParaRPr>
+          </a:p>
+        </p:txBody>
+      </p:sp>
+      <p:cxnSp>
+        <p:nvCxnSpPr>
+          <p:cNvPr id="173" name="直接连接符 172"/>
+          <p:cNvCxnSpPr/>
+          <p:nvPr>
+            <p:custDataLst>
+              <p:tags r:id="rId38"/>
+            </p:custDataLst>
+          </p:nvPr>
+        </p:nvCxnSpPr>
+        <p:spPr>
+          <a:xfrm rot="16200000" flipH="1" flipV="1">
+            <a:off x="6724015" y="5980430"/>
+            <a:ext cx="252095" cy="0"/>
+          </a:xfrm>
+          <a:prstGeom prst="line">
+            <a:avLst/>
+          </a:prstGeom>
+          <a:ln w="25400">
+            <a:solidFill>
+              <a:srgbClr val="C00000"/>
+            </a:solidFill>
+            <a:tailEnd type="triangle" w="med" len="lg"/>
+          </a:ln>
+        </p:spPr>
+        <p:style>
+          <a:lnRef idx="1">
+            <a:srgbClr val="005CA2"/>
+          </a:lnRef>
+          <a:fillRef idx="0">
+            <a:srgbClr val="005CA2"/>
+          </a:fillRef>
+          <a:effectRef idx="0">
+            <a:srgbClr val="005CA2"/>
+          </a:effectRef>
+          <a:fontRef idx="minor">
+            <a:sysClr val="windowText" lastClr="000000"/>
+          </a:fontRef>
+        </p:style>
+      </p:cxnSp>
+      <p:cxnSp>
+        <p:nvCxnSpPr>
+          <p:cNvPr id="174" name="直接连接符 173"/>
+          <p:cNvCxnSpPr/>
+          <p:nvPr>
+            <p:custDataLst>
+              <p:tags r:id="rId39"/>
+            </p:custDataLst>
+          </p:nvPr>
+        </p:nvCxnSpPr>
+        <p:spPr>
+          <a:xfrm rot="16200000" flipH="1" flipV="1">
+            <a:off x="7565390" y="5980430"/>
+            <a:ext cx="252095" cy="0"/>
+          </a:xfrm>
+          <a:prstGeom prst="line">
+            <a:avLst/>
+          </a:prstGeom>
+          <a:ln w="25400">
+            <a:solidFill>
+              <a:srgbClr val="C00000"/>
+            </a:solidFill>
+            <a:tailEnd type="triangle" w="med" len="lg"/>
+          </a:ln>
+        </p:spPr>
+        <p:style>
+          <a:lnRef idx="1">
+            <a:srgbClr val="005CA2"/>
+          </a:lnRef>
+          <a:fillRef idx="0">
+            <a:srgbClr val="005CA2"/>
+          </a:fillRef>
+          <a:effectRef idx="0">
+            <a:srgbClr val="005CA2"/>
+          </a:effectRef>
+          <a:fontRef idx="minor">
+            <a:sysClr val="windowText" lastClr="000000"/>
+          </a:fontRef>
+        </p:style>
+      </p:cxnSp>
+      <p:cxnSp>
+        <p:nvCxnSpPr>
+          <p:cNvPr id="175" name="直接连接符 174"/>
+          <p:cNvCxnSpPr/>
+          <p:nvPr>
+            <p:custDataLst>
+              <p:tags r:id="rId40"/>
+            </p:custDataLst>
+          </p:nvPr>
+        </p:nvCxnSpPr>
+        <p:spPr>
+          <a:xfrm flipH="1">
+            <a:off x="5984240" y="5857240"/>
+            <a:ext cx="1716405" cy="0"/>
+          </a:xfrm>
+          <a:prstGeom prst="line">
+            <a:avLst/>
+          </a:prstGeom>
+          <a:ln w="25400">
+            <a:solidFill>
+              <a:srgbClr val="C00000"/>
+            </a:solidFill>
+          </a:ln>
+        </p:spPr>
+        <p:style>
+          <a:lnRef idx="1">
+            <a:srgbClr val="005CA2"/>
+          </a:lnRef>
+          <a:fillRef idx="0">
+            <a:srgbClr val="005CA2"/>
+          </a:fillRef>
+          <a:effectRef idx="0">
+            <a:srgbClr val="005CA2"/>
+          </a:effectRef>
+          <a:fontRef idx="minor">
+            <a:sysClr val="windowText" lastClr="000000"/>
+          </a:fontRef>
+        </p:style>
+      </p:cxnSp>
+      <p:cxnSp>
+        <p:nvCxnSpPr>
+          <p:cNvPr id="176" name="直接连接符 175"/>
+          <p:cNvCxnSpPr/>
+          <p:nvPr>
+            <p:custDataLst>
+              <p:tags r:id="rId41"/>
+            </p:custDataLst>
+          </p:nvPr>
+        </p:nvCxnSpPr>
+        <p:spPr>
+          <a:xfrm>
+            <a:off x="6850063" y="5590858"/>
+            <a:ext cx="0" cy="273050"/>
+          </a:xfrm>
+          <a:prstGeom prst="line">
+            <a:avLst/>
+          </a:prstGeom>
+          <a:ln w="25400">
+            <a:solidFill>
+              <a:srgbClr val="C00000"/>
+            </a:solidFill>
+            <a:tailEnd type="none" w="med" len="lg"/>
+          </a:ln>
+        </p:spPr>
+        <p:style>
+          <a:lnRef idx="1">
+            <a:srgbClr val="005CA2"/>
+          </a:lnRef>
+          <a:fillRef idx="0">
+            <a:srgbClr val="005CA2"/>
+          </a:fillRef>
+          <a:effectRef idx="0">
+            <a:srgbClr val="005CA2"/>
+          </a:effectRef>
+          <a:fontRef idx="minor">
+            <a:sysClr val="windowText" lastClr="000000"/>
+          </a:fontRef>
+        </p:style>
+      </p:cxnSp>
+      <p:sp>
+        <p:nvSpPr>
+          <p:cNvPr id="177" name="矩形 176"/>
+          <p:cNvSpPr/>
+          <p:nvPr>
+            <p:custDataLst>
+              <p:tags r:id="rId42"/>
+            </p:custDataLst>
+          </p:nvPr>
+        </p:nvSpPr>
+        <p:spPr>
+          <a:xfrm>
+            <a:off x="5443220" y="4796155"/>
+            <a:ext cx="1007745" cy="791845"/>
+          </a:xfrm>
+          <a:prstGeom prst="rect">
+            <a:avLst/>
+          </a:prstGeom>
+          <a:solidFill>
+            <a:sysClr val="window" lastClr="FFFFFF"/>
+          </a:solidFill>
+          <a:ln w="12700">
+            <a:solidFill>
+              <a:sysClr val="windowText" lastClr="000000"/>
+            </a:solidFill>
+          </a:ln>
+        </p:spPr>
+        <p:style>
+          <a:lnRef idx="2">
+            <a:srgbClr val="005CA2">
+              <a:shade val="50000"/>
+            </a:srgbClr>
+          </a:lnRef>
+          <a:fillRef idx="1">
+            <a:srgbClr val="005CA2"/>
+          </a:fillRef>
+          <a:effectRef idx="0">
+            <a:srgbClr val="005CA2"/>
+          </a:effectRef>
+          <a:fontRef idx="minor">
+            <a:sysClr val="window" lastClr="FFFFFF"/>
+          </a:fontRef>
+        </p:style>
+        <p:txBody>
+          <a:bodyPr rtlCol="0" anchor="ctr"/>
+          <a:p>
+            <a:pPr algn="ctr" fontAlgn="auto">
+              <a:lnSpc>
+                <a:spcPct val="100000"/>
+              </a:lnSpc>
+            </a:pPr>
+            <a:r>
+              <a:rPr lang="en-US" altLang="zh-CN" sz="1500">
                 <a:solidFill>
                   <a:sysClr val="windowText" lastClr="000000"/>
                 </a:solidFill>
                 <a:latin typeface="Arial" panose="020B0604020202020204" pitchFamily="34" charset="0"/>
                 <a:ea typeface="Microsoft YaHei Light" panose="020B0502040204020203" charset="-122"/>
                 <a:cs typeface="Arial" panose="020B0604020202020204" pitchFamily="34" charset="0"/>
-              </a:endParaRPr>
-            </a:p>
-          </p:txBody>
-        </p:sp>
-        <p:sp>
-          <p:nvSpPr>
-            <p:cNvPr id="145" name="矩形 144"/>
-            <p:cNvSpPr/>
-            <p:nvPr>
-              <p:custDataLst>
-                <p:tags r:id="rId38"/>
-              </p:custDataLst>
-            </p:nvPr>
-          </p:nvSpPr>
-          <p:spPr>
-            <a:xfrm>
-              <a:off x="8437" y="9462"/>
-              <a:ext cx="1191" cy="567"/>
-            </a:xfrm>
-            <a:prstGeom prst="rect">
-              <a:avLst/>
-            </a:prstGeom>
-            <a:noFill/>
-            <a:ln w="12700">
+                <a:sym typeface="Microsoft YaHei Light" panose="020B0502040204020203" charset="-122"/>
+              </a:rPr>
+              <a:t>Linux</a:t>
+            </a:r>
+            <a:r>
+              <a:rPr lang="zh-CN" altLang="en-US" sz="1500">
+                <a:solidFill>
+                  <a:sysClr val="windowText" lastClr="000000"/>
+                </a:solidFill>
+                <a:latin typeface="Arial" panose="020B0604020202020204" pitchFamily="34" charset="0"/>
+                <a:ea typeface="Microsoft YaHei Light" panose="020B0502040204020203" charset="-122"/>
+                <a:cs typeface="Arial" panose="020B0604020202020204" pitchFamily="34" charset="0"/>
+              </a:rPr>
+              <a:t> Malware Defenses</a:t>
+            </a:r>
+            <a:endParaRPr lang="zh-CN" altLang="en-US" sz="1500">
               <a:solidFill>
                 <a:sysClr val="windowText" lastClr="000000"/>
               </a:solidFill>
-              <a:prstDash val="solid"/>
-            </a:ln>
-          </p:spPr>
-          <p:style>
-            <a:lnRef idx="2">
-              <a:srgbClr val="005CA2">
-                <a:shade val="50000"/>
-              </a:srgbClr>
-            </a:lnRef>
-            <a:fillRef idx="1">
-              <a:srgbClr val="005CA2"/>
-            </a:fillRef>
-            <a:effectRef idx="0">
-              <a:srgbClr val="005CA2"/>
-            </a:effectRef>
-            <a:fontRef idx="minor">
-              <a:sysClr val="window" lastClr="FFFFFF"/>
-            </a:fontRef>
-          </p:style>
-          <p:txBody>
-            <a:bodyPr rtlCol="0" anchor="ctr"/>
-            <a:p>
-              <a:pPr algn="ctr"/>
-              <a:r>
-                <a:rPr lang="zh-CN" altLang="en-US" sz="1500" dirty="0">
-                  <a:solidFill>
-                    <a:sysClr val="windowText" lastClr="000000"/>
-                  </a:solidFill>
-                  <a:latin typeface="Arial" panose="020B0604020202020204" pitchFamily="34" charset="0"/>
-                  <a:ea typeface="Microsoft YaHei Light" panose="020B0502040204020203" charset="-122"/>
-                  <a:cs typeface="Arial" panose="020B0604020202020204" pitchFamily="34" charset="0"/>
-                </a:rPr>
-                <a:t>Vis</a:t>
-              </a:r>
-              <a:r>
-                <a:rPr lang="en-US" altLang="zh-CN" sz="1500" dirty="0">
-                  <a:solidFill>
-                    <a:sysClr val="windowText" lastClr="000000"/>
-                  </a:solidFill>
-                  <a:latin typeface="Arial" panose="020B0604020202020204" pitchFamily="34" charset="0"/>
-                  <a:ea typeface="Microsoft YaHei Light" panose="020B0502040204020203" charset="-122"/>
-                  <a:cs typeface="Arial" panose="020B0604020202020204" pitchFamily="34" charset="0"/>
-                </a:rPr>
-                <a:t>Pro</a:t>
-              </a:r>
-              <a:endParaRPr lang="en-US" altLang="zh-CN" sz="1500" dirty="0">
+              <a:latin typeface="Arial" panose="020B0604020202020204" pitchFamily="34" charset="0"/>
+              <a:ea typeface="Microsoft YaHei Light" panose="020B0502040204020203" charset="-122"/>
+              <a:cs typeface="Arial" panose="020B0604020202020204" pitchFamily="34" charset="0"/>
+            </a:endParaRPr>
+          </a:p>
+        </p:txBody>
+      </p:sp>
+      <p:cxnSp>
+        <p:nvCxnSpPr>
+          <p:cNvPr id="178" name="直接连接符 177"/>
+          <p:cNvCxnSpPr/>
+          <p:nvPr>
+            <p:custDataLst>
+              <p:tags r:id="rId43"/>
+            </p:custDataLst>
+          </p:nvPr>
+        </p:nvCxnSpPr>
+        <p:spPr>
+          <a:xfrm rot="16200000" flipH="1" flipV="1">
+            <a:off x="5201285" y="4361180"/>
+            <a:ext cx="306070" cy="0"/>
+          </a:xfrm>
+          <a:prstGeom prst="line">
+            <a:avLst/>
+          </a:prstGeom>
+          <a:ln w="25400">
+            <a:solidFill>
+              <a:srgbClr val="C00000"/>
+            </a:solidFill>
+            <a:tailEnd type="none" w="med" len="lg"/>
+          </a:ln>
+        </p:spPr>
+        <p:style>
+          <a:lnRef idx="1">
+            <a:srgbClr val="005CA2"/>
+          </a:lnRef>
+          <a:fillRef idx="0">
+            <a:srgbClr val="005CA2"/>
+          </a:fillRef>
+          <a:effectRef idx="0">
+            <a:srgbClr val="005CA2"/>
+          </a:effectRef>
+          <a:fontRef idx="minor">
+            <a:sysClr val="windowText" lastClr="000000"/>
+          </a:fontRef>
+        </p:style>
+      </p:cxnSp>
+      <p:cxnSp>
+        <p:nvCxnSpPr>
+          <p:cNvPr id="179" name="直接连接符 178"/>
+          <p:cNvCxnSpPr/>
+          <p:nvPr>
+            <p:custDataLst>
+              <p:tags r:id="rId44"/>
+            </p:custDataLst>
+          </p:nvPr>
+        </p:nvCxnSpPr>
+        <p:spPr>
+          <a:xfrm flipH="1">
+            <a:off x="3653790" y="4512310"/>
+            <a:ext cx="3401060" cy="1905"/>
+          </a:xfrm>
+          <a:prstGeom prst="line">
+            <a:avLst/>
+          </a:prstGeom>
+          <a:ln w="25400">
+            <a:solidFill>
+              <a:srgbClr val="C00000"/>
+            </a:solidFill>
+          </a:ln>
+        </p:spPr>
+        <p:style>
+          <a:lnRef idx="1">
+            <a:srgbClr val="005CA2"/>
+          </a:lnRef>
+          <a:fillRef idx="0">
+            <a:srgbClr val="005CA2"/>
+          </a:fillRef>
+          <a:effectRef idx="0">
+            <a:srgbClr val="005CA2"/>
+          </a:effectRef>
+          <a:fontRef idx="minor">
+            <a:sysClr val="windowText" lastClr="000000"/>
+          </a:fontRef>
+        </p:style>
+      </p:cxnSp>
+      <p:cxnSp>
+        <p:nvCxnSpPr>
+          <p:cNvPr id="180" name="直接连接符 179"/>
+          <p:cNvCxnSpPr/>
+          <p:nvPr>
+            <p:custDataLst>
+              <p:tags r:id="rId45"/>
+            </p:custDataLst>
+          </p:nvPr>
+        </p:nvCxnSpPr>
+        <p:spPr>
+          <a:xfrm rot="16200000" flipH="1" flipV="1">
+            <a:off x="4691380" y="4658360"/>
+            <a:ext cx="288290" cy="0"/>
+          </a:xfrm>
+          <a:prstGeom prst="line">
+            <a:avLst/>
+          </a:prstGeom>
+          <a:ln w="25400">
+            <a:solidFill>
+              <a:srgbClr val="C00000"/>
+            </a:solidFill>
+            <a:tailEnd type="triangle" w="med" len="lg"/>
+          </a:ln>
+        </p:spPr>
+        <p:style>
+          <a:lnRef idx="1">
+            <a:srgbClr val="005CA2"/>
+          </a:lnRef>
+          <a:fillRef idx="0">
+            <a:srgbClr val="005CA2"/>
+          </a:fillRef>
+          <a:effectRef idx="0">
+            <a:srgbClr val="005CA2"/>
+          </a:effectRef>
+          <a:fontRef idx="minor">
+            <a:sysClr val="windowText" lastClr="000000"/>
+          </a:fontRef>
+        </p:style>
+      </p:cxnSp>
+      <p:cxnSp>
+        <p:nvCxnSpPr>
+          <p:cNvPr id="181" name="直接连接符 180"/>
+          <p:cNvCxnSpPr/>
+          <p:nvPr>
+            <p:custDataLst>
+              <p:tags r:id="rId46"/>
+            </p:custDataLst>
+          </p:nvPr>
+        </p:nvCxnSpPr>
+        <p:spPr>
+          <a:xfrm rot="16200000" flipH="1" flipV="1">
+            <a:off x="5802630" y="4658360"/>
+            <a:ext cx="288290" cy="0"/>
+          </a:xfrm>
+          <a:prstGeom prst="line">
+            <a:avLst/>
+          </a:prstGeom>
+          <a:ln w="25400">
+            <a:solidFill>
+              <a:srgbClr val="C00000"/>
+            </a:solidFill>
+            <a:tailEnd type="triangle" w="med" len="lg"/>
+          </a:ln>
+        </p:spPr>
+        <p:style>
+          <a:lnRef idx="1">
+            <a:srgbClr val="005CA2"/>
+          </a:lnRef>
+          <a:fillRef idx="0">
+            <a:srgbClr val="005CA2"/>
+          </a:fillRef>
+          <a:effectRef idx="0">
+            <a:srgbClr val="005CA2"/>
+          </a:effectRef>
+          <a:fontRef idx="minor">
+            <a:sysClr val="windowText" lastClr="000000"/>
+          </a:fontRef>
+        </p:style>
+      </p:cxnSp>
+      <p:cxnSp>
+        <p:nvCxnSpPr>
+          <p:cNvPr id="182" name="直接连接符 181"/>
+          <p:cNvCxnSpPr/>
+          <p:nvPr>
+            <p:custDataLst>
+              <p:tags r:id="rId47"/>
+            </p:custDataLst>
+          </p:nvPr>
+        </p:nvCxnSpPr>
+        <p:spPr>
+          <a:xfrm rot="16200000" flipH="1" flipV="1">
+            <a:off x="6908165" y="4658360"/>
+            <a:ext cx="288290" cy="0"/>
+          </a:xfrm>
+          <a:prstGeom prst="line">
+            <a:avLst/>
+          </a:prstGeom>
+          <a:ln w="25400">
+            <a:solidFill>
+              <a:srgbClr val="C00000"/>
+            </a:solidFill>
+            <a:tailEnd type="triangle" w="med" len="lg"/>
+          </a:ln>
+        </p:spPr>
+        <p:style>
+          <a:lnRef idx="1">
+            <a:srgbClr val="005CA2"/>
+          </a:lnRef>
+          <a:fillRef idx="0">
+            <a:srgbClr val="005CA2"/>
+          </a:fillRef>
+          <a:effectRef idx="0">
+            <a:srgbClr val="005CA2"/>
+          </a:effectRef>
+          <a:fontRef idx="minor">
+            <a:sysClr val="windowText" lastClr="000000"/>
+          </a:fontRef>
+        </p:style>
+      </p:cxnSp>
+      <p:sp>
+        <p:nvSpPr>
+          <p:cNvPr id="183" name="矩形 182"/>
+          <p:cNvSpPr/>
+          <p:nvPr>
+            <p:custDataLst>
+              <p:tags r:id="rId48"/>
+            </p:custDataLst>
+          </p:nvPr>
+        </p:nvSpPr>
+        <p:spPr>
+          <a:xfrm>
+            <a:off x="4479925" y="3829050"/>
+            <a:ext cx="1764030" cy="396240"/>
+          </a:xfrm>
+          <a:prstGeom prst="rect">
+            <a:avLst/>
+          </a:prstGeom>
+          <a:solidFill>
+            <a:sysClr val="window" lastClr="FFFFFF"/>
+          </a:solidFill>
+          <a:ln>
+            <a:solidFill>
+              <a:sysClr val="windowText" lastClr="000000"/>
+            </a:solidFill>
+          </a:ln>
+        </p:spPr>
+        <p:style>
+          <a:lnRef idx="2">
+            <a:srgbClr val="005CA2">
+              <a:shade val="50000"/>
+            </a:srgbClr>
+          </a:lnRef>
+          <a:fillRef idx="1">
+            <a:srgbClr val="005CA2"/>
+          </a:fillRef>
+          <a:effectRef idx="0">
+            <a:srgbClr val="005CA2"/>
+          </a:effectRef>
+          <a:fontRef idx="minor">
+            <a:sysClr val="window" lastClr="FFFFFF"/>
+          </a:fontRef>
+        </p:style>
+        <p:txBody>
+          <a:bodyPr rtlCol="0" anchor="ctr"/>
+          <a:p>
+            <a:pPr algn="ctr"/>
+            <a:r>
+              <a:rPr lang="zh-CN" altLang="en-US" sz="1500">
                 <a:solidFill>
                   <a:sysClr val="windowText" lastClr="000000"/>
                 </a:solidFill>
                 <a:latin typeface="Arial" panose="020B0604020202020204" pitchFamily="34" charset="0"/>
                 <a:ea typeface="Microsoft YaHei Light" panose="020B0502040204020203" charset="-122"/>
                 <a:cs typeface="Arial" panose="020B0604020202020204" pitchFamily="34" charset="0"/>
-              </a:endParaRPr>
-            </a:p>
-          </p:txBody>
-        </p:sp>
-        <p:sp>
-          <p:nvSpPr>
-            <p:cNvPr id="146" name="矩形 145"/>
-            <p:cNvSpPr/>
-            <p:nvPr>
-              <p:custDataLst>
-                <p:tags r:id="rId39"/>
-              </p:custDataLst>
-            </p:nvPr>
-          </p:nvSpPr>
-          <p:spPr>
-            <a:xfrm>
-              <a:off x="9758" y="9462"/>
-              <a:ext cx="1191" cy="567"/>
-            </a:xfrm>
-            <a:prstGeom prst="rect">
-              <a:avLst/>
-            </a:prstGeom>
-            <a:noFill/>
-            <a:ln w="12700">
+              </a:rPr>
+              <a:t>Malware</a:t>
+            </a:r>
+            <a:r>
+              <a:rPr lang="en-US" altLang="zh-CN" sz="1500">
+                <a:solidFill>
+                  <a:sysClr val="windowText" lastClr="000000"/>
+                </a:solidFill>
+                <a:latin typeface="Arial" panose="020B0604020202020204" pitchFamily="34" charset="0"/>
+                <a:ea typeface="Microsoft YaHei Light" panose="020B0502040204020203" charset="-122"/>
+                <a:cs typeface="Arial" panose="020B0604020202020204" pitchFamily="34" charset="0"/>
+              </a:rPr>
+              <a:t> </a:t>
+            </a:r>
+            <a:r>
+              <a:rPr lang="zh-CN" altLang="en-US" sz="1500">
+                <a:solidFill>
+                  <a:sysClr val="windowText" lastClr="000000"/>
+                </a:solidFill>
+                <a:latin typeface="Arial" panose="020B0604020202020204" pitchFamily="34" charset="0"/>
+                <a:ea typeface="Microsoft YaHei Light" panose="020B0502040204020203" charset="-122"/>
+                <a:cs typeface="Arial" panose="020B0604020202020204" pitchFamily="34" charset="0"/>
+              </a:rPr>
+              <a:t>Defenses</a:t>
+            </a:r>
+            <a:endParaRPr lang="zh-CN" altLang="en-US" sz="1500">
               <a:solidFill>
                 <a:sysClr val="windowText" lastClr="000000"/>
               </a:solidFill>
-              <a:prstDash val="solid"/>
-            </a:ln>
-          </p:spPr>
-          <p:style>
-            <a:lnRef idx="2">
-              <a:srgbClr val="005CA2">
-                <a:shade val="50000"/>
-              </a:srgbClr>
-            </a:lnRef>
-            <a:fillRef idx="1">
-              <a:srgbClr val="005CA2"/>
-            </a:fillRef>
-            <a:effectRef idx="0">
-              <a:srgbClr val="005CA2"/>
-            </a:effectRef>
-            <a:fontRef idx="minor">
-              <a:sysClr val="window" lastClr="FFFFFF"/>
-            </a:fontRef>
-          </p:style>
-          <p:txBody>
-            <a:bodyPr rtlCol="0" anchor="ctr"/>
-            <a:p>
-              <a:pPr algn="ctr"/>
-              <a:r>
-                <a:rPr lang="zh-CN" altLang="en-US" sz="1500">
-                  <a:solidFill>
-                    <a:sysClr val="windowText" lastClr="000000"/>
-                  </a:solidFill>
-                  <a:latin typeface="Arial" panose="020B0604020202020204" pitchFamily="34" charset="0"/>
-                  <a:ea typeface="Microsoft YaHei Light" panose="020B0502040204020203" charset="-122"/>
-                  <a:cs typeface="Arial" panose="020B0604020202020204" pitchFamily="34" charset="0"/>
-                </a:rPr>
-                <a:t>Vis</a:t>
-              </a:r>
-              <a:r>
-                <a:rPr lang="en-US" altLang="zh-CN" sz="1500">
-                  <a:solidFill>
-                    <a:sysClr val="windowText" lastClr="000000"/>
-                  </a:solidFill>
-                  <a:latin typeface="Arial" panose="020B0604020202020204" pitchFamily="34" charset="0"/>
-                  <a:ea typeface="Microsoft YaHei Light" panose="020B0502040204020203" charset="-122"/>
-                  <a:cs typeface="Arial" panose="020B0604020202020204" pitchFamily="34" charset="0"/>
-                </a:rPr>
-                <a:t>Mal</a:t>
-              </a:r>
-              <a:endParaRPr lang="en-US" altLang="zh-CN" sz="1500">
+              <a:latin typeface="Arial" panose="020B0604020202020204" pitchFamily="34" charset="0"/>
+              <a:ea typeface="Microsoft YaHei Light" panose="020B0502040204020203" charset="-122"/>
+              <a:cs typeface="Arial" panose="020B0604020202020204" pitchFamily="34" charset="0"/>
+            </a:endParaRPr>
+          </a:p>
+        </p:txBody>
+      </p:sp>
+      <p:sp>
+        <p:nvSpPr>
+          <p:cNvPr id="135" name="矩形 134"/>
+          <p:cNvSpPr/>
+          <p:nvPr>
+            <p:custDataLst>
+              <p:tags r:id="rId49"/>
+            </p:custDataLst>
+          </p:nvPr>
+        </p:nvSpPr>
+        <p:spPr>
+          <a:xfrm>
+            <a:off x="9799955" y="3759835"/>
+            <a:ext cx="1224280" cy="566420"/>
+          </a:xfrm>
+          <a:prstGeom prst="rect">
+            <a:avLst/>
+          </a:prstGeom>
+          <a:solidFill>
+            <a:sysClr val="window" lastClr="FFFFFF"/>
+          </a:solidFill>
+          <a:ln>
+            <a:solidFill>
+              <a:sysClr val="windowText" lastClr="000000"/>
+            </a:solidFill>
+          </a:ln>
+        </p:spPr>
+        <p:style>
+          <a:lnRef idx="2">
+            <a:srgbClr val="005CA2">
+              <a:shade val="50000"/>
+            </a:srgbClr>
+          </a:lnRef>
+          <a:fillRef idx="1">
+            <a:srgbClr val="005CA2"/>
+          </a:fillRef>
+          <a:effectRef idx="0">
+            <a:srgbClr val="005CA2"/>
+          </a:effectRef>
+          <a:fontRef idx="minor">
+            <a:sysClr val="window" lastClr="FFFFFF"/>
+          </a:fontRef>
+        </p:style>
+        <p:txBody>
+          <a:bodyPr rtlCol="0" anchor="ctr"/>
+          <a:p>
+            <a:pPr algn="ctr"/>
+            <a:r>
+              <a:rPr lang="zh-CN" altLang="en-US" sz="1500">
                 <a:solidFill>
                   <a:sysClr val="windowText" lastClr="000000"/>
                 </a:solidFill>
                 <a:latin typeface="Arial" panose="020B0604020202020204" pitchFamily="34" charset="0"/>
                 <a:ea typeface="Microsoft YaHei Light" panose="020B0502040204020203" charset="-122"/>
                 <a:cs typeface="Arial" panose="020B0604020202020204" pitchFamily="34" charset="0"/>
-              </a:endParaRPr>
-            </a:p>
-          </p:txBody>
-        </p:sp>
-        <p:sp>
-          <p:nvSpPr>
-            <p:cNvPr id="147" name="矩形 146"/>
-            <p:cNvSpPr/>
-            <p:nvPr>
-              <p:custDataLst>
-                <p:tags r:id="rId40"/>
-              </p:custDataLst>
-            </p:nvPr>
-          </p:nvSpPr>
-          <p:spPr>
-            <a:xfrm>
-              <a:off x="6903" y="9462"/>
-              <a:ext cx="1417" cy="567"/>
-            </a:xfrm>
-            <a:prstGeom prst="rect">
-              <a:avLst/>
-            </a:prstGeom>
-            <a:noFill/>
-            <a:ln w="12700">
+              </a:rPr>
+              <a:t>Vulnerability Exploitation</a:t>
+            </a:r>
+            <a:endParaRPr lang="zh-CN" altLang="en-US" sz="1500">
               <a:solidFill>
                 <a:sysClr val="windowText" lastClr="000000"/>
               </a:solidFill>
-              <a:prstDash val="solid"/>
-            </a:ln>
-          </p:spPr>
-          <p:style>
-            <a:lnRef idx="2">
-              <a:srgbClr val="005CA2">
-                <a:shade val="50000"/>
-              </a:srgbClr>
-            </a:lnRef>
-            <a:fillRef idx="1">
-              <a:srgbClr val="005CA2"/>
-            </a:fillRef>
-            <a:effectRef idx="0">
-              <a:srgbClr val="005CA2"/>
-            </a:effectRef>
-            <a:fontRef idx="minor">
-              <a:sysClr val="window" lastClr="FFFFFF"/>
-            </a:fontRef>
-          </p:style>
-          <p:txBody>
-            <a:bodyPr rtlCol="0" anchor="ctr"/>
-            <a:p>
-              <a:pPr algn="ctr"/>
-              <a:r>
-                <a:rPr lang="zh-CN" altLang="en-US" sz="1500">
-                  <a:solidFill>
-                    <a:sysClr val="windowText" lastClr="000000"/>
-                  </a:solidFill>
-                  <a:latin typeface="Arial" panose="020B0604020202020204" pitchFamily="34" charset="0"/>
-                  <a:ea typeface="Microsoft YaHei Light" panose="020B0502040204020203" charset="-122"/>
-                  <a:cs typeface="Arial" panose="020B0604020202020204" pitchFamily="34" charset="0"/>
-                </a:rPr>
-                <a:t>ContMal</a:t>
-              </a:r>
-              <a:endParaRPr lang="zh-CN" altLang="en-US" sz="1500">
+              <a:latin typeface="Arial" panose="020B0604020202020204" pitchFamily="34" charset="0"/>
+              <a:ea typeface="Microsoft YaHei Light" panose="020B0502040204020203" charset="-122"/>
+              <a:cs typeface="Arial" panose="020B0604020202020204" pitchFamily="34" charset="0"/>
+            </a:endParaRPr>
+          </a:p>
+        </p:txBody>
+      </p:sp>
+      <p:sp>
+        <p:nvSpPr>
+          <p:cNvPr id="136" name="矩形 135"/>
+          <p:cNvSpPr/>
+          <p:nvPr>
+            <p:custDataLst>
+              <p:tags r:id="rId50"/>
+            </p:custDataLst>
+          </p:nvPr>
+        </p:nvSpPr>
+        <p:spPr>
+          <a:xfrm>
+            <a:off x="8308340" y="3711575"/>
+            <a:ext cx="1280160" cy="605155"/>
+          </a:xfrm>
+          <a:prstGeom prst="rect">
+            <a:avLst/>
+          </a:prstGeom>
+          <a:solidFill>
+            <a:sysClr val="window" lastClr="FFFFFF"/>
+          </a:solidFill>
+          <a:ln>
+            <a:solidFill>
+              <a:sysClr val="windowText" lastClr="000000"/>
+            </a:solidFill>
+          </a:ln>
+        </p:spPr>
+        <p:style>
+          <a:lnRef idx="2">
+            <a:srgbClr val="005CA2">
+              <a:shade val="50000"/>
+            </a:srgbClr>
+          </a:lnRef>
+          <a:fillRef idx="1">
+            <a:srgbClr val="005CA2"/>
+          </a:fillRef>
+          <a:effectRef idx="0">
+            <a:srgbClr val="005CA2"/>
+          </a:effectRef>
+          <a:fontRef idx="minor">
+            <a:sysClr val="window" lastClr="FFFFFF"/>
+          </a:fontRef>
+        </p:style>
+        <p:txBody>
+          <a:bodyPr rtlCol="0" anchor="ctr"/>
+          <a:p>
+            <a:pPr algn="ctr"/>
+            <a:r>
+              <a:rPr lang="zh-CN" altLang="en-US" sz="1500" dirty="0">
                 <a:solidFill>
                   <a:sysClr val="windowText" lastClr="000000"/>
                 </a:solidFill>
                 <a:latin typeface="Arial" panose="020B0604020202020204" pitchFamily="34" charset="0"/>
                 <a:ea typeface="Microsoft YaHei Light" panose="020B0502040204020203" charset="-122"/>
                 <a:cs typeface="Arial" panose="020B0604020202020204" pitchFamily="34" charset="0"/>
-              </a:endParaRPr>
-            </a:p>
-          </p:txBody>
-        </p:sp>
-        <p:cxnSp>
-          <p:nvCxnSpPr>
-            <p:cNvPr id="159" name="直接连接符 158"/>
-            <p:cNvCxnSpPr/>
-            <p:nvPr>
-              <p:custDataLst>
-                <p:tags r:id="rId41"/>
-              </p:custDataLst>
-            </p:nvPr>
-          </p:nvCxnSpPr>
-          <p:spPr>
-            <a:xfrm>
-              <a:off x="7612" y="8800"/>
-              <a:ext cx="0" cy="680"/>
-            </a:xfrm>
-            <a:prstGeom prst="line">
-              <a:avLst/>
-            </a:prstGeom>
-            <a:ln w="25400">
-              <a:solidFill>
-                <a:srgbClr val="C00000"/>
-              </a:solidFill>
-              <a:tailEnd type="triangle" w="med" len="lg"/>
-            </a:ln>
-          </p:spPr>
-          <p:style>
-            <a:lnRef idx="1">
-              <a:srgbClr val="005CA2"/>
-            </a:lnRef>
-            <a:fillRef idx="0">
-              <a:srgbClr val="005CA2"/>
-            </a:fillRef>
-            <a:effectRef idx="0">
-              <a:srgbClr val="005CA2"/>
-            </a:effectRef>
-            <a:fontRef idx="minor">
-              <a:sysClr val="windowText" lastClr="000000"/>
-            </a:fontRef>
-          </p:style>
-        </p:cxnSp>
-        <p:cxnSp>
-          <p:nvCxnSpPr>
-            <p:cNvPr id="173" name="直接连接符 172"/>
-            <p:cNvCxnSpPr/>
-            <p:nvPr>
-              <p:custDataLst>
-                <p:tags r:id="rId42"/>
-              </p:custDataLst>
-            </p:nvPr>
-          </p:nvCxnSpPr>
-          <p:spPr>
-            <a:xfrm rot="16200000" flipH="1" flipV="1">
-              <a:off x="8835" y="9263"/>
-              <a:ext cx="397" cy="0"/>
-            </a:xfrm>
-            <a:prstGeom prst="line">
-              <a:avLst/>
-            </a:prstGeom>
-            <a:ln w="25400">
-              <a:solidFill>
-                <a:srgbClr val="C00000"/>
-              </a:solidFill>
-              <a:tailEnd type="triangle" w="med" len="lg"/>
-            </a:ln>
-          </p:spPr>
-          <p:style>
-            <a:lnRef idx="1">
-              <a:srgbClr val="005CA2"/>
-            </a:lnRef>
-            <a:fillRef idx="0">
-              <a:srgbClr val="005CA2"/>
-            </a:fillRef>
-            <a:effectRef idx="0">
-              <a:srgbClr val="005CA2"/>
-            </a:effectRef>
-            <a:fontRef idx="minor">
-              <a:sysClr val="windowText" lastClr="000000"/>
-            </a:fontRef>
-          </p:style>
-        </p:cxnSp>
-        <p:cxnSp>
-          <p:nvCxnSpPr>
-            <p:cNvPr id="174" name="直接连接符 173"/>
-            <p:cNvCxnSpPr/>
-            <p:nvPr>
-              <p:custDataLst>
-                <p:tags r:id="rId43"/>
-              </p:custDataLst>
-            </p:nvPr>
-          </p:nvCxnSpPr>
-          <p:spPr>
-            <a:xfrm rot="16200000" flipH="1" flipV="1">
-              <a:off x="10156" y="9263"/>
-              <a:ext cx="397" cy="0"/>
-            </a:xfrm>
-            <a:prstGeom prst="line">
-              <a:avLst/>
-            </a:prstGeom>
-            <a:ln w="25400">
-              <a:solidFill>
-                <a:srgbClr val="C00000"/>
-              </a:solidFill>
-              <a:tailEnd type="triangle" w="med" len="lg"/>
-            </a:ln>
-          </p:spPr>
-          <p:style>
-            <a:lnRef idx="1">
-              <a:srgbClr val="005CA2"/>
-            </a:lnRef>
-            <a:fillRef idx="0">
-              <a:srgbClr val="005CA2"/>
-            </a:fillRef>
-            <a:effectRef idx="0">
-              <a:srgbClr val="005CA2"/>
-            </a:effectRef>
-            <a:fontRef idx="minor">
-              <a:sysClr val="windowText" lastClr="000000"/>
-            </a:fontRef>
-          </p:style>
-        </p:cxnSp>
-        <p:cxnSp>
-          <p:nvCxnSpPr>
-            <p:cNvPr id="175" name="直接连接符 174"/>
-            <p:cNvCxnSpPr/>
-            <p:nvPr>
-              <p:custDataLst>
-                <p:tags r:id="rId44"/>
-              </p:custDataLst>
-            </p:nvPr>
-          </p:nvCxnSpPr>
-          <p:spPr>
-            <a:xfrm flipH="1" flipV="1">
-              <a:off x="9030" y="9071"/>
-              <a:ext cx="1314" cy="0"/>
-            </a:xfrm>
-            <a:prstGeom prst="line">
-              <a:avLst/>
-            </a:prstGeom>
-            <a:ln w="25400">
-              <a:solidFill>
-                <a:srgbClr val="C00000"/>
-              </a:solidFill>
-            </a:ln>
-          </p:spPr>
-          <p:style>
-            <a:lnRef idx="1">
-              <a:srgbClr val="005CA2"/>
-            </a:lnRef>
-            <a:fillRef idx="0">
-              <a:srgbClr val="005CA2"/>
-            </a:fillRef>
-            <a:effectRef idx="0">
-              <a:srgbClr val="005CA2"/>
-            </a:effectRef>
-            <a:fontRef idx="minor">
-              <a:sysClr val="windowText" lastClr="000000"/>
-            </a:fontRef>
-          </p:style>
-        </p:cxnSp>
-        <p:cxnSp>
-          <p:nvCxnSpPr>
-            <p:cNvPr id="176" name="直接连接符 175"/>
-            <p:cNvCxnSpPr/>
-            <p:nvPr>
-              <p:custDataLst>
-                <p:tags r:id="rId45"/>
-              </p:custDataLst>
-            </p:nvPr>
-          </p:nvCxnSpPr>
-          <p:spPr>
-            <a:xfrm rot="16200000" flipH="1" flipV="1">
-              <a:off x="9560" y="8956"/>
-              <a:ext cx="255" cy="0"/>
-            </a:xfrm>
-            <a:prstGeom prst="line">
-              <a:avLst/>
-            </a:prstGeom>
-            <a:ln w="25400">
-              <a:solidFill>
-                <a:srgbClr val="C00000"/>
-              </a:solidFill>
-              <a:tailEnd type="none" w="med" len="lg"/>
-            </a:ln>
-          </p:spPr>
-          <p:style>
-            <a:lnRef idx="1">
-              <a:srgbClr val="005CA2"/>
-            </a:lnRef>
-            <a:fillRef idx="0">
-              <a:srgbClr val="005CA2"/>
-            </a:fillRef>
-            <a:effectRef idx="0">
-              <a:srgbClr val="005CA2"/>
-            </a:effectRef>
-            <a:fontRef idx="minor">
-              <a:sysClr val="windowText" lastClr="000000"/>
-            </a:fontRef>
-          </p:style>
-        </p:cxnSp>
-        <p:sp>
-          <p:nvSpPr>
-            <p:cNvPr id="177" name="矩形 176"/>
-            <p:cNvSpPr/>
-            <p:nvPr>
-              <p:custDataLst>
-                <p:tags r:id="rId46"/>
-              </p:custDataLst>
-            </p:nvPr>
-          </p:nvSpPr>
-          <p:spPr>
-            <a:xfrm>
-              <a:off x="8690" y="7553"/>
-              <a:ext cx="1587" cy="1247"/>
-            </a:xfrm>
-            <a:prstGeom prst="rect">
-              <a:avLst/>
-            </a:prstGeom>
-            <a:solidFill>
-              <a:sysClr val="window" lastClr="FFFFFF"/>
-            </a:solidFill>
-            <a:ln w="12700">
+              </a:rPr>
+              <a:t>Vulnerability Discovery</a:t>
+            </a:r>
+            <a:endParaRPr lang="zh-CN" altLang="en-US" sz="1500" dirty="0">
               <a:solidFill>
                 <a:sysClr val="windowText" lastClr="000000"/>
               </a:solidFill>
-            </a:ln>
-          </p:spPr>
-          <p:style>
-            <a:lnRef idx="2">
-              <a:srgbClr val="005CA2">
-                <a:shade val="50000"/>
-              </a:srgbClr>
-            </a:lnRef>
-            <a:fillRef idx="1">
-              <a:srgbClr val="005CA2"/>
-            </a:fillRef>
-            <a:effectRef idx="0">
-              <a:srgbClr val="005CA2"/>
-            </a:effectRef>
-            <a:fontRef idx="minor">
-              <a:sysClr val="window" lastClr="FFFFFF"/>
-            </a:fontRef>
-          </p:style>
-          <p:txBody>
-            <a:bodyPr rtlCol="0" anchor="ctr"/>
-            <a:p>
-              <a:pPr algn="ctr" fontAlgn="auto">
-                <a:lnSpc>
-                  <a:spcPct val="100000"/>
-                </a:lnSpc>
-              </a:pPr>
-              <a:r>
-                <a:rPr lang="zh-CN" altLang="en-US" sz="1500">
-                  <a:solidFill>
-                    <a:sysClr val="windowText" lastClr="000000"/>
-                  </a:solidFill>
-                  <a:latin typeface="Arial" panose="020B0604020202020204" pitchFamily="34" charset="0"/>
-                  <a:ea typeface="Microsoft YaHei Light" panose="020B0502040204020203" charset="-122"/>
-                  <a:cs typeface="Arial" panose="020B0604020202020204" pitchFamily="34" charset="0"/>
-                  <a:sym typeface="Microsoft YaHei Light" panose="020B0502040204020203" charset="-122"/>
-                </a:rPr>
-                <a:t>Windows</a:t>
-              </a:r>
-              <a:r>
-                <a:rPr lang="zh-CN" altLang="en-US" sz="1500">
-                  <a:solidFill>
-                    <a:sysClr val="windowText" lastClr="000000"/>
-                  </a:solidFill>
-                  <a:latin typeface="Arial" panose="020B0604020202020204" pitchFamily="34" charset="0"/>
-                  <a:ea typeface="Microsoft YaHei Light" panose="020B0502040204020203" charset="-122"/>
-                  <a:cs typeface="Arial" panose="020B0604020202020204" pitchFamily="34" charset="0"/>
-                </a:rPr>
-                <a:t> Malware Defenses</a:t>
-              </a:r>
-              <a:endParaRPr lang="zh-CN" altLang="en-US" sz="1500">
-                <a:solidFill>
-                  <a:sysClr val="windowText" lastClr="000000"/>
-                </a:solidFill>
-                <a:latin typeface="Arial" panose="020B0604020202020204" pitchFamily="34" charset="0"/>
-                <a:ea typeface="Microsoft YaHei Light" panose="020B0502040204020203" charset="-122"/>
-                <a:cs typeface="Arial" panose="020B0604020202020204" pitchFamily="34" charset="0"/>
-              </a:endParaRPr>
-            </a:p>
-          </p:txBody>
-        </p:sp>
-        <p:cxnSp>
-          <p:nvCxnSpPr>
-            <p:cNvPr id="178" name="直接连接符 177"/>
-            <p:cNvCxnSpPr/>
-            <p:nvPr>
-              <p:custDataLst>
-                <p:tags r:id="rId47"/>
-              </p:custDataLst>
-            </p:nvPr>
-          </p:nvCxnSpPr>
-          <p:spPr>
-            <a:xfrm rot="16200000" flipH="1" flipV="1">
-              <a:off x="9242" y="6892"/>
-              <a:ext cx="482" cy="0"/>
-            </a:xfrm>
-            <a:prstGeom prst="line">
-              <a:avLst/>
-            </a:prstGeom>
-            <a:ln w="25400">
-              <a:solidFill>
-                <a:srgbClr val="C00000"/>
-              </a:solidFill>
-              <a:tailEnd type="none" w="med" len="lg"/>
-            </a:ln>
-          </p:spPr>
-          <p:style>
-            <a:lnRef idx="1">
-              <a:srgbClr val="005CA2"/>
-            </a:lnRef>
-            <a:fillRef idx="0">
-              <a:srgbClr val="005CA2"/>
-            </a:fillRef>
-            <a:effectRef idx="0">
-              <a:srgbClr val="005CA2"/>
-            </a:effectRef>
-            <a:fontRef idx="minor">
-              <a:sysClr val="windowText" lastClr="000000"/>
-            </a:fontRef>
-          </p:style>
-        </p:cxnSp>
-        <p:cxnSp>
-          <p:nvCxnSpPr>
-            <p:cNvPr id="179" name="直接连接符 178"/>
-            <p:cNvCxnSpPr/>
-            <p:nvPr>
-              <p:custDataLst>
-                <p:tags r:id="rId48"/>
-              </p:custDataLst>
-            </p:nvPr>
-          </p:nvCxnSpPr>
-          <p:spPr>
-            <a:xfrm flipH="1" flipV="1">
-              <a:off x="7608" y="7108"/>
-              <a:ext cx="3744" cy="0"/>
-            </a:xfrm>
-            <a:prstGeom prst="line">
-              <a:avLst/>
-            </a:prstGeom>
-            <a:ln w="25400">
-              <a:solidFill>
-                <a:srgbClr val="C00000"/>
-              </a:solidFill>
-            </a:ln>
-          </p:spPr>
-          <p:style>
-            <a:lnRef idx="1">
-              <a:srgbClr val="005CA2"/>
-            </a:lnRef>
-            <a:fillRef idx="0">
-              <a:srgbClr val="005CA2"/>
-            </a:fillRef>
-            <a:effectRef idx="0">
-              <a:srgbClr val="005CA2"/>
-            </a:effectRef>
-            <a:fontRef idx="minor">
-              <a:sysClr val="windowText" lastClr="000000"/>
-            </a:fontRef>
-          </p:style>
-        </p:cxnSp>
-        <p:cxnSp>
-          <p:nvCxnSpPr>
-            <p:cNvPr id="180" name="直接连接符 179"/>
-            <p:cNvCxnSpPr/>
-            <p:nvPr>
-              <p:custDataLst>
-                <p:tags r:id="rId49"/>
-              </p:custDataLst>
-            </p:nvPr>
-          </p:nvCxnSpPr>
-          <p:spPr>
-            <a:xfrm rot="16200000" flipH="1" flipV="1">
-              <a:off x="7385" y="7326"/>
-              <a:ext cx="454" cy="0"/>
-            </a:xfrm>
-            <a:prstGeom prst="line">
-              <a:avLst/>
-            </a:prstGeom>
-            <a:ln w="25400">
-              <a:solidFill>
-                <a:srgbClr val="C00000"/>
-              </a:solidFill>
-              <a:tailEnd type="triangle" w="med" len="lg"/>
-            </a:ln>
-          </p:spPr>
-          <p:style>
-            <a:lnRef idx="1">
-              <a:srgbClr val="005CA2"/>
-            </a:lnRef>
-            <a:fillRef idx="0">
-              <a:srgbClr val="005CA2"/>
-            </a:fillRef>
-            <a:effectRef idx="0">
-              <a:srgbClr val="005CA2"/>
-            </a:effectRef>
-            <a:fontRef idx="minor">
-              <a:sysClr val="windowText" lastClr="000000"/>
-            </a:fontRef>
-          </p:style>
-        </p:cxnSp>
-        <p:cxnSp>
-          <p:nvCxnSpPr>
-            <p:cNvPr id="181" name="直接连接符 180"/>
-            <p:cNvCxnSpPr/>
-            <p:nvPr>
-              <p:custDataLst>
-                <p:tags r:id="rId50"/>
-              </p:custDataLst>
-            </p:nvPr>
-          </p:nvCxnSpPr>
-          <p:spPr>
-            <a:xfrm rot="16200000" flipH="1" flipV="1">
-              <a:off x="9257" y="7326"/>
-              <a:ext cx="454" cy="0"/>
-            </a:xfrm>
-            <a:prstGeom prst="line">
-              <a:avLst/>
-            </a:prstGeom>
-            <a:ln w="25400">
-              <a:solidFill>
-                <a:srgbClr val="C00000"/>
-              </a:solidFill>
-              <a:tailEnd type="triangle" w="med" len="lg"/>
-            </a:ln>
-          </p:spPr>
-          <p:style>
-            <a:lnRef idx="1">
-              <a:srgbClr val="005CA2"/>
-            </a:lnRef>
-            <a:fillRef idx="0">
-              <a:srgbClr val="005CA2"/>
-            </a:fillRef>
-            <a:effectRef idx="0">
-              <a:srgbClr val="005CA2"/>
-            </a:effectRef>
-            <a:fontRef idx="minor">
-              <a:sysClr val="windowText" lastClr="000000"/>
-            </a:fontRef>
-          </p:style>
-        </p:cxnSp>
-        <p:cxnSp>
-          <p:nvCxnSpPr>
-            <p:cNvPr id="182" name="直接连接符 181"/>
-            <p:cNvCxnSpPr/>
-            <p:nvPr>
-              <p:custDataLst>
-                <p:tags r:id="rId51"/>
-              </p:custDataLst>
-            </p:nvPr>
-          </p:nvCxnSpPr>
-          <p:spPr>
-            <a:xfrm rot="16200000" flipH="1" flipV="1">
-              <a:off x="11129" y="7326"/>
-              <a:ext cx="454" cy="0"/>
-            </a:xfrm>
-            <a:prstGeom prst="line">
-              <a:avLst/>
-            </a:prstGeom>
-            <a:ln w="25400">
-              <a:solidFill>
-                <a:srgbClr val="C00000"/>
-              </a:solidFill>
-              <a:tailEnd type="triangle" w="med" len="lg"/>
-            </a:ln>
-          </p:spPr>
-          <p:style>
-            <a:lnRef idx="1">
-              <a:srgbClr val="005CA2"/>
-            </a:lnRef>
-            <a:fillRef idx="0">
-              <a:srgbClr val="005CA2"/>
-            </a:fillRef>
-            <a:effectRef idx="0">
-              <a:srgbClr val="005CA2"/>
-            </a:effectRef>
-            <a:fontRef idx="minor">
-              <a:sysClr val="windowText" lastClr="000000"/>
-            </a:fontRef>
-          </p:style>
-        </p:cxnSp>
-        <p:sp>
-          <p:nvSpPr>
-            <p:cNvPr id="183" name="矩形 182"/>
-            <p:cNvSpPr/>
-            <p:nvPr>
-              <p:custDataLst>
-                <p:tags r:id="rId52"/>
-              </p:custDataLst>
-            </p:nvPr>
-          </p:nvSpPr>
-          <p:spPr>
-            <a:xfrm>
-              <a:off x="8080" y="6030"/>
-              <a:ext cx="2778" cy="624"/>
-            </a:xfrm>
-            <a:prstGeom prst="rect">
-              <a:avLst/>
-            </a:prstGeom>
+              <a:latin typeface="Arial" panose="020B0604020202020204" pitchFamily="34" charset="0"/>
+              <a:ea typeface="Microsoft YaHei Light" panose="020B0502040204020203" charset="-122"/>
+              <a:cs typeface="Arial" panose="020B0604020202020204" pitchFamily="34" charset="0"/>
+            </a:endParaRPr>
+          </a:p>
+        </p:txBody>
+      </p:sp>
+      <p:cxnSp>
+        <p:nvCxnSpPr>
+          <p:cNvPr id="161" name="直接连接符 160"/>
+          <p:cNvCxnSpPr/>
+          <p:nvPr>
+            <p:custDataLst>
+              <p:tags r:id="rId51"/>
+            </p:custDataLst>
+          </p:nvPr>
+        </p:nvCxnSpPr>
+        <p:spPr>
+          <a:xfrm rot="16200000" flipH="1" flipV="1">
+            <a:off x="8816975" y="3484880"/>
+            <a:ext cx="450215" cy="0"/>
+          </a:xfrm>
+          <a:prstGeom prst="line">
+            <a:avLst/>
+          </a:prstGeom>
+          <a:ln w="25400">
             <a:solidFill>
-              <a:sysClr val="window" lastClr="FFFFFF"/>
+              <a:srgbClr val="092A49"/>
             </a:solidFill>
-            <a:ln>
-              <a:solidFill>
-                <a:sysClr val="windowText" lastClr="000000"/>
-              </a:solidFill>
-            </a:ln>
-          </p:spPr>
-          <p:style>
-            <a:lnRef idx="2">
-              <a:srgbClr val="005CA2">
-                <a:shade val="50000"/>
-              </a:srgbClr>
-            </a:lnRef>
-            <a:fillRef idx="1">
-              <a:srgbClr val="005CA2"/>
-            </a:fillRef>
-            <a:effectRef idx="0">
-              <a:srgbClr val="005CA2"/>
-            </a:effectRef>
-            <a:fontRef idx="minor">
-              <a:sysClr val="window" lastClr="FFFFFF"/>
-            </a:fontRef>
-          </p:style>
-          <p:txBody>
-            <a:bodyPr rtlCol="0" anchor="ctr"/>
-            <a:p>
-              <a:pPr algn="ctr"/>
-              <a:r>
-                <a:rPr lang="zh-CN" altLang="en-US" sz="1500">
-                  <a:solidFill>
-                    <a:sysClr val="windowText" lastClr="000000"/>
-                  </a:solidFill>
-                  <a:latin typeface="Arial" panose="020B0604020202020204" pitchFamily="34" charset="0"/>
-                  <a:ea typeface="Microsoft YaHei Light" panose="020B0502040204020203" charset="-122"/>
-                  <a:cs typeface="Arial" panose="020B0604020202020204" pitchFamily="34" charset="0"/>
-                </a:rPr>
-                <a:t>Malware</a:t>
-              </a:r>
-              <a:r>
-                <a:rPr lang="en-US" altLang="zh-CN" sz="1500">
-                  <a:solidFill>
-                    <a:sysClr val="windowText" lastClr="000000"/>
-                  </a:solidFill>
-                  <a:latin typeface="Arial" panose="020B0604020202020204" pitchFamily="34" charset="0"/>
-                  <a:ea typeface="Microsoft YaHei Light" panose="020B0502040204020203" charset="-122"/>
-                  <a:cs typeface="Arial" panose="020B0604020202020204" pitchFamily="34" charset="0"/>
-                </a:rPr>
-                <a:t> </a:t>
-              </a:r>
-              <a:r>
-                <a:rPr lang="zh-CN" altLang="en-US" sz="1500">
-                  <a:solidFill>
-                    <a:sysClr val="windowText" lastClr="000000"/>
-                  </a:solidFill>
-                  <a:latin typeface="Arial" panose="020B0604020202020204" pitchFamily="34" charset="0"/>
-                  <a:ea typeface="Microsoft YaHei Light" panose="020B0502040204020203" charset="-122"/>
-                  <a:cs typeface="Arial" panose="020B0604020202020204" pitchFamily="34" charset="0"/>
-                </a:rPr>
-                <a:t>Defenses</a:t>
-              </a:r>
-              <a:endParaRPr lang="zh-CN" altLang="en-US" sz="1500">
-                <a:solidFill>
-                  <a:sysClr val="windowText" lastClr="000000"/>
-                </a:solidFill>
-                <a:latin typeface="Arial" panose="020B0604020202020204" pitchFamily="34" charset="0"/>
-                <a:ea typeface="Microsoft YaHei Light" panose="020B0502040204020203" charset="-122"/>
-                <a:cs typeface="Arial" panose="020B0604020202020204" pitchFamily="34" charset="0"/>
-              </a:endParaRPr>
-            </a:p>
-          </p:txBody>
-        </p:sp>
-      </p:grpSp>
-      <p:grpSp>
-        <p:nvGrpSpPr>
-          <p:cNvPr id="9" name="组合 8"/>
-          <p:cNvGrpSpPr/>
-          <p:nvPr/>
-        </p:nvGrpSpPr>
-        <p:grpSpPr>
+            <a:tailEnd type="triangle" w="med" len="lg"/>
+          </a:ln>
+        </p:spPr>
+        <p:style>
+          <a:lnRef idx="1">
+            <a:srgbClr val="005CA2"/>
+          </a:lnRef>
+          <a:fillRef idx="0">
+            <a:srgbClr val="005CA2"/>
+          </a:fillRef>
+          <a:effectRef idx="0">
+            <a:srgbClr val="005CA2"/>
+          </a:effectRef>
+          <a:fontRef idx="minor">
+            <a:sysClr val="windowText" lastClr="000000"/>
+          </a:fontRef>
+        </p:style>
+      </p:cxnSp>
+      <p:cxnSp>
+        <p:nvCxnSpPr>
+          <p:cNvPr id="162" name="直接连接符 161"/>
+          <p:cNvCxnSpPr/>
+          <p:nvPr>
+            <p:custDataLst>
+              <p:tags r:id="rId52"/>
+            </p:custDataLst>
+          </p:nvPr>
+        </p:nvCxnSpPr>
+        <p:spPr>
+          <a:xfrm flipH="1">
+            <a:off x="9042400" y="3275330"/>
+            <a:ext cx="1371600" cy="1270"/>
+          </a:xfrm>
+          <a:prstGeom prst="line">
+            <a:avLst/>
+          </a:prstGeom>
+          <a:ln w="25400">
+            <a:solidFill>
+              <a:srgbClr val="092A49"/>
+            </a:solidFill>
+          </a:ln>
+        </p:spPr>
+        <p:style>
+          <a:lnRef idx="1">
+            <a:srgbClr val="005CA2"/>
+          </a:lnRef>
+          <a:fillRef idx="0">
+            <a:srgbClr val="005CA2"/>
+          </a:fillRef>
+          <a:effectRef idx="0">
+            <a:srgbClr val="005CA2"/>
+          </a:effectRef>
+          <a:fontRef idx="minor">
+            <a:sysClr val="windowText" lastClr="000000"/>
+          </a:fontRef>
+        </p:style>
+      </p:cxnSp>
+      <p:cxnSp>
+        <p:nvCxnSpPr>
+          <p:cNvPr id="164" name="直接连接符 163"/>
+          <p:cNvCxnSpPr/>
+          <p:nvPr>
+            <p:custDataLst>
+              <p:tags r:id="rId53"/>
+            </p:custDataLst>
+          </p:nvPr>
+        </p:nvCxnSpPr>
+        <p:spPr>
           <a:xfrm>
-            <a:off x="7894955" y="3261360"/>
-            <a:ext cx="2932430" cy="2734945"/>
-            <a:chOff x="13313" y="5136"/>
-            <a:chExt cx="4618" cy="4307"/>
+            <a:off x="10033000" y="4545013"/>
+            <a:ext cx="0" cy="288290"/>
           </a:xfrm>
-        </p:grpSpPr>
-        <p:sp>
-          <p:nvSpPr>
-            <p:cNvPr id="135" name="矩形 134"/>
-            <p:cNvSpPr/>
-            <p:nvPr>
-              <p:custDataLst>
-                <p:tags r:id="rId53"/>
-              </p:custDataLst>
-            </p:nvPr>
-          </p:nvSpPr>
-          <p:spPr>
-            <a:xfrm>
-              <a:off x="16003" y="5846"/>
-              <a:ext cx="1928" cy="991"/>
-            </a:xfrm>
-            <a:prstGeom prst="rect">
-              <a:avLst/>
-            </a:prstGeom>
+          <a:prstGeom prst="line">
+            <a:avLst/>
+          </a:prstGeom>
+          <a:ln w="25400">
             <a:solidFill>
-              <a:sysClr val="window" lastClr="FFFFFF"/>
+              <a:srgbClr val="092A49"/>
             </a:solidFill>
-            <a:ln>
-              <a:solidFill>
-                <a:sysClr val="windowText" lastClr="000000"/>
-              </a:solidFill>
-            </a:ln>
-          </p:spPr>
-          <p:style>
-            <a:lnRef idx="2">
-              <a:srgbClr val="005CA2">
-                <a:shade val="50000"/>
-              </a:srgbClr>
-            </a:lnRef>
-            <a:fillRef idx="1">
-              <a:srgbClr val="005CA2"/>
-            </a:fillRef>
-            <a:effectRef idx="0">
-              <a:srgbClr val="005CA2"/>
-            </a:effectRef>
-            <a:fontRef idx="minor">
-              <a:sysClr val="window" lastClr="FFFFFF"/>
-            </a:fontRef>
-          </p:style>
-          <p:txBody>
-            <a:bodyPr rtlCol="0" anchor="ctr"/>
-            <a:p>
-              <a:pPr algn="ctr"/>
-              <a:r>
-                <a:rPr lang="zh-CN" altLang="en-US" sz="1500">
-                  <a:solidFill>
-                    <a:sysClr val="windowText" lastClr="000000"/>
-                  </a:solidFill>
-                  <a:latin typeface="Arial" panose="020B0604020202020204" pitchFamily="34" charset="0"/>
-                  <a:ea typeface="Microsoft YaHei Light" panose="020B0502040204020203" charset="-122"/>
-                  <a:cs typeface="Arial" panose="020B0604020202020204" pitchFamily="34" charset="0"/>
-                </a:rPr>
-                <a:t>Vulnerability Exploitation</a:t>
-              </a:r>
-              <a:endParaRPr lang="zh-CN" altLang="en-US" sz="1500">
-                <a:solidFill>
-                  <a:sysClr val="windowText" lastClr="000000"/>
-                </a:solidFill>
-                <a:latin typeface="Arial" panose="020B0604020202020204" pitchFamily="34" charset="0"/>
-                <a:ea typeface="Microsoft YaHei Light" panose="020B0502040204020203" charset="-122"/>
-                <a:cs typeface="Arial" panose="020B0604020202020204" pitchFamily="34" charset="0"/>
-              </a:endParaRPr>
-            </a:p>
-          </p:txBody>
-        </p:sp>
-        <p:sp>
-          <p:nvSpPr>
-            <p:cNvPr id="136" name="矩形 135"/>
-            <p:cNvSpPr/>
-            <p:nvPr>
-              <p:custDataLst>
-                <p:tags r:id="rId54"/>
-              </p:custDataLst>
-            </p:nvPr>
-          </p:nvSpPr>
-          <p:spPr>
-            <a:xfrm>
-              <a:off x="13313" y="5846"/>
-              <a:ext cx="1928" cy="991"/>
-            </a:xfrm>
-            <a:prstGeom prst="rect">
-              <a:avLst/>
-            </a:prstGeom>
+            <a:tailEnd type="triangle" w="med" len="lg"/>
+          </a:ln>
+        </p:spPr>
+        <p:style>
+          <a:lnRef idx="1">
+            <a:srgbClr val="005CA2"/>
+          </a:lnRef>
+          <a:fillRef idx="0">
+            <a:srgbClr val="005CA2"/>
+          </a:fillRef>
+          <a:effectRef idx="0">
+            <a:srgbClr val="005CA2"/>
+          </a:effectRef>
+          <a:fontRef idx="minor">
+            <a:sysClr val="windowText" lastClr="000000"/>
+          </a:fontRef>
+        </p:style>
+      </p:cxnSp>
+      <p:cxnSp>
+        <p:nvCxnSpPr>
+          <p:cNvPr id="165" name="直接连接符 164"/>
+          <p:cNvCxnSpPr/>
+          <p:nvPr>
+            <p:custDataLst>
+              <p:tags r:id="rId54"/>
+            </p:custDataLst>
+          </p:nvPr>
+        </p:nvCxnSpPr>
+        <p:spPr>
+          <a:xfrm flipH="1" flipV="1">
+            <a:off x="8682990" y="4532630"/>
+            <a:ext cx="2630170" cy="0"/>
+          </a:xfrm>
+          <a:prstGeom prst="line">
+            <a:avLst/>
+          </a:prstGeom>
+          <a:ln w="25400">
             <a:solidFill>
-              <a:sysClr val="window" lastClr="FFFFFF"/>
+              <a:srgbClr val="092A49"/>
             </a:solidFill>
-            <a:ln>
-              <a:solidFill>
-                <a:sysClr val="windowText" lastClr="000000"/>
-              </a:solidFill>
-            </a:ln>
-          </p:spPr>
-          <p:style>
-            <a:lnRef idx="2">
-              <a:srgbClr val="005CA2">
-                <a:shade val="50000"/>
-              </a:srgbClr>
-            </a:lnRef>
-            <a:fillRef idx="1">
-              <a:srgbClr val="005CA2"/>
-            </a:fillRef>
-            <a:effectRef idx="0">
-              <a:srgbClr val="005CA2"/>
-            </a:effectRef>
-            <a:fontRef idx="minor">
-              <a:sysClr val="window" lastClr="FFFFFF"/>
-            </a:fontRef>
-          </p:style>
-          <p:txBody>
-            <a:bodyPr rtlCol="0" anchor="ctr"/>
-            <a:p>
-              <a:pPr algn="ctr"/>
-              <a:r>
-                <a:rPr lang="zh-CN" altLang="en-US" sz="1500" dirty="0">
-                  <a:solidFill>
-                    <a:sysClr val="windowText" lastClr="000000"/>
-                  </a:solidFill>
-                  <a:latin typeface="Arial" panose="020B0604020202020204" pitchFamily="34" charset="0"/>
-                  <a:ea typeface="Microsoft YaHei Light" panose="020B0502040204020203" charset="-122"/>
-                  <a:cs typeface="Arial" panose="020B0604020202020204" pitchFamily="34" charset="0"/>
-                </a:rPr>
-                <a:t>Vulnerability Discovery</a:t>
-              </a:r>
-              <a:endParaRPr lang="zh-CN" altLang="en-US" sz="1500" dirty="0">
-                <a:solidFill>
-                  <a:sysClr val="windowText" lastClr="000000"/>
-                </a:solidFill>
-                <a:latin typeface="Arial" panose="020B0604020202020204" pitchFamily="34" charset="0"/>
-                <a:ea typeface="Microsoft YaHei Light" panose="020B0502040204020203" charset="-122"/>
-                <a:cs typeface="Arial" panose="020B0604020202020204" pitchFamily="34" charset="0"/>
-              </a:endParaRPr>
-            </a:p>
-          </p:txBody>
-        </p:sp>
-        <p:cxnSp>
-          <p:nvCxnSpPr>
-            <p:cNvPr id="161" name="直接连接符 160"/>
-            <p:cNvCxnSpPr/>
-            <p:nvPr>
-              <p:custDataLst>
-                <p:tags r:id="rId55"/>
-              </p:custDataLst>
-            </p:nvPr>
-          </p:nvCxnSpPr>
-          <p:spPr>
-            <a:xfrm rot="16200000" flipH="1" flipV="1">
-              <a:off x="13923" y="5491"/>
-              <a:ext cx="709" cy="0"/>
-            </a:xfrm>
-            <a:prstGeom prst="line">
-              <a:avLst/>
-            </a:prstGeom>
-            <a:ln w="25400">
-              <a:solidFill>
-                <a:srgbClr val="092A49"/>
-              </a:solidFill>
-              <a:tailEnd type="triangle" w="med" len="lg"/>
-            </a:ln>
-          </p:spPr>
-          <p:style>
-            <a:lnRef idx="1">
-              <a:srgbClr val="005CA2"/>
-            </a:lnRef>
-            <a:fillRef idx="0">
-              <a:srgbClr val="005CA2"/>
-            </a:fillRef>
-            <a:effectRef idx="0">
-              <a:srgbClr val="005CA2"/>
-            </a:effectRef>
-            <a:fontRef idx="minor">
-              <a:sysClr val="windowText" lastClr="000000"/>
-            </a:fontRef>
-          </p:style>
-        </p:cxnSp>
-        <p:cxnSp>
-          <p:nvCxnSpPr>
-            <p:cNvPr id="162" name="直接连接符 161"/>
-            <p:cNvCxnSpPr/>
-            <p:nvPr>
-              <p:custDataLst>
-                <p:tags r:id="rId56"/>
-              </p:custDataLst>
-            </p:nvPr>
-          </p:nvCxnSpPr>
-          <p:spPr>
-            <a:xfrm flipH="1" flipV="1">
-              <a:off x="14270" y="5136"/>
-              <a:ext cx="2721" cy="0"/>
-            </a:xfrm>
-            <a:prstGeom prst="line">
-              <a:avLst/>
-            </a:prstGeom>
-            <a:ln w="25400">
-              <a:solidFill>
-                <a:srgbClr val="092A49"/>
-              </a:solidFill>
-            </a:ln>
-          </p:spPr>
-          <p:style>
-            <a:lnRef idx="1">
-              <a:srgbClr val="005CA2"/>
-            </a:lnRef>
-            <a:fillRef idx="0">
-              <a:srgbClr val="005CA2"/>
-            </a:fillRef>
-            <a:effectRef idx="0">
-              <a:srgbClr val="005CA2"/>
-            </a:effectRef>
-            <a:fontRef idx="minor">
-              <a:sysClr val="windowText" lastClr="000000"/>
-            </a:fontRef>
-          </p:style>
-        </p:cxnSp>
-        <p:cxnSp>
-          <p:nvCxnSpPr>
-            <p:cNvPr id="164" name="直接连接符 163"/>
-            <p:cNvCxnSpPr/>
-            <p:nvPr>
-              <p:custDataLst>
-                <p:tags r:id="rId57"/>
-              </p:custDataLst>
-            </p:nvPr>
-          </p:nvCxnSpPr>
-          <p:spPr>
-            <a:xfrm>
-              <a:off x="15621" y="7177"/>
-              <a:ext cx="0" cy="454"/>
-            </a:xfrm>
-            <a:prstGeom prst="line">
-              <a:avLst/>
-            </a:prstGeom>
-            <a:ln w="25400">
-              <a:solidFill>
-                <a:srgbClr val="092A49"/>
-              </a:solidFill>
-              <a:tailEnd type="triangle" w="med" len="lg"/>
-            </a:ln>
-          </p:spPr>
-          <p:style>
-            <a:lnRef idx="1">
-              <a:srgbClr val="005CA2"/>
-            </a:lnRef>
-            <a:fillRef idx="0">
-              <a:srgbClr val="005CA2"/>
-            </a:fillRef>
-            <a:effectRef idx="0">
-              <a:srgbClr val="005CA2"/>
-            </a:effectRef>
-            <a:fontRef idx="minor">
-              <a:sysClr val="windowText" lastClr="000000"/>
-            </a:fontRef>
-          </p:style>
-        </p:cxnSp>
-        <p:cxnSp>
-          <p:nvCxnSpPr>
-            <p:cNvPr id="165" name="直接连接符 164"/>
-            <p:cNvCxnSpPr/>
-            <p:nvPr>
-              <p:custDataLst>
-                <p:tags r:id="rId58"/>
-              </p:custDataLst>
-            </p:nvPr>
-          </p:nvCxnSpPr>
-          <p:spPr>
-            <a:xfrm flipH="1">
-              <a:off x="14270" y="7162"/>
-              <a:ext cx="2709" cy="0"/>
-            </a:xfrm>
-            <a:prstGeom prst="line">
-              <a:avLst/>
-            </a:prstGeom>
-            <a:ln w="25400">
-              <a:solidFill>
-                <a:srgbClr val="092A49"/>
-              </a:solidFill>
-            </a:ln>
-          </p:spPr>
-          <p:style>
-            <a:lnRef idx="1">
-              <a:srgbClr val="005CA2"/>
-            </a:lnRef>
-            <a:fillRef idx="0">
-              <a:srgbClr val="005CA2"/>
-            </a:fillRef>
-            <a:effectRef idx="0">
-              <a:srgbClr val="005CA2"/>
-            </a:effectRef>
-            <a:fontRef idx="minor">
-              <a:sysClr val="windowText" lastClr="000000"/>
-            </a:fontRef>
-          </p:style>
-        </p:cxnSp>
-        <p:cxnSp>
-          <p:nvCxnSpPr>
-            <p:cNvPr id="166" name="直接连接符 165"/>
-            <p:cNvCxnSpPr/>
-            <p:nvPr>
-              <p:custDataLst>
-                <p:tags r:id="rId59"/>
-              </p:custDataLst>
-            </p:nvPr>
-          </p:nvCxnSpPr>
-          <p:spPr>
-            <a:xfrm rot="16200000" flipH="1" flipV="1">
-              <a:off x="14100" y="7007"/>
-              <a:ext cx="340" cy="0"/>
-            </a:xfrm>
-            <a:prstGeom prst="line">
-              <a:avLst/>
-            </a:prstGeom>
-            <a:ln w="25400">
-              <a:solidFill>
-                <a:srgbClr val="092A49"/>
-              </a:solidFill>
-              <a:tailEnd type="none" w="med" len="lg"/>
-            </a:ln>
-          </p:spPr>
-          <p:style>
-            <a:lnRef idx="1">
-              <a:srgbClr val="005CA2"/>
-            </a:lnRef>
-            <a:fillRef idx="0">
-              <a:srgbClr val="005CA2"/>
-            </a:fillRef>
-            <a:effectRef idx="0">
-              <a:srgbClr val="005CA2"/>
-            </a:effectRef>
-            <a:fontRef idx="minor">
-              <a:sysClr val="windowText" lastClr="000000"/>
-            </a:fontRef>
-          </p:style>
-        </p:cxnSp>
-        <p:cxnSp>
-          <p:nvCxnSpPr>
-            <p:cNvPr id="167" name="直接连接符 166"/>
-            <p:cNvCxnSpPr/>
-            <p:nvPr>
-              <p:custDataLst>
-                <p:tags r:id="rId60"/>
-              </p:custDataLst>
-            </p:nvPr>
-          </p:nvCxnSpPr>
-          <p:spPr>
-            <a:xfrm rot="16200000" flipH="1" flipV="1">
-              <a:off x="16093" y="9159"/>
-              <a:ext cx="567" cy="0"/>
-            </a:xfrm>
-            <a:prstGeom prst="line">
-              <a:avLst/>
-            </a:prstGeom>
-            <a:ln w="25400">
-              <a:solidFill>
-                <a:srgbClr val="092A49"/>
-              </a:solidFill>
-              <a:tailEnd type="triangle" w="med" len="lg"/>
-            </a:ln>
-          </p:spPr>
-          <p:style>
-            <a:lnRef idx="1">
-              <a:srgbClr val="005CA2"/>
-            </a:lnRef>
-            <a:fillRef idx="0">
-              <a:srgbClr val="005CA2"/>
-            </a:fillRef>
-            <a:effectRef idx="0">
-              <a:srgbClr val="005CA2"/>
-            </a:effectRef>
-            <a:fontRef idx="minor">
-              <a:sysClr val="windowText" lastClr="000000"/>
-            </a:fontRef>
-          </p:style>
-        </p:cxnSp>
-        <p:cxnSp>
-          <p:nvCxnSpPr>
-            <p:cNvPr id="184" name="直接连接符 183"/>
-            <p:cNvCxnSpPr/>
-            <p:nvPr>
-              <p:custDataLst>
-                <p:tags r:id="rId61"/>
-              </p:custDataLst>
-            </p:nvPr>
-          </p:nvCxnSpPr>
-          <p:spPr>
-            <a:xfrm rot="16200000" flipH="1" flipV="1">
-              <a:off x="16616" y="5491"/>
-              <a:ext cx="709" cy="0"/>
-            </a:xfrm>
-            <a:prstGeom prst="line">
-              <a:avLst/>
-            </a:prstGeom>
-            <a:ln w="25400">
-              <a:solidFill>
-                <a:srgbClr val="092A49"/>
-              </a:solidFill>
-              <a:tailEnd type="triangle" w="med" len="lg"/>
-            </a:ln>
-          </p:spPr>
-          <p:style>
-            <a:lnRef idx="1">
-              <a:srgbClr val="005CA2"/>
-            </a:lnRef>
-            <a:fillRef idx="0">
-              <a:srgbClr val="005CA2"/>
-            </a:fillRef>
-            <a:effectRef idx="0">
-              <a:srgbClr val="005CA2"/>
-            </a:effectRef>
-            <a:fontRef idx="minor">
-              <a:sysClr val="windowText" lastClr="000000"/>
-            </a:fontRef>
-          </p:style>
-        </p:cxnSp>
-        <p:cxnSp>
-          <p:nvCxnSpPr>
-            <p:cNvPr id="185" name="直接连接符 184"/>
-            <p:cNvCxnSpPr/>
-            <p:nvPr>
-              <p:custDataLst>
-                <p:tags r:id="rId62"/>
-              </p:custDataLst>
-            </p:nvPr>
-          </p:nvCxnSpPr>
-          <p:spPr>
-            <a:xfrm rot="16200000" flipH="1" flipV="1">
-              <a:off x="16800" y="7007"/>
-              <a:ext cx="340" cy="0"/>
-            </a:xfrm>
-            <a:prstGeom prst="line">
-              <a:avLst/>
-            </a:prstGeom>
-            <a:ln w="25400">
-              <a:solidFill>
-                <a:srgbClr val="092A49"/>
-              </a:solidFill>
-              <a:tailEnd type="none" w="med" len="lg"/>
-            </a:ln>
-          </p:spPr>
-          <p:style>
-            <a:lnRef idx="1">
-              <a:srgbClr val="005CA2"/>
-            </a:lnRef>
-            <a:fillRef idx="0">
-              <a:srgbClr val="005CA2"/>
-            </a:fillRef>
-            <a:effectRef idx="0">
-              <a:srgbClr val="005CA2"/>
-            </a:effectRef>
-            <a:fontRef idx="minor">
-              <a:sysClr val="windowText" lastClr="000000"/>
-            </a:fontRef>
-          </p:style>
-        </p:cxnSp>
-      </p:grpSp>
+          </a:ln>
+        </p:spPr>
+        <p:style>
+          <a:lnRef idx="1">
+            <a:srgbClr val="005CA2"/>
+          </a:lnRef>
+          <a:fillRef idx="0">
+            <a:srgbClr val="005CA2"/>
+          </a:fillRef>
+          <a:effectRef idx="0">
+            <a:srgbClr val="005CA2"/>
+          </a:effectRef>
+          <a:fontRef idx="minor">
+            <a:sysClr val="windowText" lastClr="000000"/>
+          </a:fontRef>
+        </p:style>
+      </p:cxnSp>
+      <p:cxnSp>
+        <p:nvCxnSpPr>
+          <p:cNvPr id="166" name="直接连接符 165"/>
+          <p:cNvCxnSpPr/>
+          <p:nvPr>
+            <p:custDataLst>
+              <p:tags r:id="rId55"/>
+            </p:custDataLst>
+          </p:nvPr>
+        </p:nvCxnSpPr>
+        <p:spPr>
+          <a:xfrm rot="16200000" flipH="1" flipV="1">
+            <a:off x="8934450" y="4424680"/>
+            <a:ext cx="215900" cy="0"/>
+          </a:xfrm>
+          <a:prstGeom prst="line">
+            <a:avLst/>
+          </a:prstGeom>
+          <a:ln w="25400">
+            <a:solidFill>
+              <a:srgbClr val="092A49"/>
+            </a:solidFill>
+            <a:tailEnd type="none" w="med" len="lg"/>
+          </a:ln>
+        </p:spPr>
+        <p:style>
+          <a:lnRef idx="1">
+            <a:srgbClr val="005CA2"/>
+          </a:lnRef>
+          <a:fillRef idx="0">
+            <a:srgbClr val="005CA2"/>
+          </a:fillRef>
+          <a:effectRef idx="0">
+            <a:srgbClr val="005CA2"/>
+          </a:effectRef>
+          <a:fontRef idx="minor">
+            <a:sysClr val="windowText" lastClr="000000"/>
+          </a:fontRef>
+        </p:style>
+      </p:cxnSp>
+      <p:cxnSp>
+        <p:nvCxnSpPr>
+          <p:cNvPr id="184" name="直接连接符 183"/>
+          <p:cNvCxnSpPr/>
+          <p:nvPr>
+            <p:custDataLst>
+              <p:tags r:id="rId56"/>
+            </p:custDataLst>
+          </p:nvPr>
+        </p:nvCxnSpPr>
+        <p:spPr>
+          <a:xfrm>
+            <a:off x="10411143" y="3276283"/>
+            <a:ext cx="4445" cy="493395"/>
+          </a:xfrm>
+          <a:prstGeom prst="line">
+            <a:avLst/>
+          </a:prstGeom>
+          <a:ln w="25400">
+            <a:solidFill>
+              <a:srgbClr val="092A49"/>
+            </a:solidFill>
+            <a:tailEnd type="triangle" w="med" len="lg"/>
+          </a:ln>
+        </p:spPr>
+        <p:style>
+          <a:lnRef idx="1">
+            <a:srgbClr val="005CA2"/>
+          </a:lnRef>
+          <a:fillRef idx="0">
+            <a:srgbClr val="005CA2"/>
+          </a:fillRef>
+          <a:effectRef idx="0">
+            <a:srgbClr val="005CA2"/>
+          </a:effectRef>
+          <a:fontRef idx="minor">
+            <a:sysClr val="windowText" lastClr="000000"/>
+          </a:fontRef>
+        </p:style>
+      </p:cxnSp>
+      <p:cxnSp>
+        <p:nvCxnSpPr>
+          <p:cNvPr id="185" name="直接连接符 184"/>
+          <p:cNvCxnSpPr/>
+          <p:nvPr>
+            <p:custDataLst>
+              <p:tags r:id="rId57"/>
+            </p:custDataLst>
+          </p:nvPr>
+        </p:nvCxnSpPr>
+        <p:spPr>
+          <a:xfrm rot="16200000" flipH="1" flipV="1">
+            <a:off x="10307955" y="4437380"/>
+            <a:ext cx="215900" cy="0"/>
+          </a:xfrm>
+          <a:prstGeom prst="line">
+            <a:avLst/>
+          </a:prstGeom>
+          <a:ln w="25400">
+            <a:solidFill>
+              <a:srgbClr val="092A49"/>
+            </a:solidFill>
+            <a:tailEnd type="none" w="med" len="lg"/>
+          </a:ln>
+        </p:spPr>
+        <p:style>
+          <a:lnRef idx="1">
+            <a:srgbClr val="005CA2"/>
+          </a:lnRef>
+          <a:fillRef idx="0">
+            <a:srgbClr val="005CA2"/>
+          </a:fillRef>
+          <a:effectRef idx="0">
+            <a:srgbClr val="005CA2"/>
+          </a:effectRef>
+          <a:fontRef idx="minor">
+            <a:sysClr val="windowText" lastClr="000000"/>
+          </a:fontRef>
+        </p:style>
+      </p:cxnSp>
       <p:graphicFrame>
         <p:nvGraphicFramePr>
           <p:cNvPr id="186" name="表格 185"/>
           <p:cNvGraphicFramePr/>
           <p:nvPr>
             <p:custDataLst>
-              <p:tags r:id="rId63"/>
+              <p:tags r:id="rId58"/>
             </p:custDataLst>
           </p:nvPr>
         </p:nvGraphicFramePr>
         <p:xfrm>
-          <a:off x="9645650" y="309880"/>
+          <a:off x="9674225" y="309880"/>
           <a:ext cx="1692000" cy="1101090"/>
         </p:xfrm>
         <a:graphic>
@@ -25035,566 +24770,40 @@
           </a:graphicData>
         </a:graphic>
       </p:graphicFrame>
-      <p:grpSp>
-        <p:nvGrpSpPr>
-          <p:cNvPr id="187" name="组合 186"/>
-          <p:cNvGrpSpPr/>
-          <p:nvPr/>
-        </p:nvGrpSpPr>
-        <p:grpSpPr>
-          <a:xfrm>
-            <a:off x="810895" y="6004560"/>
-            <a:ext cx="5615305" cy="364490"/>
-            <a:chOff x="2161" y="9459"/>
-            <a:chExt cx="8843" cy="574"/>
-          </a:xfrm>
-        </p:grpSpPr>
-        <p:sp>
-          <p:nvSpPr>
-            <p:cNvPr id="188" name="矩形 187" descr="7b0a20202020227461726765744964223a202270726f636573734f6e6c696e65576f7264417274220a7d0a"/>
-            <p:cNvSpPr/>
-            <p:nvPr>
-              <p:custDataLst>
-                <p:tags r:id="rId64"/>
-              </p:custDataLst>
-            </p:nvPr>
-          </p:nvSpPr>
-          <p:spPr>
-            <a:xfrm>
-              <a:off x="2161" y="9459"/>
-              <a:ext cx="1417" cy="567"/>
-            </a:xfrm>
-            <a:prstGeom prst="rect">
-              <a:avLst/>
-            </a:prstGeom>
-            <a:solidFill>
-              <a:srgbClr val="00B050"/>
-            </a:solidFill>
-            <a:ln w="12700">
-              <a:solidFill>
-                <a:sysClr val="window" lastClr="FFFFFF"/>
-              </a:solidFill>
-              <a:prstDash val="solid"/>
-            </a:ln>
-            <a:effectLst>
-              <a:outerShdw blurRad="50800" dist="38100" dir="2700000" algn="tl" rotWithShape="0">
-                <a:prstClr val="black">
-                  <a:alpha val="40000"/>
-                </a:prstClr>
-              </a:outerShdw>
-            </a:effectLst>
-          </p:spPr>
-          <p:style>
-            <a:lnRef idx="2">
-              <a:srgbClr val="005CA2">
-                <a:shade val="50000"/>
-              </a:srgbClr>
-            </a:lnRef>
-            <a:fillRef idx="1">
-              <a:srgbClr val="005CA2"/>
-            </a:fillRef>
-            <a:effectRef idx="0">
-              <a:srgbClr val="005CA2"/>
-            </a:effectRef>
-            <a:fontRef idx="minor">
-              <a:sysClr val="window" lastClr="FFFFFF"/>
-            </a:fontRef>
-          </p:style>
-          <p:txBody>
-            <a:bodyPr rtlCol="0" anchor="ctr"/>
-            <a:p>
-              <a:pPr algn="ctr"/>
-              <a:r>
-                <a:rPr lang="zh-CN" altLang="en-US" sz="1500" b="1" dirty="0">
-                  <a:solidFill>
-                    <a:sysClr val="window" lastClr="FFFFFF"/>
-                  </a:solidFill>
-                  <a:latin typeface="Arial" panose="020B0604020202020204" pitchFamily="34" charset="0"/>
-                  <a:ea typeface="Microsoft YaHei Light" panose="020B0502040204020203" charset="-122"/>
-                  <a:cs typeface="Arial" panose="020B0604020202020204" pitchFamily="34" charset="0"/>
-                </a:rPr>
-                <a:t>MalFox</a:t>
-              </a:r>
-              <a:endParaRPr lang="zh-CN" altLang="en-US" sz="1500" b="1" dirty="0">
-                <a:solidFill>
-                  <a:sysClr val="window" lastClr="FFFFFF"/>
-                </a:solidFill>
-                <a:latin typeface="Arial" panose="020B0604020202020204" pitchFamily="34" charset="0"/>
-                <a:ea typeface="Microsoft YaHei Light" panose="020B0502040204020203" charset="-122"/>
-                <a:cs typeface="Arial" panose="020B0604020202020204" pitchFamily="34" charset="0"/>
-              </a:endParaRPr>
-            </a:p>
-          </p:txBody>
-        </p:sp>
-        <p:sp>
-          <p:nvSpPr>
-            <p:cNvPr id="189" name="矩形 188" descr="7b0a20202020227461726765744964223a202270726f636573734f6e6c696e65576f7264417274220a7d0a"/>
-            <p:cNvSpPr/>
-            <p:nvPr>
-              <p:custDataLst>
-                <p:tags r:id="rId65"/>
-              </p:custDataLst>
-            </p:nvPr>
-          </p:nvSpPr>
-          <p:spPr>
-            <a:xfrm>
-              <a:off x="3909" y="9467"/>
-              <a:ext cx="1417" cy="567"/>
-            </a:xfrm>
-            <a:prstGeom prst="rect">
-              <a:avLst/>
-            </a:prstGeom>
-            <a:solidFill>
-              <a:srgbClr val="00B050"/>
-            </a:solidFill>
-            <a:ln w="12700">
-              <a:solidFill>
-                <a:sysClr val="window" lastClr="FFFFFF"/>
-              </a:solidFill>
-              <a:prstDash val="solid"/>
-            </a:ln>
-            <a:effectLst>
-              <a:outerShdw blurRad="50800" dist="38100" dir="2700000" algn="tl" rotWithShape="0">
-                <a:prstClr val="black">
-                  <a:alpha val="40000"/>
-                </a:prstClr>
-              </a:outerShdw>
-            </a:effectLst>
-          </p:spPr>
-          <p:style>
-            <a:lnRef idx="2">
-              <a:srgbClr val="005CA2">
-                <a:shade val="50000"/>
-              </a:srgbClr>
-            </a:lnRef>
-            <a:fillRef idx="1">
-              <a:srgbClr val="005CA2"/>
-            </a:fillRef>
-            <a:effectRef idx="0">
-              <a:srgbClr val="005CA2"/>
-            </a:effectRef>
-            <a:fontRef idx="minor">
-              <a:sysClr val="window" lastClr="FFFFFF"/>
-            </a:fontRef>
-          </p:style>
-          <p:txBody>
-            <a:bodyPr rtlCol="0" anchor="ctr"/>
-            <a:p>
-              <a:pPr algn="ctr"/>
-              <a:r>
-                <a:rPr lang="zh-CN" altLang="en-US" sz="1500" b="1" dirty="0">
-                  <a:solidFill>
-                    <a:sysClr val="window" lastClr="FFFFFF"/>
-                  </a:solidFill>
-                  <a:latin typeface="Arial" panose="020B0604020202020204" pitchFamily="34" charset="0"/>
-                  <a:ea typeface="Microsoft YaHei Light" panose="020B0502040204020203" charset="-122"/>
-                  <a:cs typeface="Arial" panose="020B0604020202020204" pitchFamily="34" charset="0"/>
-                </a:rPr>
-                <a:t>Mal</a:t>
-              </a:r>
-              <a:r>
-                <a:rPr lang="en-US" altLang="zh-CN" sz="1500" b="1" dirty="0">
-                  <a:solidFill>
-                    <a:sysClr val="window" lastClr="FFFFFF"/>
-                  </a:solidFill>
-                  <a:latin typeface="Arial" panose="020B0604020202020204" pitchFamily="34" charset="0"/>
-                  <a:ea typeface="Microsoft YaHei Light" panose="020B0502040204020203" charset="-122"/>
-                  <a:cs typeface="Arial" panose="020B0604020202020204" pitchFamily="34" charset="0"/>
-                </a:rPr>
-                <a:t>Info</a:t>
-              </a:r>
-              <a:endParaRPr lang="en-US" altLang="zh-CN" sz="1500" b="1" dirty="0">
-                <a:solidFill>
-                  <a:sysClr val="window" lastClr="FFFFFF"/>
-                </a:solidFill>
-                <a:latin typeface="Arial" panose="020B0604020202020204" pitchFamily="34" charset="0"/>
-                <a:ea typeface="Microsoft YaHei Light" panose="020B0502040204020203" charset="-122"/>
-                <a:cs typeface="Arial" panose="020B0604020202020204" pitchFamily="34" charset="0"/>
-              </a:endParaRPr>
-            </a:p>
-          </p:txBody>
-        </p:sp>
-        <p:sp>
-          <p:nvSpPr>
-            <p:cNvPr id="190" name="矩形 189" descr="7b0a20202020227461726765744964223a202270726f636573734f6e6c696e65576f7264417274220a7d0a"/>
-            <p:cNvSpPr/>
-            <p:nvPr>
-              <p:custDataLst>
-                <p:tags r:id="rId66"/>
-              </p:custDataLst>
-            </p:nvPr>
-          </p:nvSpPr>
-          <p:spPr>
-            <a:xfrm>
-              <a:off x="9758" y="9459"/>
-              <a:ext cx="1247" cy="567"/>
-            </a:xfrm>
-            <a:prstGeom prst="rect">
-              <a:avLst/>
-            </a:prstGeom>
-            <a:solidFill>
-              <a:srgbClr val="00B050"/>
-            </a:solidFill>
-            <a:ln w="12700">
-              <a:solidFill>
-                <a:sysClr val="window" lastClr="FFFFFF"/>
-              </a:solidFill>
-              <a:prstDash val="solid"/>
-            </a:ln>
-            <a:effectLst>
-              <a:outerShdw blurRad="50800" dist="38100" dir="2700000" algn="tl" rotWithShape="0">
-                <a:prstClr val="black">
-                  <a:alpha val="40000"/>
-                </a:prstClr>
-              </a:outerShdw>
-            </a:effectLst>
-          </p:spPr>
-          <p:style>
-            <a:lnRef idx="2">
-              <a:srgbClr val="005CA2">
-                <a:shade val="50000"/>
-              </a:srgbClr>
-            </a:lnRef>
-            <a:fillRef idx="1">
-              <a:srgbClr val="005CA2"/>
-            </a:fillRef>
-            <a:effectRef idx="0">
-              <a:srgbClr val="005CA2"/>
-            </a:effectRef>
-            <a:fontRef idx="minor">
-              <a:sysClr val="window" lastClr="FFFFFF"/>
-            </a:fontRef>
-          </p:style>
-          <p:txBody>
-            <a:bodyPr rtlCol="0" anchor="ctr"/>
-            <a:p>
-              <a:pPr algn="ctr"/>
-              <a:r>
-                <a:rPr lang="en-US" sz="1500" b="1" dirty="0">
-                  <a:solidFill>
-                    <a:sysClr val="window" lastClr="FFFFFF"/>
-                  </a:solidFill>
-                  <a:latin typeface="Arial" panose="020B0604020202020204" pitchFamily="34" charset="0"/>
-                  <a:cs typeface="Arial" panose="020B0604020202020204" pitchFamily="34" charset="0"/>
-                </a:rPr>
-                <a:t>VisMal</a:t>
-              </a:r>
-              <a:endParaRPr lang="en-US" sz="1500" b="1" dirty="0">
-                <a:solidFill>
-                  <a:sysClr val="window" lastClr="FFFFFF"/>
-                </a:solidFill>
-                <a:latin typeface="Arial" panose="020B0604020202020204" pitchFamily="34" charset="0"/>
-                <a:cs typeface="Arial" panose="020B0604020202020204" pitchFamily="34" charset="0"/>
-              </a:endParaRPr>
-            </a:p>
-          </p:txBody>
-        </p:sp>
-      </p:grpSp>
-      <p:grpSp>
-        <p:nvGrpSpPr>
-          <p:cNvPr id="191" name="组合 190"/>
-          <p:cNvGrpSpPr/>
-          <p:nvPr/>
-        </p:nvGrpSpPr>
-        <p:grpSpPr>
-          <a:xfrm>
-            <a:off x="3806190" y="6005195"/>
-            <a:ext cx="6506210" cy="389890"/>
-            <a:chOff x="6874" y="9459"/>
-            <a:chExt cx="10246" cy="614"/>
-          </a:xfrm>
-        </p:grpSpPr>
-        <p:sp>
-          <p:nvSpPr>
-            <p:cNvPr id="192" name="矩形 191"/>
-            <p:cNvSpPr/>
-            <p:nvPr>
-              <p:custDataLst>
-                <p:tags r:id="rId67"/>
-              </p:custDataLst>
-            </p:nvPr>
-          </p:nvSpPr>
-          <p:spPr>
-            <a:xfrm>
-              <a:off x="8432" y="9459"/>
-              <a:ext cx="1247" cy="567"/>
-            </a:xfrm>
-            <a:prstGeom prst="rect">
-              <a:avLst/>
-            </a:prstGeom>
-            <a:solidFill>
-              <a:srgbClr val="F89406"/>
-            </a:solidFill>
-            <a:ln w="12700">
-              <a:solidFill>
-                <a:sysClr val="window" lastClr="FFFFFF"/>
-              </a:solidFill>
-              <a:prstDash val="solid"/>
-            </a:ln>
-            <a:effectLst>
-              <a:outerShdw blurRad="50800" dist="38100" dir="2700000" algn="tl" rotWithShape="0">
-                <a:prstClr val="black">
-                  <a:alpha val="40000"/>
-                </a:prstClr>
-              </a:outerShdw>
-            </a:effectLst>
-          </p:spPr>
-          <p:style>
-            <a:lnRef idx="2">
-              <a:srgbClr val="005CA2">
-                <a:shade val="50000"/>
-              </a:srgbClr>
-            </a:lnRef>
-            <a:fillRef idx="1">
-              <a:srgbClr val="005CA2"/>
-            </a:fillRef>
-            <a:effectRef idx="0">
-              <a:srgbClr val="005CA2"/>
-            </a:effectRef>
-            <a:fontRef idx="minor">
-              <a:sysClr val="window" lastClr="FFFFFF"/>
-            </a:fontRef>
-          </p:style>
-          <p:txBody>
-            <a:bodyPr rtlCol="0" anchor="ctr"/>
-            <a:p>
-              <a:pPr algn="ctr"/>
-              <a:r>
-                <a:rPr lang="zh-CN" altLang="en-US" sz="1500" b="1">
-                  <a:solidFill>
-                    <a:sysClr val="windowText" lastClr="000000"/>
-                  </a:solidFill>
-                  <a:latin typeface="Arial" panose="020B0604020202020204" pitchFamily="34" charset="0"/>
-                  <a:ea typeface="Microsoft YaHei Light" panose="020B0502040204020203" charset="-122"/>
-                  <a:cs typeface="Arial" panose="020B0604020202020204" pitchFamily="34" charset="0"/>
-                </a:rPr>
-                <a:t>VisPro</a:t>
-              </a:r>
-              <a:endParaRPr lang="zh-CN" altLang="en-US" sz="1500" b="1">
-                <a:solidFill>
-                  <a:sysClr val="windowText" lastClr="000000"/>
-                </a:solidFill>
-                <a:latin typeface="Arial" panose="020B0604020202020204" pitchFamily="34" charset="0"/>
-                <a:ea typeface="Microsoft YaHei Light" panose="020B0502040204020203" charset="-122"/>
-                <a:cs typeface="Arial" panose="020B0604020202020204" pitchFamily="34" charset="0"/>
-              </a:endParaRPr>
-            </a:p>
-          </p:txBody>
-        </p:sp>
-        <p:sp>
-          <p:nvSpPr>
-            <p:cNvPr id="193" name="矩形 192"/>
-            <p:cNvSpPr/>
-            <p:nvPr>
-              <p:custDataLst>
-                <p:tags r:id="rId68"/>
-              </p:custDataLst>
-            </p:nvPr>
-          </p:nvSpPr>
-          <p:spPr>
-            <a:xfrm>
-              <a:off x="6874" y="9459"/>
-              <a:ext cx="1474" cy="567"/>
-            </a:xfrm>
-            <a:prstGeom prst="rect">
-              <a:avLst/>
-            </a:prstGeom>
-            <a:solidFill>
-              <a:srgbClr val="F89406"/>
-            </a:solidFill>
-            <a:ln w="12700">
-              <a:solidFill>
-                <a:sysClr val="window" lastClr="FFFFFF"/>
-              </a:solidFill>
-              <a:prstDash val="solid"/>
-            </a:ln>
-            <a:effectLst>
-              <a:outerShdw blurRad="50800" dist="38100" dir="2700000" algn="tl" rotWithShape="0">
-                <a:prstClr val="black">
-                  <a:alpha val="40000"/>
-                </a:prstClr>
-              </a:outerShdw>
-            </a:effectLst>
-          </p:spPr>
-          <p:style>
-            <a:lnRef idx="2">
-              <a:srgbClr val="005CA2">
-                <a:shade val="50000"/>
-              </a:srgbClr>
-            </a:lnRef>
-            <a:fillRef idx="1">
-              <a:srgbClr val="005CA2"/>
-            </a:fillRef>
-            <a:effectRef idx="0">
-              <a:srgbClr val="005CA2"/>
-            </a:effectRef>
-            <a:fontRef idx="minor">
-              <a:sysClr val="window" lastClr="FFFFFF"/>
-            </a:fontRef>
-          </p:style>
-          <p:txBody>
-            <a:bodyPr rtlCol="0" anchor="ctr"/>
-            <a:p>
-              <a:pPr algn="ctr"/>
-              <a:r>
-                <a:rPr lang="zh-CN" altLang="en-US" sz="1500" b="1">
-                  <a:solidFill>
-                    <a:sysClr val="windowText" lastClr="000000"/>
-                  </a:solidFill>
-                  <a:latin typeface="Arial" panose="020B0604020202020204" pitchFamily="34" charset="0"/>
-                  <a:ea typeface="Microsoft YaHei Light" panose="020B0502040204020203" charset="-122"/>
-                  <a:cs typeface="Arial" panose="020B0604020202020204" pitchFamily="34" charset="0"/>
-                </a:rPr>
-                <a:t>ContMal</a:t>
-              </a:r>
-              <a:endParaRPr lang="zh-CN" altLang="en-US" sz="1500" b="1">
-                <a:solidFill>
-                  <a:sysClr val="windowText" lastClr="000000"/>
-                </a:solidFill>
-                <a:latin typeface="Arial" panose="020B0604020202020204" pitchFamily="34" charset="0"/>
-                <a:ea typeface="Microsoft YaHei Light" panose="020B0502040204020203" charset="-122"/>
-                <a:cs typeface="Arial" panose="020B0604020202020204" pitchFamily="34" charset="0"/>
-              </a:endParaRPr>
-            </a:p>
-          </p:txBody>
-        </p:sp>
-        <p:sp>
-          <p:nvSpPr>
-            <p:cNvPr id="194" name="矩形 193"/>
-            <p:cNvSpPr/>
-            <p:nvPr>
-              <p:custDataLst>
-                <p:tags r:id="rId69"/>
-              </p:custDataLst>
-            </p:nvPr>
-          </p:nvSpPr>
-          <p:spPr>
-            <a:xfrm>
-              <a:off x="15703" y="9506"/>
-              <a:ext cx="1417" cy="567"/>
-            </a:xfrm>
-            <a:prstGeom prst="rect">
-              <a:avLst/>
-            </a:prstGeom>
-            <a:solidFill>
-              <a:srgbClr val="F89406"/>
-            </a:solidFill>
-            <a:ln w="12700">
-              <a:solidFill>
-                <a:sysClr val="window" lastClr="FFFFFF"/>
-              </a:solidFill>
-            </a:ln>
-            <a:effectLst>
-              <a:outerShdw blurRad="50800" dist="38100" dir="2700000" algn="tl" rotWithShape="0">
-                <a:prstClr val="black">
-                  <a:alpha val="40000"/>
-                </a:prstClr>
-              </a:outerShdw>
-            </a:effectLst>
-          </p:spPr>
-          <p:style>
-            <a:lnRef idx="2">
-              <a:srgbClr val="005CA2">
-                <a:shade val="50000"/>
-              </a:srgbClr>
-            </a:lnRef>
-            <a:fillRef idx="1">
-              <a:srgbClr val="005CA2"/>
-            </a:fillRef>
-            <a:effectRef idx="0">
-              <a:srgbClr val="005CA2"/>
-            </a:effectRef>
-            <a:fontRef idx="minor">
-              <a:sysClr val="window" lastClr="FFFFFF"/>
-            </a:fontRef>
-          </p:style>
-          <p:txBody>
-            <a:bodyPr rtlCol="0" anchor="ctr"/>
-            <a:p>
-              <a:pPr algn="ctr"/>
-              <a:r>
-                <a:rPr lang="en-US" altLang="zh-CN" sz="1500" b="1">
-                  <a:solidFill>
-                    <a:sysClr val="windowText" lastClr="000000"/>
-                  </a:solidFill>
-                  <a:latin typeface="Arial" panose="020B0604020202020204" pitchFamily="34" charset="0"/>
-                  <a:ea typeface="Microsoft YaHei Light" panose="020B0502040204020203" charset="-122"/>
-                  <a:cs typeface="Arial" panose="020B0604020202020204" pitchFamily="34" charset="0"/>
-                </a:rPr>
-                <a:t>WinVul</a:t>
-              </a:r>
-              <a:endParaRPr lang="en-US" altLang="zh-CN" sz="1500" b="1">
-                <a:solidFill>
-                  <a:sysClr val="windowText" lastClr="000000"/>
-                </a:solidFill>
-                <a:latin typeface="Arial" panose="020B0604020202020204" pitchFamily="34" charset="0"/>
-                <a:ea typeface="Microsoft YaHei Light" panose="020B0502040204020203" charset="-122"/>
-                <a:cs typeface="Arial" panose="020B0604020202020204" pitchFamily="34" charset="0"/>
-              </a:endParaRPr>
-            </a:p>
-          </p:txBody>
-        </p:sp>
-      </p:grpSp>
-      <p:pic>
-        <p:nvPicPr>
-          <p:cNvPr id="204" name="图片 203" descr="templates\docerresourceshop\icons\\32313539323731353b32313539323730373bcbbcbfbc"/>
-          <p:cNvPicPr>
-            <a:picLocks noChangeAspect="1"/>
-          </p:cNvPicPr>
-          <p:nvPr>
-            <p:custDataLst>
-              <p:tags r:id="rId70"/>
-            </p:custDataLst>
-          </p:nvPr>
-        </p:nvPicPr>
-        <p:blipFill>
-          <a:blip r:embed="rId71">
-            <a:extLst>
-              <a:ext uri="{96DAC541-7B7A-43D3-8B79-37D633B846F1}">
-                <asvg:svgBlip xmlns:asvg="http://schemas.microsoft.com/office/drawing/2016/SVG/main" r:embed="rId72"/>
-              </a:ext>
-            </a:extLst>
-          </a:blip>
-          <a:stretch>
-            <a:fillRect/>
-          </a:stretch>
-        </p:blipFill>
-        <p:spPr>
-          <a:xfrm>
-            <a:off x="271780" y="955040"/>
-            <a:ext cx="1614170" cy="1614170"/>
-          </a:xfrm>
-          <a:prstGeom prst="rect">
-            <a:avLst/>
-          </a:prstGeom>
-        </p:spPr>
-      </p:pic>
       <p:sp>
         <p:nvSpPr>
-          <p:cNvPr id="10" name="矩形 9"/>
+          <p:cNvPr id="188" name="矩形 187" descr="7b0a20202020227461726765744964223a202270726f636573734f6e6c696e65576f7264417274220a7d0a"/>
           <p:cNvSpPr/>
           <p:nvPr>
             <p:custDataLst>
-              <p:tags r:id="rId73"/>
+              <p:tags r:id="rId59"/>
             </p:custDataLst>
           </p:nvPr>
         </p:nvSpPr>
         <p:spPr>
           <a:xfrm>
-            <a:off x="7700645" y="4820920"/>
-            <a:ext cx="1332000" cy="791845"/>
+            <a:off x="600075" y="6111875"/>
+            <a:ext cx="899795" cy="360045"/>
           </a:xfrm>
           <a:prstGeom prst="rect">
             <a:avLst/>
           </a:prstGeom>
           <a:solidFill>
-            <a:sysClr val="window" lastClr="FFFFFF"/>
+            <a:srgbClr val="00B050"/>
           </a:solidFill>
           <a:ln w="12700">
             <a:solidFill>
-              <a:sysClr val="windowText" lastClr="000000"/>
+              <a:sysClr val="window" lastClr="FFFFFF"/>
             </a:solidFill>
+            <a:prstDash val="solid"/>
           </a:ln>
+          <a:effectLst>
+            <a:outerShdw blurRad="50800" dist="38100" dir="2700000" algn="tl" rotWithShape="0">
+              <a:prstClr val="black">
+                <a:alpha val="40000"/>
+              </a:prstClr>
+            </a:outerShdw>
+          </a:effectLst>
         </p:spPr>
         <p:style>
           <a:lnRef idx="2">
@@ -25615,48 +24824,21 @@
         <p:txBody>
           <a:bodyPr rtlCol="0" anchor="ctr"/>
           <a:p>
-            <a:pPr algn="ctr" fontAlgn="auto">
-              <a:lnSpc>
-                <a:spcPct val="100000"/>
-              </a:lnSpc>
-            </a:pPr>
+            <a:pPr algn="ctr"/>
             <a:r>
-              <a:rPr lang="zh-CN" altLang="en-US" sz="1500">
-                <a:solidFill>
-                  <a:sysClr val="windowText" lastClr="000000"/>
-                </a:solidFill>
-                <a:latin typeface="Arial" panose="020B0604020202020204" pitchFamily="34" charset="0"/>
-                <a:ea typeface="Microsoft YaHei Light" panose="020B0502040204020203" charset="-122"/>
-                <a:cs typeface="Arial" panose="020B0604020202020204" pitchFamily="34" charset="0"/>
-                <a:sym typeface="Microsoft YaHei Light" panose="020B0502040204020203" charset="-122"/>
-              </a:rPr>
-              <a:t>Android</a:t>
-            </a:r>
-            <a:r>
-              <a:rPr lang="zh-CN" altLang="en-US" sz="1500">
-                <a:solidFill>
-                  <a:sysClr val="windowText" lastClr="000000"/>
+              <a:rPr lang="zh-CN" altLang="en-US" sz="1500" b="1" dirty="0">
+                <a:solidFill>
+                  <a:sysClr val="window" lastClr="FFFFFF"/>
                 </a:solidFill>
                 <a:latin typeface="Arial" panose="020B0604020202020204" pitchFamily="34" charset="0"/>
                 <a:ea typeface="Microsoft YaHei Light" panose="020B0502040204020203" charset="-122"/>
                 <a:cs typeface="Arial" panose="020B0604020202020204" pitchFamily="34" charset="0"/>
               </a:rPr>
-              <a:t> </a:t>
+              <a:t>MalFox</a:t>
             </a:r>
-            <a:r>
-              <a:rPr lang="en-US" altLang="zh-CN" sz="1500">
-                <a:solidFill>
-                  <a:sysClr val="windowText" lastClr="000000"/>
-                </a:solidFill>
-                <a:latin typeface="Arial" panose="020B0604020202020204" pitchFamily="34" charset="0"/>
-                <a:ea typeface="Microsoft YaHei Light" panose="020B0502040204020203" charset="-122"/>
-                <a:cs typeface="Arial" panose="020B0604020202020204" pitchFamily="34" charset="0"/>
-              </a:rPr>
-              <a:t>Vulnaerability Analysis</a:t>
-            </a:r>
-            <a:endParaRPr lang="en-US" altLang="zh-CN" sz="1500">
+            <a:endParaRPr lang="zh-CN" altLang="en-US" sz="1500" b="1" dirty="0">
               <a:solidFill>
-                <a:sysClr val="windowText" lastClr="000000"/>
+                <a:sysClr val="window" lastClr="FFFFFF"/>
               </a:solidFill>
               <a:latin typeface="Arial" panose="020B0604020202020204" pitchFamily="34" charset="0"/>
               <a:ea typeface="Microsoft YaHei Light" panose="020B0502040204020203" charset="-122"/>
@@ -25667,30 +24849,38 @@
       </p:sp>
       <p:sp>
         <p:nvSpPr>
-          <p:cNvPr id="13" name="矩形 12"/>
+          <p:cNvPr id="189" name="矩形 188" descr="7b0a20202020227461726765744964223a202270726f636573734f6e6c696e65576f7264417274220a7d0a"/>
           <p:cNvSpPr/>
           <p:nvPr>
             <p:custDataLst>
-              <p:tags r:id="rId74"/>
+              <p:tags r:id="rId60"/>
             </p:custDataLst>
           </p:nvPr>
         </p:nvSpPr>
         <p:spPr>
           <a:xfrm>
-            <a:off x="9174250" y="4820920"/>
-            <a:ext cx="1331595" cy="791845"/>
+            <a:off x="1710055" y="6116955"/>
+            <a:ext cx="899795" cy="360045"/>
           </a:xfrm>
           <a:prstGeom prst="rect">
             <a:avLst/>
           </a:prstGeom>
           <a:solidFill>
-            <a:sysClr val="window" lastClr="FFFFFF"/>
+            <a:srgbClr val="00B050"/>
           </a:solidFill>
           <a:ln w="12700">
             <a:solidFill>
-              <a:sysClr val="windowText" lastClr="000000"/>
+              <a:sysClr val="window" lastClr="FFFFFF"/>
             </a:solidFill>
+            <a:prstDash val="solid"/>
           </a:ln>
+          <a:effectLst>
+            <a:outerShdw blurRad="50800" dist="38100" dir="2700000" algn="tl" rotWithShape="0">
+              <a:prstClr val="black">
+                <a:alpha val="40000"/>
+              </a:prstClr>
+            </a:outerShdw>
+          </a:effectLst>
         </p:spPr>
         <p:style>
           <a:lnRef idx="2">
@@ -25711,48 +24901,32 @@
         <p:txBody>
           <a:bodyPr rtlCol="0" anchor="ctr"/>
           <a:p>
-            <a:pPr algn="ctr" fontAlgn="auto">
-              <a:lnSpc>
-                <a:spcPct val="100000"/>
-              </a:lnSpc>
-            </a:pPr>
+            <a:pPr algn="ctr"/>
             <a:r>
-              <a:rPr lang="en-US" altLang="zh-CN" sz="1500">
-                <a:solidFill>
-                  <a:sysClr val="windowText" lastClr="000000"/>
-                </a:solidFill>
-                <a:latin typeface="Arial" panose="020B0604020202020204" pitchFamily="34" charset="0"/>
-                <a:ea typeface="Microsoft YaHei Light" panose="020B0502040204020203" charset="-122"/>
-                <a:cs typeface="Arial" panose="020B0604020202020204" pitchFamily="34" charset="0"/>
-                <a:sym typeface="Microsoft YaHei Light" panose="020B0502040204020203" charset="-122"/>
-              </a:rPr>
-              <a:t>Windows</a:t>
-            </a:r>
-            <a:r>
-              <a:rPr lang="zh-CN" altLang="en-US" sz="1500">
-                <a:solidFill>
-                  <a:sysClr val="windowText" lastClr="000000"/>
+              <a:rPr lang="zh-CN" altLang="en-US" sz="1500" b="1" dirty="0">
+                <a:solidFill>
+                  <a:sysClr val="window" lastClr="FFFFFF"/>
                 </a:solidFill>
                 <a:latin typeface="Arial" panose="020B0604020202020204" pitchFamily="34" charset="0"/>
                 <a:ea typeface="Microsoft YaHei Light" panose="020B0502040204020203" charset="-122"/>
                 <a:cs typeface="Arial" panose="020B0604020202020204" pitchFamily="34" charset="0"/>
               </a:rPr>
-              <a:t> </a:t>
+              <a:t>Mal</a:t>
             </a:r>
             <a:r>
-              <a:rPr lang="en-US" altLang="zh-CN" sz="1500">
-                <a:solidFill>
-                  <a:sysClr val="windowText" lastClr="000000"/>
+              <a:rPr lang="en-US" altLang="zh-CN" sz="1500" b="1" dirty="0">
+                <a:solidFill>
+                  <a:sysClr val="window" lastClr="FFFFFF"/>
                 </a:solidFill>
                 <a:latin typeface="Arial" panose="020B0604020202020204" pitchFamily="34" charset="0"/>
                 <a:ea typeface="Microsoft YaHei Light" panose="020B0502040204020203" charset="-122"/>
                 <a:cs typeface="Arial" panose="020B0604020202020204" pitchFamily="34" charset="0"/>
               </a:rPr>
-              <a:t>Vulnerability Analysis</a:t>
+              <a:t>Info</a:t>
             </a:r>
-            <a:endParaRPr lang="en-US" altLang="zh-CN" sz="1500">
+            <a:endParaRPr lang="en-US" altLang="zh-CN" sz="1500" b="1" dirty="0">
               <a:solidFill>
-                <a:sysClr val="windowText" lastClr="000000"/>
+                <a:sysClr val="window" lastClr="FFFFFF"/>
               </a:solidFill>
               <a:latin typeface="Arial" panose="020B0604020202020204" pitchFamily="34" charset="0"/>
               <a:ea typeface="Microsoft YaHei Light" panose="020B0502040204020203" charset="-122"/>
@@ -25763,30 +24937,38 @@
       </p:sp>
       <p:sp>
         <p:nvSpPr>
-          <p:cNvPr id="14" name="矩形 13"/>
+          <p:cNvPr id="190" name="矩形 189" descr="7b0a20202020227461726765744964223a202270726f636573734f6e6c696e65576f7264417274220a7d0a"/>
           <p:cNvSpPr/>
           <p:nvPr>
             <p:custDataLst>
-              <p:tags r:id="rId75"/>
+              <p:tags r:id="rId61"/>
             </p:custDataLst>
           </p:nvPr>
         </p:nvSpPr>
         <p:spPr>
           <a:xfrm>
-            <a:off x="10647450" y="4820920"/>
-            <a:ext cx="1331595" cy="791845"/>
+            <a:off x="5589905" y="6087745"/>
+            <a:ext cx="791845" cy="360045"/>
           </a:xfrm>
           <a:prstGeom prst="rect">
             <a:avLst/>
           </a:prstGeom>
           <a:solidFill>
-            <a:sysClr val="window" lastClr="FFFFFF"/>
+            <a:srgbClr val="00B050"/>
           </a:solidFill>
           <a:ln w="12700">
             <a:solidFill>
-              <a:sysClr val="windowText" lastClr="000000"/>
+              <a:sysClr val="window" lastClr="FFFFFF"/>
             </a:solidFill>
+            <a:prstDash val="solid"/>
           </a:ln>
+          <a:effectLst>
+            <a:outerShdw blurRad="50800" dist="38100" dir="2700000" algn="tl" rotWithShape="0">
+              <a:prstClr val="black">
+                <a:alpha val="40000"/>
+              </a:prstClr>
+            </a:outerShdw>
+          </a:effectLst>
         </p:spPr>
         <p:style>
           <a:lnRef idx="2">
@@ -25807,48 +24989,96 @@
         <p:txBody>
           <a:bodyPr rtlCol="0" anchor="ctr"/>
           <a:p>
-            <a:pPr algn="ctr" fontAlgn="auto">
-              <a:lnSpc>
-                <a:spcPct val="100000"/>
-              </a:lnSpc>
-            </a:pPr>
+            <a:pPr algn="ctr"/>
             <a:r>
-              <a:rPr lang="en-US" altLang="zh-CN" sz="1500">
-                <a:solidFill>
-                  <a:sysClr val="windowText" lastClr="000000"/>
+              <a:rPr lang="en-US" sz="1500" b="1" dirty="0">
+                <a:solidFill>
+                  <a:sysClr val="window" lastClr="FFFFFF"/>
                 </a:solidFill>
                 <a:latin typeface="Arial" panose="020B0604020202020204" pitchFamily="34" charset="0"/>
-                <a:ea typeface="Microsoft YaHei Light" panose="020B0502040204020203" charset="-122"/>
                 <a:cs typeface="Arial" panose="020B0604020202020204" pitchFamily="34" charset="0"/>
-                <a:sym typeface="Microsoft YaHei Light" panose="020B0502040204020203" charset="-122"/>
               </a:rPr>
-              <a:t>Linux</a:t>
+              <a:t>VisMal</a:t>
             </a:r>
+            <a:endParaRPr lang="en-US" sz="1500" b="1" dirty="0">
+              <a:solidFill>
+                <a:sysClr val="window" lastClr="FFFFFF"/>
+              </a:solidFill>
+              <a:latin typeface="Arial" panose="020B0604020202020204" pitchFamily="34" charset="0"/>
+              <a:cs typeface="Arial" panose="020B0604020202020204" pitchFamily="34" charset="0"/>
+            </a:endParaRPr>
+          </a:p>
+        </p:txBody>
+      </p:sp>
+      <p:sp>
+        <p:nvSpPr>
+          <p:cNvPr id="192" name="矩形 191"/>
+          <p:cNvSpPr/>
+          <p:nvPr>
+            <p:custDataLst>
+              <p:tags r:id="rId62"/>
+            </p:custDataLst>
+          </p:nvPr>
+        </p:nvSpPr>
+        <p:spPr>
+          <a:xfrm>
+            <a:off x="7295515" y="6087745"/>
+            <a:ext cx="791845" cy="360045"/>
+          </a:xfrm>
+          <a:prstGeom prst="rect">
+            <a:avLst/>
+          </a:prstGeom>
+          <a:solidFill>
+            <a:srgbClr val="00B050"/>
+          </a:solidFill>
+          <a:ln w="12700">
+            <a:solidFill>
+              <a:sysClr val="window" lastClr="FFFFFF"/>
+            </a:solidFill>
+            <a:prstDash val="solid"/>
+          </a:ln>
+          <a:effectLst>
+            <a:outerShdw blurRad="50800" dist="38100" dir="2700000" algn="tl" rotWithShape="0">
+              <a:prstClr val="black">
+                <a:alpha val="40000"/>
+              </a:prstClr>
+            </a:outerShdw>
+          </a:effectLst>
+        </p:spPr>
+        <p:style>
+          <a:lnRef idx="2">
+            <a:srgbClr val="005CA2">
+              <a:shade val="50000"/>
+            </a:srgbClr>
+          </a:lnRef>
+          <a:fillRef idx="1">
+            <a:srgbClr val="005CA2"/>
+          </a:fillRef>
+          <a:effectRef idx="0">
+            <a:srgbClr val="005CA2"/>
+          </a:effectRef>
+          <a:fontRef idx="minor">
+            <a:sysClr val="window" lastClr="FFFFFF"/>
+          </a:fontRef>
+        </p:style>
+        <p:txBody>
+          <a:bodyPr rtlCol="0" anchor="ctr"/>
+          <a:p>
+            <a:pPr algn="ctr"/>
             <a:r>
-              <a:rPr lang="zh-CN" altLang="en-US" sz="1500">
-                <a:solidFill>
-                  <a:sysClr val="windowText" lastClr="000000"/>
+              <a:rPr lang="en-US" altLang="zh-CN" sz="1500" b="1">
+                <a:solidFill>
+                  <a:schemeClr val="bg1"/>
                 </a:solidFill>
                 <a:latin typeface="Arial" panose="020B0604020202020204" pitchFamily="34" charset="0"/>
                 <a:ea typeface="Microsoft YaHei Light" panose="020B0502040204020203" charset="-122"/>
                 <a:cs typeface="Arial" panose="020B0604020202020204" pitchFamily="34" charset="0"/>
               </a:rPr>
-              <a:t> </a:t>
+              <a:t>VisBin</a:t>
             </a:r>
-            <a:r>
-              <a:rPr lang="en-US" altLang="zh-CN" sz="1500">
-                <a:solidFill>
-                  <a:sysClr val="windowText" lastClr="000000"/>
-                </a:solidFill>
-                <a:latin typeface="Arial" panose="020B0604020202020204" pitchFamily="34" charset="0"/>
-                <a:ea typeface="Microsoft YaHei Light" panose="020B0502040204020203" charset="-122"/>
-                <a:cs typeface="Arial" panose="020B0604020202020204" pitchFamily="34" charset="0"/>
-              </a:rPr>
-              <a:t>Vulnerability Analysis</a:t>
-            </a:r>
-            <a:endParaRPr lang="en-US" altLang="zh-CN" sz="1500">
+            <a:endParaRPr lang="en-US" altLang="zh-CN" sz="1500" b="1">
               <a:solidFill>
-                <a:sysClr val="windowText" lastClr="000000"/>
+                <a:schemeClr val="bg1"/>
               </a:solidFill>
               <a:latin typeface="Arial" panose="020B0604020202020204" pitchFamily="34" charset="0"/>
               <a:ea typeface="Microsoft YaHei Light" panose="020B0502040204020203" charset="-122"/>
@@ -25859,17 +25089,94 @@
       </p:sp>
       <p:sp>
         <p:nvSpPr>
-          <p:cNvPr id="15" name="矩形 14"/>
+          <p:cNvPr id="193" name="矩形 192"/>
           <p:cNvSpPr/>
           <p:nvPr>
             <p:custDataLst>
-              <p:tags r:id="rId76"/>
+              <p:tags r:id="rId63"/>
             </p:custDataLst>
           </p:nvPr>
         </p:nvSpPr>
         <p:spPr>
           <a:xfrm>
-            <a:off x="7920355" y="6004560"/>
+            <a:off x="4345305" y="6087745"/>
+            <a:ext cx="1005840" cy="360045"/>
+          </a:xfrm>
+          <a:prstGeom prst="rect">
+            <a:avLst/>
+          </a:prstGeom>
+          <a:solidFill>
+            <a:srgbClr val="00B050"/>
+          </a:solidFill>
+          <a:ln w="12700">
+            <a:solidFill>
+              <a:sysClr val="window" lastClr="FFFFFF"/>
+            </a:solidFill>
+            <a:prstDash val="solid"/>
+          </a:ln>
+          <a:effectLst>
+            <a:outerShdw blurRad="50800" dist="38100" dir="2700000" algn="tl" rotWithShape="0">
+              <a:prstClr val="black">
+                <a:alpha val="40000"/>
+              </a:prstClr>
+            </a:outerShdw>
+          </a:effectLst>
+        </p:spPr>
+        <p:style>
+          <a:lnRef idx="2">
+            <a:srgbClr val="005CA2">
+              <a:shade val="50000"/>
+            </a:srgbClr>
+          </a:lnRef>
+          <a:fillRef idx="1">
+            <a:srgbClr val="005CA2"/>
+          </a:fillRef>
+          <a:effectRef idx="0">
+            <a:srgbClr val="005CA2"/>
+          </a:effectRef>
+          <a:fontRef idx="minor">
+            <a:sysClr val="window" lastClr="FFFFFF"/>
+          </a:fontRef>
+        </p:style>
+        <p:txBody>
+          <a:bodyPr rtlCol="0" anchor="ctr"/>
+          <a:p>
+            <a:pPr algn="ctr"/>
+            <a:r>
+              <a:rPr lang="zh-CN" altLang="en-US" sz="1500" b="1">
+                <a:solidFill>
+                  <a:schemeClr val="bg1"/>
+                </a:solidFill>
+                <a:latin typeface="Arial" panose="020B0604020202020204" pitchFamily="34" charset="0"/>
+                <a:ea typeface="Microsoft YaHei Light" panose="020B0502040204020203" charset="-122"/>
+                <a:cs typeface="Arial" panose="020B0604020202020204" pitchFamily="34" charset="0"/>
+              </a:rPr>
+              <a:t>ContMal</a:t>
+            </a:r>
+            <a:endParaRPr lang="zh-CN" altLang="en-US" sz="1500" b="1">
+              <a:solidFill>
+                <a:schemeClr val="bg1"/>
+              </a:solidFill>
+              <a:latin typeface="Arial" panose="020B0604020202020204" pitchFamily="34" charset="0"/>
+              <a:ea typeface="Microsoft YaHei Light" panose="020B0502040204020203" charset="-122"/>
+              <a:cs typeface="Arial" panose="020B0604020202020204" pitchFamily="34" charset="0"/>
+            </a:endParaRPr>
+          </a:p>
+        </p:txBody>
+      </p:sp>
+      <p:sp>
+        <p:nvSpPr>
+          <p:cNvPr id="194" name="矩形 193"/>
+          <p:cNvSpPr/>
+          <p:nvPr>
+            <p:custDataLst>
+              <p:tags r:id="rId64"/>
+            </p:custDataLst>
+          </p:nvPr>
+        </p:nvSpPr>
+        <p:spPr>
+          <a:xfrm>
+            <a:off x="9582785" y="6087745"/>
             <a:ext cx="899795" cy="360045"/>
           </a:xfrm>
           <a:prstGeom prst="rect">
@@ -25920,7 +25227,7 @@
                 <a:ea typeface="Microsoft YaHei Light" panose="020B0502040204020203" charset="-122"/>
                 <a:cs typeface="Arial" panose="020B0604020202020204" pitchFamily="34" charset="0"/>
               </a:rPr>
-              <a:t>AndVul</a:t>
+              <a:t>WinVul</a:t>
             </a:r>
             <a:endParaRPr lang="en-US" altLang="zh-CN" sz="1500" b="1">
               <a:solidFill>
@@ -25933,19 +25240,341 @@
           </a:p>
         </p:txBody>
       </p:sp>
+      <p:pic>
+        <p:nvPicPr>
+          <p:cNvPr id="204" name="图片 203" descr="templates\docerresourceshop\icons\\32313539323731353b32313539323730373bcbbcbfbc"/>
+          <p:cNvPicPr>
+            <a:picLocks noChangeAspect="1"/>
+          </p:cNvPicPr>
+          <p:nvPr>
+            <p:custDataLst>
+              <p:tags r:id="rId65"/>
+            </p:custDataLst>
+          </p:nvPr>
+        </p:nvPicPr>
+        <p:blipFill>
+          <a:blip r:embed="rId66">
+            <a:extLst>
+              <a:ext uri="{96DAC541-7B7A-43D3-8B79-37D633B846F1}">
+                <asvg:svgBlip xmlns:asvg="http://schemas.microsoft.com/office/drawing/2016/SVG/main" r:embed="rId67"/>
+              </a:ext>
+            </a:extLst>
+          </a:blip>
+          <a:stretch>
+            <a:fillRect/>
+          </a:stretch>
+        </p:blipFill>
+        <p:spPr>
+          <a:xfrm>
+            <a:off x="147955" y="935990"/>
+            <a:ext cx="1614170" cy="1614170"/>
+          </a:xfrm>
+          <a:prstGeom prst="rect">
+            <a:avLst/>
+          </a:prstGeom>
+        </p:spPr>
+      </p:pic>
       <p:sp>
         <p:nvSpPr>
-          <p:cNvPr id="16" name="矩形 15"/>
+          <p:cNvPr id="10" name="矩形 9"/>
           <p:cNvSpPr/>
           <p:nvPr>
             <p:custDataLst>
-              <p:tags r:id="rId77"/>
+              <p:tags r:id="rId68"/>
             </p:custDataLst>
           </p:nvPr>
         </p:nvSpPr>
         <p:spPr>
           <a:xfrm>
-            <a:off x="10882400" y="6015355"/>
+            <a:off x="8053070" y="4820920"/>
+            <a:ext cx="1280160" cy="791845"/>
+          </a:xfrm>
+          <a:prstGeom prst="rect">
+            <a:avLst/>
+          </a:prstGeom>
+          <a:solidFill>
+            <a:sysClr val="window" lastClr="FFFFFF"/>
+          </a:solidFill>
+          <a:ln w="12700">
+            <a:solidFill>
+              <a:sysClr val="windowText" lastClr="000000"/>
+            </a:solidFill>
+          </a:ln>
+        </p:spPr>
+        <p:style>
+          <a:lnRef idx="2">
+            <a:srgbClr val="005CA2">
+              <a:shade val="50000"/>
+            </a:srgbClr>
+          </a:lnRef>
+          <a:fillRef idx="1">
+            <a:srgbClr val="005CA2"/>
+          </a:fillRef>
+          <a:effectRef idx="0">
+            <a:srgbClr val="005CA2"/>
+          </a:effectRef>
+          <a:fontRef idx="minor">
+            <a:sysClr val="window" lastClr="FFFFFF"/>
+          </a:fontRef>
+        </p:style>
+        <p:txBody>
+          <a:bodyPr rtlCol="0" anchor="ctr"/>
+          <a:p>
+            <a:pPr algn="ctr" fontAlgn="auto">
+              <a:lnSpc>
+                <a:spcPct val="100000"/>
+              </a:lnSpc>
+            </a:pPr>
+            <a:r>
+              <a:rPr lang="zh-CN" altLang="en-US" sz="1500">
+                <a:solidFill>
+                  <a:sysClr val="windowText" lastClr="000000"/>
+                </a:solidFill>
+                <a:latin typeface="Arial" panose="020B0604020202020204" pitchFamily="34" charset="0"/>
+                <a:ea typeface="Microsoft YaHei Light" panose="020B0502040204020203" charset="-122"/>
+                <a:cs typeface="Arial" panose="020B0604020202020204" pitchFamily="34" charset="0"/>
+                <a:sym typeface="Microsoft YaHei Light" panose="020B0502040204020203" charset="-122"/>
+              </a:rPr>
+              <a:t>Android</a:t>
+            </a:r>
+            <a:r>
+              <a:rPr lang="zh-CN" altLang="en-US" sz="1500">
+                <a:solidFill>
+                  <a:sysClr val="windowText" lastClr="000000"/>
+                </a:solidFill>
+                <a:latin typeface="Arial" panose="020B0604020202020204" pitchFamily="34" charset="0"/>
+                <a:ea typeface="Microsoft YaHei Light" panose="020B0502040204020203" charset="-122"/>
+                <a:cs typeface="Arial" panose="020B0604020202020204" pitchFamily="34" charset="0"/>
+              </a:rPr>
+              <a:t> </a:t>
+            </a:r>
+            <a:r>
+              <a:rPr lang="en-US" altLang="zh-CN" sz="1500">
+                <a:solidFill>
+                  <a:sysClr val="windowText" lastClr="000000"/>
+                </a:solidFill>
+                <a:latin typeface="Arial" panose="020B0604020202020204" pitchFamily="34" charset="0"/>
+                <a:ea typeface="Microsoft YaHei Light" panose="020B0502040204020203" charset="-122"/>
+                <a:cs typeface="Arial" panose="020B0604020202020204" pitchFamily="34" charset="0"/>
+              </a:rPr>
+              <a:t>Vulnerability Analysis</a:t>
+            </a:r>
+            <a:endParaRPr lang="en-US" altLang="zh-CN" sz="1500">
+              <a:solidFill>
+                <a:sysClr val="windowText" lastClr="000000"/>
+              </a:solidFill>
+              <a:latin typeface="Arial" panose="020B0604020202020204" pitchFamily="34" charset="0"/>
+              <a:ea typeface="Microsoft YaHei Light" panose="020B0502040204020203" charset="-122"/>
+              <a:cs typeface="Arial" panose="020B0604020202020204" pitchFamily="34" charset="0"/>
+            </a:endParaRPr>
+          </a:p>
+        </p:txBody>
+      </p:sp>
+      <p:sp>
+        <p:nvSpPr>
+          <p:cNvPr id="13" name="矩形 12"/>
+          <p:cNvSpPr/>
+          <p:nvPr>
+            <p:custDataLst>
+              <p:tags r:id="rId69"/>
+            </p:custDataLst>
+          </p:nvPr>
+        </p:nvSpPr>
+        <p:spPr>
+          <a:xfrm>
+            <a:off x="9392920" y="4820920"/>
+            <a:ext cx="1280160" cy="791845"/>
+          </a:xfrm>
+          <a:prstGeom prst="rect">
+            <a:avLst/>
+          </a:prstGeom>
+          <a:solidFill>
+            <a:sysClr val="window" lastClr="FFFFFF"/>
+          </a:solidFill>
+          <a:ln w="12700">
+            <a:solidFill>
+              <a:sysClr val="windowText" lastClr="000000"/>
+            </a:solidFill>
+          </a:ln>
+        </p:spPr>
+        <p:style>
+          <a:lnRef idx="2">
+            <a:srgbClr val="005CA2">
+              <a:shade val="50000"/>
+            </a:srgbClr>
+          </a:lnRef>
+          <a:fillRef idx="1">
+            <a:srgbClr val="005CA2"/>
+          </a:fillRef>
+          <a:effectRef idx="0">
+            <a:srgbClr val="005CA2"/>
+          </a:effectRef>
+          <a:fontRef idx="minor">
+            <a:sysClr val="window" lastClr="FFFFFF"/>
+          </a:fontRef>
+        </p:style>
+        <p:txBody>
+          <a:bodyPr rtlCol="0" anchor="ctr"/>
+          <a:p>
+            <a:pPr algn="ctr" fontAlgn="auto">
+              <a:lnSpc>
+                <a:spcPct val="100000"/>
+              </a:lnSpc>
+            </a:pPr>
+            <a:r>
+              <a:rPr lang="en-US" altLang="zh-CN" sz="1500">
+                <a:solidFill>
+                  <a:sysClr val="windowText" lastClr="000000"/>
+                </a:solidFill>
+                <a:latin typeface="Arial" panose="020B0604020202020204" pitchFamily="34" charset="0"/>
+                <a:ea typeface="Microsoft YaHei Light" panose="020B0502040204020203" charset="-122"/>
+                <a:cs typeface="Arial" panose="020B0604020202020204" pitchFamily="34" charset="0"/>
+                <a:sym typeface="Microsoft YaHei Light" panose="020B0502040204020203" charset="-122"/>
+              </a:rPr>
+              <a:t>Windows</a:t>
+            </a:r>
+            <a:r>
+              <a:rPr lang="zh-CN" altLang="en-US" sz="1500">
+                <a:solidFill>
+                  <a:sysClr val="windowText" lastClr="000000"/>
+                </a:solidFill>
+                <a:latin typeface="Arial" panose="020B0604020202020204" pitchFamily="34" charset="0"/>
+                <a:ea typeface="Microsoft YaHei Light" panose="020B0502040204020203" charset="-122"/>
+                <a:cs typeface="Arial" panose="020B0604020202020204" pitchFamily="34" charset="0"/>
+              </a:rPr>
+              <a:t> </a:t>
+            </a:r>
+            <a:r>
+              <a:rPr lang="en-US" altLang="zh-CN" sz="1500">
+                <a:solidFill>
+                  <a:sysClr val="windowText" lastClr="000000"/>
+                </a:solidFill>
+                <a:latin typeface="Arial" panose="020B0604020202020204" pitchFamily="34" charset="0"/>
+                <a:ea typeface="Microsoft YaHei Light" panose="020B0502040204020203" charset="-122"/>
+                <a:cs typeface="Arial" panose="020B0604020202020204" pitchFamily="34" charset="0"/>
+              </a:rPr>
+              <a:t>Vulnerability Analysis</a:t>
+            </a:r>
+            <a:endParaRPr lang="en-US" altLang="zh-CN" sz="1500">
+              <a:solidFill>
+                <a:sysClr val="windowText" lastClr="000000"/>
+              </a:solidFill>
+              <a:latin typeface="Arial" panose="020B0604020202020204" pitchFamily="34" charset="0"/>
+              <a:ea typeface="Microsoft YaHei Light" panose="020B0502040204020203" charset="-122"/>
+              <a:cs typeface="Arial" panose="020B0604020202020204" pitchFamily="34" charset="0"/>
+            </a:endParaRPr>
+          </a:p>
+        </p:txBody>
+      </p:sp>
+      <p:sp>
+        <p:nvSpPr>
+          <p:cNvPr id="14" name="矩形 13"/>
+          <p:cNvSpPr/>
+          <p:nvPr>
+            <p:custDataLst>
+              <p:tags r:id="rId70"/>
+            </p:custDataLst>
+          </p:nvPr>
+        </p:nvSpPr>
+        <p:spPr>
+          <a:xfrm>
+            <a:off x="10732770" y="4820920"/>
+            <a:ext cx="1280160" cy="791845"/>
+          </a:xfrm>
+          <a:prstGeom prst="rect">
+            <a:avLst/>
+          </a:prstGeom>
+          <a:solidFill>
+            <a:sysClr val="window" lastClr="FFFFFF"/>
+          </a:solidFill>
+          <a:ln w="12700">
+            <a:solidFill>
+              <a:sysClr val="windowText" lastClr="000000"/>
+            </a:solidFill>
+          </a:ln>
+        </p:spPr>
+        <p:style>
+          <a:lnRef idx="2">
+            <a:srgbClr val="005CA2">
+              <a:shade val="50000"/>
+            </a:srgbClr>
+          </a:lnRef>
+          <a:fillRef idx="1">
+            <a:srgbClr val="005CA2"/>
+          </a:fillRef>
+          <a:effectRef idx="0">
+            <a:srgbClr val="005CA2"/>
+          </a:effectRef>
+          <a:fontRef idx="minor">
+            <a:sysClr val="window" lastClr="FFFFFF"/>
+          </a:fontRef>
+        </p:style>
+        <p:txBody>
+          <a:bodyPr rtlCol="0" anchor="ctr"/>
+          <a:p>
+            <a:pPr algn="ctr" fontAlgn="auto">
+              <a:lnSpc>
+                <a:spcPct val="100000"/>
+              </a:lnSpc>
+            </a:pPr>
+            <a:r>
+              <a:rPr lang="en-US" altLang="zh-CN" sz="1500">
+                <a:solidFill>
+                  <a:sysClr val="windowText" lastClr="000000"/>
+                </a:solidFill>
+                <a:latin typeface="Arial" panose="020B0604020202020204" pitchFamily="34" charset="0"/>
+                <a:ea typeface="Microsoft YaHei Light" panose="020B0502040204020203" charset="-122"/>
+                <a:cs typeface="Arial" panose="020B0604020202020204" pitchFamily="34" charset="0"/>
+                <a:sym typeface="Microsoft YaHei Light" panose="020B0502040204020203" charset="-122"/>
+              </a:rPr>
+              <a:t>Linux</a:t>
+            </a:r>
+            <a:r>
+              <a:rPr lang="zh-CN" altLang="en-US" sz="1500">
+                <a:solidFill>
+                  <a:sysClr val="windowText" lastClr="000000"/>
+                </a:solidFill>
+                <a:latin typeface="Arial" panose="020B0604020202020204" pitchFamily="34" charset="0"/>
+                <a:ea typeface="Microsoft YaHei Light" panose="020B0502040204020203" charset="-122"/>
+                <a:cs typeface="Arial" panose="020B0604020202020204" pitchFamily="34" charset="0"/>
+              </a:rPr>
+              <a:t> </a:t>
+            </a:r>
+            <a:r>
+              <a:rPr lang="en-US" altLang="zh-CN" sz="1500">
+                <a:solidFill>
+                  <a:sysClr val="windowText" lastClr="000000"/>
+                </a:solidFill>
+                <a:latin typeface="Arial" panose="020B0604020202020204" pitchFamily="34" charset="0"/>
+                <a:ea typeface="Microsoft YaHei Light" panose="020B0502040204020203" charset="-122"/>
+                <a:cs typeface="Arial" panose="020B0604020202020204" pitchFamily="34" charset="0"/>
+              </a:rPr>
+              <a:t>Vulnerability Analysis</a:t>
+            </a:r>
+            <a:endParaRPr lang="en-US" altLang="zh-CN" sz="1500">
+              <a:solidFill>
+                <a:sysClr val="windowText" lastClr="000000"/>
+              </a:solidFill>
+              <a:latin typeface="Arial" panose="020B0604020202020204" pitchFamily="34" charset="0"/>
+              <a:ea typeface="Microsoft YaHei Light" panose="020B0502040204020203" charset="-122"/>
+              <a:cs typeface="Arial" panose="020B0604020202020204" pitchFamily="34" charset="0"/>
+            </a:endParaRPr>
+          </a:p>
+        </p:txBody>
+      </p:sp>
+      <p:sp>
+        <p:nvSpPr>
+          <p:cNvPr id="15" name="矩形 14"/>
+          <p:cNvSpPr/>
+          <p:nvPr>
+            <p:custDataLst>
+              <p:tags r:id="rId71"/>
+            </p:custDataLst>
+          </p:nvPr>
+        </p:nvSpPr>
+        <p:spPr>
+          <a:xfrm>
+            <a:off x="8248015" y="6087745"/>
             <a:ext cx="899795" cy="360045"/>
           </a:xfrm>
           <a:prstGeom prst="rect">
@@ -25996,6 +25625,82 @@
                 <a:ea typeface="Microsoft YaHei Light" panose="020B0502040204020203" charset="-122"/>
                 <a:cs typeface="Arial" panose="020B0604020202020204" pitchFamily="34" charset="0"/>
               </a:rPr>
+              <a:t>AndVul</a:t>
+            </a:r>
+            <a:endParaRPr lang="en-US" altLang="zh-CN" sz="1500" b="1">
+              <a:solidFill>
+                <a:sysClr val="windowText" lastClr="000000"/>
+              </a:solidFill>
+              <a:latin typeface="Arial" panose="020B0604020202020204" pitchFamily="34" charset="0"/>
+              <a:ea typeface="Microsoft YaHei Light" panose="020B0502040204020203" charset="-122"/>
+              <a:cs typeface="Arial" panose="020B0604020202020204" pitchFamily="34" charset="0"/>
+            </a:endParaRPr>
+          </a:p>
+        </p:txBody>
+      </p:sp>
+      <p:sp>
+        <p:nvSpPr>
+          <p:cNvPr id="16" name="矩形 15"/>
+          <p:cNvSpPr/>
+          <p:nvPr>
+            <p:custDataLst>
+              <p:tags r:id="rId72"/>
+            </p:custDataLst>
+          </p:nvPr>
+        </p:nvSpPr>
+        <p:spPr>
+          <a:xfrm>
+            <a:off x="10872875" y="6087745"/>
+            <a:ext cx="899795" cy="360045"/>
+          </a:xfrm>
+          <a:prstGeom prst="rect">
+            <a:avLst/>
+          </a:prstGeom>
+          <a:solidFill>
+            <a:srgbClr val="F89406"/>
+          </a:solidFill>
+          <a:ln w="12700">
+            <a:solidFill>
+              <a:sysClr val="window" lastClr="FFFFFF"/>
+            </a:solidFill>
+          </a:ln>
+          <a:effectLst>
+            <a:outerShdw blurRad="50800" dist="38100" dir="2700000" algn="tl" rotWithShape="0">
+              <a:prstClr val="black">
+                <a:alpha val="40000"/>
+              </a:prstClr>
+            </a:outerShdw>
+          </a:effectLst>
+        </p:spPr>
+        <p:style>
+          <a:lnRef idx="2">
+            <a:srgbClr val="005CA2">
+              <a:shade val="50000"/>
+            </a:srgbClr>
+          </a:lnRef>
+          <a:fillRef idx="1">
+            <a:srgbClr val="005CA2"/>
+          </a:fillRef>
+          <a:effectRef idx="0">
+            <a:srgbClr val="005CA2"/>
+          </a:effectRef>
+          <a:fontRef idx="minor">
+            <a:sysClr val="window" lastClr="FFFFFF"/>
+          </a:fontRef>
+        </p:style>
+        <p:txBody>
+          <a:bodyPr rtlCol="0" anchor="ctr"/>
+          <a:p>
+            <a:pPr algn="ctr"/>
+            <a:r>
+              <a:rPr lang="en-US" altLang="zh-CN" sz="1500" b="1">
+                <a:solidFill>
+                  <a:sysClr val="windowText" lastClr="000000"/>
+                </a:solidFill>
+                <a:latin typeface="Arial" panose="020B0604020202020204" pitchFamily="34" charset="0"/>
+                <a:ea typeface="Microsoft YaHei Light" panose="020B0502040204020203" charset="-122"/>
+                <a:cs typeface="Arial" panose="020B0604020202020204" pitchFamily="34" charset="0"/>
+              </a:rPr>
               <a:t>LinVul</a:t>
             </a:r>
             <a:endParaRPr lang="en-US" altLang="zh-CN" sz="1500" b="1">
@@ -26011,7 +25716,327 @@
       </p:sp>
       <p:cxnSp>
         <p:nvCxnSpPr>
-          <p:cNvPr id="17" name="直接连接符 16"/>
+          <p:cNvPr id="18" name="直接连接符 17"/>
+          <p:cNvCxnSpPr>
+            <a:endCxn id="15" idx="0"/>
+          </p:cNvCxnSpPr>
+          <p:nvPr>
+            <p:custDataLst>
+              <p:tags r:id="rId73"/>
+            </p:custDataLst>
+          </p:nvPr>
+        </p:nvCxnSpPr>
+        <p:spPr>
+          <a:xfrm>
+            <a:off x="8692833" y="5622290"/>
+            <a:ext cx="0" cy="474980"/>
+          </a:xfrm>
+          <a:prstGeom prst="line">
+            <a:avLst/>
+          </a:prstGeom>
+          <a:ln w="25400">
+            <a:solidFill>
+              <a:srgbClr val="092A49"/>
+            </a:solidFill>
+            <a:tailEnd type="triangle" w="med" len="lg"/>
+          </a:ln>
+        </p:spPr>
+        <p:style>
+          <a:lnRef idx="1">
+            <a:srgbClr val="005CA2"/>
+          </a:lnRef>
+          <a:fillRef idx="0">
+            <a:srgbClr val="005CA2"/>
+          </a:fillRef>
+          <a:effectRef idx="0">
+            <a:srgbClr val="005CA2"/>
+          </a:effectRef>
+          <a:fontRef idx="minor">
+            <a:sysClr val="windowText" lastClr="000000"/>
+          </a:fontRef>
+        </p:style>
+      </p:cxnSp>
+      <p:sp>
+        <p:nvSpPr>
+          <p:cNvPr id="2" name="矩形 191"/>
+          <p:cNvSpPr/>
+          <p:nvPr>
+            <p:custDataLst>
+              <p:tags r:id="rId74"/>
+            </p:custDataLst>
+          </p:nvPr>
+        </p:nvSpPr>
+        <p:spPr>
+          <a:xfrm>
+            <a:off x="6442710" y="6087745"/>
+            <a:ext cx="791845" cy="360045"/>
+          </a:xfrm>
+          <a:prstGeom prst="rect">
+            <a:avLst/>
+          </a:prstGeom>
+          <a:solidFill>
+            <a:srgbClr val="00B050"/>
+          </a:solidFill>
+          <a:ln w="12700">
+            <a:solidFill>
+              <a:sysClr val="window" lastClr="FFFFFF"/>
+            </a:solidFill>
+            <a:prstDash val="solid"/>
+          </a:ln>
+          <a:effectLst>
+            <a:outerShdw blurRad="50800" dist="38100" dir="2700000" algn="tl" rotWithShape="0">
+              <a:prstClr val="black">
+                <a:alpha val="40000"/>
+              </a:prstClr>
+            </a:outerShdw>
+          </a:effectLst>
+        </p:spPr>
+        <p:style>
+          <a:lnRef idx="2">
+            <a:srgbClr val="005CA2">
+              <a:shade val="50000"/>
+            </a:srgbClr>
+          </a:lnRef>
+          <a:fillRef idx="1">
+            <a:srgbClr val="005CA2"/>
+          </a:fillRef>
+          <a:effectRef idx="0">
+            <a:srgbClr val="005CA2"/>
+          </a:effectRef>
+          <a:fontRef idx="minor">
+            <a:sysClr val="window" lastClr="FFFFFF"/>
+          </a:fontRef>
+        </p:style>
+        <p:txBody>
+          <a:bodyPr rtlCol="0" anchor="ctr"/>
+          <a:p>
+            <a:pPr algn="ctr"/>
+            <a:r>
+              <a:rPr lang="en-US" altLang="zh-CN" sz="1500" b="1">
+                <a:solidFill>
+                  <a:schemeClr val="bg1"/>
+                </a:solidFill>
+                <a:latin typeface="Arial" panose="020B0604020202020204" pitchFamily="34" charset="0"/>
+                <a:ea typeface="Microsoft YaHei Light" panose="020B0502040204020203" charset="-122"/>
+                <a:cs typeface="Arial" panose="020B0604020202020204" pitchFamily="34" charset="0"/>
+              </a:rPr>
+              <a:t>BBSS</a:t>
+            </a:r>
+            <a:endParaRPr lang="en-US" altLang="zh-CN" sz="1500" b="1">
+              <a:solidFill>
+                <a:schemeClr val="bg1"/>
+              </a:solidFill>
+              <a:latin typeface="Arial" panose="020B0604020202020204" pitchFamily="34" charset="0"/>
+              <a:ea typeface="Microsoft YaHei Light" panose="020B0502040204020203" charset="-122"/>
+              <a:cs typeface="Arial" panose="020B0604020202020204" pitchFamily="34" charset="0"/>
+            </a:endParaRPr>
+          </a:p>
+        </p:txBody>
+      </p:sp>
+      <p:sp>
+        <p:nvSpPr>
+          <p:cNvPr id="4" name="矩形 142"/>
+          <p:cNvSpPr/>
+          <p:nvPr>
+            <p:custDataLst>
+              <p:tags r:id="rId75"/>
+            </p:custDataLst>
+          </p:nvPr>
+        </p:nvSpPr>
+        <p:spPr>
+          <a:xfrm>
+            <a:off x="3170555" y="4793615"/>
+            <a:ext cx="1007745" cy="791845"/>
+          </a:xfrm>
+          <a:prstGeom prst="rect">
+            <a:avLst/>
+          </a:prstGeom>
+          <a:solidFill>
+            <a:sysClr val="window" lastClr="FFFFFF"/>
+          </a:solidFill>
+          <a:ln w="12700">
+            <a:solidFill>
+              <a:sysClr val="windowText" lastClr="000000"/>
+            </a:solidFill>
+          </a:ln>
+        </p:spPr>
+        <p:style>
+          <a:lnRef idx="2">
+            <a:srgbClr val="005CA2">
+              <a:shade val="50000"/>
+            </a:srgbClr>
+          </a:lnRef>
+          <a:fillRef idx="1">
+            <a:srgbClr val="005CA2"/>
+          </a:fillRef>
+          <a:effectRef idx="0">
+            <a:srgbClr val="005CA2"/>
+          </a:effectRef>
+          <a:fontRef idx="minor">
+            <a:sysClr val="window" lastClr="FFFFFF"/>
+          </a:fontRef>
+        </p:style>
+        <p:txBody>
+          <a:bodyPr rtlCol="0" anchor="ctr"/>
+          <a:p>
+            <a:pPr algn="ctr" fontAlgn="auto">
+              <a:lnSpc>
+                <a:spcPct val="100000"/>
+              </a:lnSpc>
+            </a:pPr>
+            <a:r>
+              <a:rPr lang="en-US" altLang="zh-CN" sz="1500">
+                <a:solidFill>
+                  <a:sysClr val="windowText" lastClr="000000"/>
+                </a:solidFill>
+                <a:latin typeface="Arial" panose="020B0604020202020204" pitchFamily="34" charset="0"/>
+                <a:ea typeface="Microsoft YaHei Light" panose="020B0502040204020203" charset="-122"/>
+                <a:cs typeface="Arial" panose="020B0604020202020204" pitchFamily="34" charset="0"/>
+              </a:rPr>
+              <a:t>IOT</a:t>
+            </a:r>
+            <a:r>
+              <a:rPr lang="zh-CN" altLang="en-US" sz="1500">
+                <a:solidFill>
+                  <a:sysClr val="windowText" lastClr="000000"/>
+                </a:solidFill>
+                <a:latin typeface="Arial" panose="020B0604020202020204" pitchFamily="34" charset="0"/>
+                <a:ea typeface="Microsoft YaHei Light" panose="020B0502040204020203" charset="-122"/>
+                <a:cs typeface="Arial" panose="020B0604020202020204" pitchFamily="34" charset="0"/>
+              </a:rPr>
+              <a:t> Malware Defenses</a:t>
+            </a:r>
+            <a:endParaRPr lang="zh-CN" altLang="en-US" sz="1500">
+              <a:solidFill>
+                <a:sysClr val="windowText" lastClr="000000"/>
+              </a:solidFill>
+              <a:latin typeface="Arial" panose="020B0604020202020204" pitchFamily="34" charset="0"/>
+              <a:ea typeface="Microsoft YaHei Light" panose="020B0502040204020203" charset="-122"/>
+              <a:cs typeface="Arial" panose="020B0604020202020204" pitchFamily="34" charset="0"/>
+            </a:endParaRPr>
+          </a:p>
+        </p:txBody>
+      </p:sp>
+      <p:sp>
+        <p:nvSpPr>
+          <p:cNvPr id="6" name="矩形 191"/>
+          <p:cNvSpPr/>
+          <p:nvPr>
+            <p:custDataLst>
+              <p:tags r:id="rId76"/>
+            </p:custDataLst>
+          </p:nvPr>
+        </p:nvSpPr>
+        <p:spPr>
+          <a:xfrm>
+            <a:off x="3070860" y="6087745"/>
+            <a:ext cx="1188720" cy="360045"/>
+          </a:xfrm>
+          <a:prstGeom prst="rect">
+            <a:avLst/>
+          </a:prstGeom>
+          <a:solidFill>
+            <a:srgbClr val="00B050"/>
+          </a:solidFill>
+          <a:ln w="12700">
+            <a:solidFill>
+              <a:sysClr val="window" lastClr="FFFFFF"/>
+            </a:solidFill>
+            <a:prstDash val="solid"/>
+          </a:ln>
+          <a:effectLst>
+            <a:outerShdw blurRad="50800" dist="38100" dir="2700000" algn="tl" rotWithShape="0">
+              <a:prstClr val="black">
+                <a:alpha val="40000"/>
+              </a:prstClr>
+            </a:outerShdw>
+          </a:effectLst>
+        </p:spPr>
+        <p:style>
+          <a:lnRef idx="2">
+            <a:srgbClr val="005CA2">
+              <a:shade val="50000"/>
+            </a:srgbClr>
+          </a:lnRef>
+          <a:fillRef idx="1">
+            <a:srgbClr val="005CA2"/>
+          </a:fillRef>
+          <a:effectRef idx="0">
+            <a:srgbClr val="005CA2"/>
+          </a:effectRef>
+          <a:fontRef idx="minor">
+            <a:sysClr val="window" lastClr="FFFFFF"/>
+          </a:fontRef>
+        </p:style>
+        <p:txBody>
+          <a:bodyPr rtlCol="0" anchor="ctr"/>
+          <a:p>
+            <a:pPr algn="ctr"/>
+            <a:r>
+              <a:rPr lang="en-US" altLang="zh-CN" sz="1500" b="1">
+                <a:solidFill>
+                  <a:schemeClr val="bg1"/>
+                </a:solidFill>
+                <a:latin typeface="Arial" panose="020B0604020202020204" pitchFamily="34" charset="0"/>
+                <a:ea typeface="Microsoft YaHei Light" panose="020B0502040204020203" charset="-122"/>
+                <a:cs typeface="Arial" panose="020B0604020202020204" pitchFamily="34" charset="0"/>
+              </a:rPr>
+              <a:t>Flowguard</a:t>
+            </a:r>
+            <a:endParaRPr lang="en-US" altLang="zh-CN" sz="1500" b="1">
+              <a:solidFill>
+                <a:schemeClr val="bg1"/>
+              </a:solidFill>
+              <a:latin typeface="Arial" panose="020B0604020202020204" pitchFamily="34" charset="0"/>
+              <a:ea typeface="Microsoft YaHei Light" panose="020B0502040204020203" charset="-122"/>
+              <a:cs typeface="Arial" panose="020B0604020202020204" pitchFamily="34" charset="0"/>
+            </a:endParaRPr>
+          </a:p>
+        </p:txBody>
+      </p:sp>
+      <p:cxnSp>
+        <p:nvCxnSpPr>
+          <p:cNvPr id="7" name="直接连接符 180"/>
+          <p:cNvCxnSpPr/>
+          <p:nvPr>
+            <p:custDataLst>
+              <p:tags r:id="rId77"/>
+            </p:custDataLst>
+          </p:nvPr>
+        </p:nvCxnSpPr>
+        <p:spPr>
+          <a:xfrm rot="16200000" flipH="1" flipV="1">
+            <a:off x="3509645" y="4649470"/>
+            <a:ext cx="288290" cy="0"/>
+          </a:xfrm>
+          <a:prstGeom prst="line">
+            <a:avLst/>
+          </a:prstGeom>
+          <a:ln w="25400">
+            <a:solidFill>
+              <a:srgbClr val="C00000"/>
+            </a:solidFill>
+            <a:tailEnd type="triangle" w="med" len="lg"/>
+          </a:ln>
+        </p:spPr>
+        <p:style>
+          <a:lnRef idx="1">
+            <a:srgbClr val="005CA2"/>
+          </a:lnRef>
+          <a:fillRef idx="0">
+            <a:srgbClr val="005CA2"/>
+          </a:fillRef>
+          <a:effectRef idx="0">
+            <a:srgbClr val="005CA2"/>
+          </a:effectRef>
+          <a:fontRef idx="minor">
+            <a:sysClr val="windowText" lastClr="000000"/>
+          </a:fontRef>
+        </p:style>
+      </p:cxnSp>
+      <p:cxnSp>
+        <p:nvCxnSpPr>
+          <p:cNvPr id="8" name="直接连接符 158"/>
           <p:cNvCxnSpPr/>
           <p:nvPr>
             <p:custDataLst>
@@ -26020,9 +26045,49 @@
           </p:nvPr>
         </p:nvCxnSpPr>
         <p:spPr>
-          <a:xfrm rot="16200000" flipH="1" flipV="1">
-            <a:off x="11157585" y="5811520"/>
-            <a:ext cx="360045" cy="0"/>
+          <a:xfrm flipH="1">
+            <a:off x="3653790" y="5585460"/>
+            <a:ext cx="0" cy="499745"/>
+          </a:xfrm>
+          <a:prstGeom prst="line">
+            <a:avLst/>
+          </a:prstGeom>
+          <a:ln w="25400">
+            <a:solidFill>
+              <a:srgbClr val="C00000"/>
+            </a:solidFill>
+            <a:tailEnd type="triangle" w="med" len="lg"/>
+          </a:ln>
+        </p:spPr>
+        <p:style>
+          <a:lnRef idx="1">
+            <a:srgbClr val="005CA2"/>
+          </a:lnRef>
+          <a:fillRef idx="0">
+            <a:srgbClr val="005CA2"/>
+          </a:fillRef>
+          <a:effectRef idx="0">
+            <a:srgbClr val="005CA2"/>
+          </a:effectRef>
+          <a:fontRef idx="minor">
+            <a:sysClr val="windowText" lastClr="000000"/>
+          </a:fontRef>
+        </p:style>
+      </p:cxnSp>
+      <p:cxnSp>
+        <p:nvCxnSpPr>
+          <p:cNvPr id="11" name="直接连接符 163"/>
+          <p:cNvCxnSpPr/>
+          <p:nvPr>
+            <p:custDataLst>
+              <p:tags r:id="rId79"/>
+            </p:custDataLst>
+          </p:nvPr>
+        </p:nvCxnSpPr>
+        <p:spPr>
+          <a:xfrm>
+            <a:off x="8693150" y="4545013"/>
+            <a:ext cx="0" cy="288290"/>
           </a:xfrm>
           <a:prstGeom prst="line">
             <a:avLst/>
@@ -26051,18 +26116,178 @@
       </p:cxnSp>
       <p:cxnSp>
         <p:nvCxnSpPr>
-          <p:cNvPr id="18" name="直接连接符 17"/>
+          <p:cNvPr id="12" name="直接连接符 163"/>
           <p:cNvCxnSpPr/>
           <p:nvPr>
             <p:custDataLst>
-              <p:tags r:id="rId79"/>
+              <p:tags r:id="rId80"/>
+            </p:custDataLst>
+          </p:nvPr>
+        </p:nvCxnSpPr>
+        <p:spPr>
+          <a:xfrm>
+            <a:off x="11304270" y="4528503"/>
+            <a:ext cx="0" cy="305435"/>
+          </a:xfrm>
+          <a:prstGeom prst="line">
+            <a:avLst/>
+          </a:prstGeom>
+          <a:ln w="25400">
+            <a:solidFill>
+              <a:srgbClr val="092A49"/>
+            </a:solidFill>
+            <a:tailEnd type="triangle" w="med" len="lg"/>
+          </a:ln>
+        </p:spPr>
+        <p:style>
+          <a:lnRef idx="1">
+            <a:srgbClr val="005CA2"/>
+          </a:lnRef>
+          <a:fillRef idx="0">
+            <a:srgbClr val="005CA2"/>
+          </a:fillRef>
+          <a:effectRef idx="0">
+            <a:srgbClr val="005CA2"/>
+          </a:effectRef>
+          <a:fontRef idx="minor">
+            <a:sysClr val="windowText" lastClr="000000"/>
+          </a:fontRef>
+        </p:style>
+      </p:cxnSp>
+      <p:cxnSp>
+        <p:nvCxnSpPr>
+          <p:cNvPr id="24" name="直接连接符 172"/>
+          <p:cNvCxnSpPr/>
+          <p:nvPr>
+            <p:custDataLst>
+              <p:tags r:id="rId81"/>
             </p:custDataLst>
           </p:nvPr>
         </p:nvCxnSpPr>
         <p:spPr>
           <a:xfrm rot="16200000" flipH="1" flipV="1">
-            <a:off x="8186420" y="5811520"/>
-            <a:ext cx="360045" cy="0"/>
+            <a:off x="5869940" y="5985510"/>
+            <a:ext cx="252095" cy="0"/>
+          </a:xfrm>
+          <a:prstGeom prst="line">
+            <a:avLst/>
+          </a:prstGeom>
+          <a:ln w="25400">
+            <a:solidFill>
+              <a:srgbClr val="C00000"/>
+            </a:solidFill>
+            <a:tailEnd type="triangle" w="med" len="lg"/>
+          </a:ln>
+        </p:spPr>
+        <p:style>
+          <a:lnRef idx="1">
+            <a:srgbClr val="005CA2"/>
+          </a:lnRef>
+          <a:fillRef idx="0">
+            <a:srgbClr val="005CA2"/>
+          </a:fillRef>
+          <a:effectRef idx="0">
+            <a:srgbClr val="005CA2"/>
+          </a:effectRef>
+          <a:fontRef idx="minor">
+            <a:sysClr val="windowText" lastClr="000000"/>
+          </a:fontRef>
+        </p:style>
+      </p:cxnSp>
+      <p:cxnSp>
+        <p:nvCxnSpPr>
+          <p:cNvPr id="25" name="直接连接符 158"/>
+          <p:cNvCxnSpPr/>
+          <p:nvPr>
+            <p:custDataLst>
+              <p:tags r:id="rId82"/>
+            </p:custDataLst>
+          </p:nvPr>
+        </p:nvCxnSpPr>
+        <p:spPr>
+          <a:xfrm flipH="1">
+            <a:off x="4835525" y="5585460"/>
+            <a:ext cx="0" cy="499745"/>
+          </a:xfrm>
+          <a:prstGeom prst="line">
+            <a:avLst/>
+          </a:prstGeom>
+          <a:ln w="25400">
+            <a:solidFill>
+              <a:srgbClr val="C00000"/>
+            </a:solidFill>
+            <a:tailEnd type="triangle" w="med" len="lg"/>
+          </a:ln>
+        </p:spPr>
+        <p:style>
+          <a:lnRef idx="1">
+            <a:srgbClr val="005CA2"/>
+          </a:lnRef>
+          <a:fillRef idx="0">
+            <a:srgbClr val="005CA2"/>
+          </a:fillRef>
+          <a:effectRef idx="0">
+            <a:srgbClr val="005CA2"/>
+          </a:effectRef>
+          <a:fontRef idx="minor">
+            <a:sysClr val="windowText" lastClr="000000"/>
+          </a:fontRef>
+        </p:style>
+      </p:cxnSp>
+      <p:cxnSp>
+        <p:nvCxnSpPr>
+          <p:cNvPr id="26" name="直接连接符 17"/>
+          <p:cNvCxnSpPr/>
+          <p:nvPr>
+            <p:custDataLst>
+              <p:tags r:id="rId83"/>
+            </p:custDataLst>
+          </p:nvPr>
+        </p:nvCxnSpPr>
+        <p:spPr>
+          <a:xfrm>
+            <a:off x="10032683" y="5622290"/>
+            <a:ext cx="0" cy="474980"/>
+          </a:xfrm>
+          <a:prstGeom prst="line">
+            <a:avLst/>
+          </a:prstGeom>
+          <a:ln w="25400">
+            <a:solidFill>
+              <a:srgbClr val="092A49"/>
+            </a:solidFill>
+            <a:tailEnd type="triangle" w="med" len="lg"/>
+          </a:ln>
+        </p:spPr>
+        <p:style>
+          <a:lnRef idx="1">
+            <a:srgbClr val="005CA2"/>
+          </a:lnRef>
+          <a:fillRef idx="0">
+            <a:srgbClr val="005CA2"/>
+          </a:fillRef>
+          <a:effectRef idx="0">
+            <a:srgbClr val="005CA2"/>
+          </a:effectRef>
+          <a:fontRef idx="minor">
+            <a:sysClr val="windowText" lastClr="000000"/>
+          </a:fontRef>
+        </p:style>
+      </p:cxnSp>
+      <p:cxnSp>
+        <p:nvCxnSpPr>
+          <p:cNvPr id="27" name="直接连接符 17"/>
+          <p:cNvCxnSpPr/>
+          <p:nvPr>
+            <p:custDataLst>
+              <p:tags r:id="rId84"/>
+            </p:custDataLst>
+          </p:nvPr>
+        </p:nvCxnSpPr>
+        <p:spPr>
+          <a:xfrm>
+            <a:off x="11359833" y="5622290"/>
+            <a:ext cx="0" cy="474980"/>
           </a:xfrm>
           <a:prstGeom prst="line">
             <a:avLst/>
@@ -26123,7 +26348,7 @@
                             </p:stCondLst>
                             <p:childTnLst>
                               <p:par>
-                                <p:cTn id="5" presetID="22" presetClass="entr" presetSubtype="4" fill="hold" nodeType="clickEffect">
+                                <p:cTn id="5" presetID="1" presetClass="entr" presetSubtype="0" fill="hold" nodeType="clickEffect">
                                   <p:stCondLst>
                                     <p:cond delay="0"/>
                                   </p:stCondLst>
@@ -26136,7 +26361,7 @@
                                           </p:stCondLst>
                                         </p:cTn>
                                         <p:tgtEl>
-                                          <p:spTgt spid="201"/>
+                                          <p:spTgt spid="28"/>
                                         </p:tgtEl>
                                         <p:attrNameLst>
                                           <p:attrName>style.visibility</p:attrName>
@@ -26146,14 +26371,6 @@
                                         <p:strVal val="visible"/>
                                       </p:to>
                                     </p:set>
-                                    <p:animEffect transition="in" filter="wipe(down)">
-                                      <p:cBhvr>
-                                        <p:cTn id="7" dur="500"/>
-                                        <p:tgtEl>
-                                          <p:spTgt spid="201"/>
-                                        </p:tgtEl>
-                                      </p:cBhvr>
-                                    </p:animEffect>
                                   </p:childTnLst>
                                 </p:cTn>
                               </p:par>
@@ -26164,32 +26381,32 @@
                     </p:cTn>
                   </p:par>
                   <p:par>
-                    <p:cTn id="8" fill="hold">
+                    <p:cTn id="7" fill="hold">
                       <p:stCondLst>
                         <p:cond delay="indefinite"/>
                       </p:stCondLst>
                       <p:childTnLst>
                         <p:par>
-                          <p:cTn id="9" fill="hold">
+                          <p:cTn id="8" fill="hold">
                             <p:stCondLst>
                               <p:cond delay="0"/>
                             </p:stCondLst>
                             <p:childTnLst>
                               <p:par>
-                                <p:cTn id="10" presetID="22" presetClass="entr" presetSubtype="4" fill="hold" nodeType="clickEffect">
+                                <p:cTn id="9" presetID="1" presetClass="entr" presetSubtype="0" fill="hold" nodeType="clickEffect">
                                   <p:stCondLst>
                                     <p:cond delay="0"/>
                                   </p:stCondLst>
                                   <p:childTnLst>
                                     <p:set>
                                       <p:cBhvr>
-                                        <p:cTn id="11" dur="1" fill="hold">
+                                        <p:cTn id="10" dur="1" fill="hold">
                                           <p:stCondLst>
                                             <p:cond delay="0"/>
                                           </p:stCondLst>
                                         </p:cTn>
                                         <p:tgtEl>
-                                          <p:spTgt spid="22"/>
+                                          <p:spTgt spid="29"/>
                                         </p:tgtEl>
                                         <p:attrNameLst>
                                           <p:attrName>style.visibility</p:attrName>
@@ -26199,14 +26416,6 @@
                                         <p:strVal val="visible"/>
                                       </p:to>
                                     </p:set>
-                                    <p:animEffect transition="in" filter="wipe(down)">
-                                      <p:cBhvr>
-                                        <p:cTn id="12" dur="500"/>
-                                        <p:tgtEl>
-                                          <p:spTgt spid="22"/>
-                                        </p:tgtEl>
-                                      </p:cBhvr>
-                                    </p:animEffect>
                                   </p:childTnLst>
                                 </p:cTn>
                               </p:par>
@@ -26217,32 +26426,32 @@
                     </p:cTn>
                   </p:par>
                   <p:par>
-                    <p:cTn id="13" fill="hold">
+                    <p:cTn id="11" fill="hold">
                       <p:stCondLst>
                         <p:cond delay="indefinite"/>
                       </p:stCondLst>
                       <p:childTnLst>
                         <p:par>
-                          <p:cTn id="14" fill="hold">
+                          <p:cTn id="12" fill="hold">
                             <p:stCondLst>
                               <p:cond delay="0"/>
                             </p:stCondLst>
                             <p:childTnLst>
                               <p:par>
-                                <p:cTn id="15" presetID="22" presetClass="entr" presetSubtype="4" fill="hold" nodeType="clickEffect">
+                                <p:cTn id="13" presetID="1" presetClass="entr" presetSubtype="0" fill="hold" nodeType="clickEffect">
                                   <p:stCondLst>
                                     <p:cond delay="0"/>
                                   </p:stCondLst>
                                   <p:childTnLst>
                                     <p:set>
                                       <p:cBhvr>
-                                        <p:cTn id="16" dur="1" fill="hold">
+                                        <p:cTn id="14" dur="1" fill="hold">
                                           <p:stCondLst>
                                             <p:cond delay="0"/>
                                           </p:stCondLst>
                                         </p:cTn>
                                         <p:tgtEl>
-                                          <p:spTgt spid="202"/>
+                                          <p:spTgt spid="30"/>
                                         </p:tgtEl>
                                         <p:attrNameLst>
                                           <p:attrName>style.visibility</p:attrName>
@@ -26252,14 +26461,6 @@
                                         <p:strVal val="visible"/>
                                       </p:to>
                                     </p:set>
-                                    <p:animEffect transition="in" filter="wipe(down)">
-                                      <p:cBhvr>
-                                        <p:cTn id="17" dur="500"/>
-                                        <p:tgtEl>
-                                          <p:spTgt spid="202"/>
-                                        </p:tgtEl>
-                                      </p:cBhvr>
-                                    </p:animEffect>
                                   </p:childTnLst>
                                 </p:cTn>
                               </p:par>
@@ -26734,7 +26935,7 @@
                 <a:cs typeface="Arial" panose="020B0604020202020204" pitchFamily="34" charset="0"/>
                 <a:sym typeface="+mn-ea"/>
               </a:rPr>
-              <a:t>Website: https://fangtian-zhong.github.io/teaching/csci112-spring-2024/syllabus</a:t>
+              <a:t>Website: https://fangtian-zhong.github.io/teaching/csci112-fall-2024/syllabus</a:t>
             </a:r>
             <a:endParaRPr lang="en-US" sz="2800" dirty="0">
               <a:latin typeface="Arial" panose="020B0604020202020204" pitchFamily="34" charset="0"/>
@@ -26777,7 +26978,7 @@
                 <a:cs typeface="Arial" panose="020B0604020202020204" pitchFamily="34" charset="0"/>
                 <a:sym typeface="+mn-ea"/>
               </a:rPr>
-              <a:t>MWF 9:00am-9:50am, </a:t>
+              <a:t>MWF 8:00am-8:50am, </a:t>
             </a:r>
             <a:r>
               <a:rPr lang="en-US" sz="2800" noProof="0" dirty="0">
@@ -26785,7 +26986,15 @@
                 <a:cs typeface="Arial" panose="020B0604020202020204" pitchFamily="34" charset="0"/>
                 <a:sym typeface="+mn-ea"/>
               </a:rPr>
-              <a:t>REID Hall 108</a:t>
+              <a:t>Leon Johnson Hall</a:t>
+            </a:r>
+            <a:r>
+              <a:rPr lang="en-US" sz="2800" noProof="0" dirty="0">
+                <a:latin typeface="Arial" panose="020B0604020202020204" pitchFamily="34" charset="0"/>
+                <a:cs typeface="Arial" panose="020B0604020202020204" pitchFamily="34" charset="0"/>
+                <a:sym typeface="+mn-ea"/>
+              </a:rPr>
+              <a:t> 346</a:t>
             </a:r>
             <a:endParaRPr lang="en-US" sz="2800" noProof="0" dirty="0">
               <a:latin typeface="Arial" panose="020B0604020202020204" pitchFamily="34" charset="0"/>
@@ -26818,20 +27027,20 @@
                 <a:cs typeface="Arial" panose="020B0604020202020204" pitchFamily="34" charset="0"/>
                 <a:sym typeface="+mn-ea"/>
               </a:rPr>
-              <a:t>F 10am-4pm, Barnard Hall </a:t>
+              <a:t>F 10am-4pm, </a:t>
             </a:r>
             <a:r>
-              <a:rPr lang="en-US" sz="2800" noProof="0" dirty="0">
+              <a:rPr lang="en-US" sz="2800" dirty="0">
                 <a:latin typeface="Arial" panose="020B0604020202020204" pitchFamily="34" charset="0"/>
                 <a:cs typeface="Arial" panose="020B0604020202020204" pitchFamily="34" charset="0"/>
                 <a:sym typeface="+mn-ea"/>
               </a:rPr>
-              <a:t>254</a:t>
+              <a:t>ROBERT 111</a:t>
             </a:r>
             <a:endParaRPr lang="en-US" sz="2800" dirty="0">
               <a:latin typeface="Arial" panose="020B0604020202020204" pitchFamily="34" charset="0"/>
-              <a:ea typeface="MS PGothic" panose="020B0600070205080204" charset="-128"/>
               <a:cs typeface="Arial" panose="020B0604020202020204" pitchFamily="34" charset="0"/>
+              <a:sym typeface="+mn-ea"/>
             </a:endParaRPr>
           </a:p>
           <a:p>
@@ -26850,7 +27059,7 @@
                 <a:ea typeface="MS PGothic" panose="020B0600070205080204" charset="-128"/>
                 <a:cs typeface="Arial" panose="020B0604020202020204" pitchFamily="34" charset="0"/>
               </a:rPr>
-              <a:t>Office Hour: MWF 10:00am – 10:50am or by appointment</a:t>
+              <a:t>Office Hour: MWF 9:00am – 9:50am or by appointment</a:t>
             </a:r>
             <a:endParaRPr lang="en-US" sz="2800" dirty="0">
               <a:latin typeface="Arial" panose="020B0604020202020204" pitchFamily="34" charset="0"/>
@@ -26933,7 +27142,7 @@
                 <a:ea typeface="MS PGothic" panose="020B0600070205080204" charset="-128"/>
                 <a:cs typeface="Arial" panose="020B0604020202020204" pitchFamily="34" charset="0"/>
               </a:rPr>
-              <a:t>https://join.slack.com/t/csci112-spring-2024/shared_invite/zt-2al6rqd6a-KD8O3vPBUiA7wHxlhPwGrg</a:t>
+              <a:t>https://join.slack.com/t/montana-izi8174/shared_invite/zt-2oyzs4ewy-5yrdf~RtrHUR6FVjKEcF~w</a:t>
             </a:r>
             <a:endParaRPr lang="en-US" sz="2800" u="sng" dirty="0">
               <a:solidFill>
@@ -29489,13 +29698,43 @@
 
 <file path=ppt/tags/tag128.xml><?xml version="1.0" encoding="utf-8"?>
 <p:tagLst xmlns:p="http://schemas.openxmlformats.org/presentationml/2006/main">
-  <p:tag name="commondata" val="eyJoZGlkIjoiMmY5MzdhMTM4MGYwZjY3MmUyNDAwYWI5ODI4MjA4MzUifQ=="/>
+  <p:tag name="KSO_WM_BEAUTIFY_FLAG" val=""/>
+</p:tagLst>
+</file>
+
+<file path=ppt/tags/tag129.xml><?xml version="1.0" encoding="utf-8"?>
+<p:tagLst xmlns:p="http://schemas.openxmlformats.org/presentationml/2006/main">
+  <p:tag name="KSO_WM_BEAUTIFY_FLAG" val=""/>
 </p:tagLst>
 </file>
 
 <file path=ppt/tags/tag13.xml><?xml version="1.0" encoding="utf-8"?>
 <p:tagLst xmlns:p="http://schemas.openxmlformats.org/presentationml/2006/main">
   <p:tag name="KSO_WM_BEAUTIFY_FLAG" val=""/>
+</p:tagLst>
+</file>
+
+<file path=ppt/tags/tag130.xml><?xml version="1.0" encoding="utf-8"?>
+<p:tagLst xmlns:p="http://schemas.openxmlformats.org/presentationml/2006/main">
+  <p:tag name="KSO_WM_BEAUTIFY_FLAG" val=""/>
+</p:tagLst>
+</file>
+
+<file path=ppt/tags/tag131.xml><?xml version="1.0" encoding="utf-8"?>
+<p:tagLst xmlns:p="http://schemas.openxmlformats.org/presentationml/2006/main">
+  <p:tag name="KSO_WM_BEAUTIFY_FLAG" val=""/>
+</p:tagLst>
+</file>
+
+<file path=ppt/tags/tag132.xml><?xml version="1.0" encoding="utf-8"?>
+<p:tagLst xmlns:p="http://schemas.openxmlformats.org/presentationml/2006/main">
+  <p:tag name="KSO_WM_BEAUTIFY_FLAG" val=""/>
+</p:tagLst>
+</file>
+
+<file path=ppt/tags/tag133.xml><?xml version="1.0" encoding="utf-8"?>
+<p:tagLst xmlns:p="http://schemas.openxmlformats.org/presentationml/2006/main">
+  <p:tag name="commondata" val="eyJoZGlkIjoiMmY5MzdhMTM4MGYwZjY3MmUyNDAwYWI5ODI4MjA4MzUifQ=="/>
 </p:tagLst>
 </file>
 
@@ -29885,6 +30124,11 @@
 
 <file path=ppt/tags/tag72.xml><?xml version="1.0" encoding="utf-8"?>
 <p:tagLst xmlns:p="http://schemas.openxmlformats.org/presentationml/2006/main">
+  <p:tag name="KSO_WM_UNIT_TABLE_BEAUTIFY" val="smartTable{93f34e1d-86a3-4a8e-92bc-d3747711a314}"/>
+  <p:tag name="TABLE_EMPHASIZE_COLOR" val="15158332"/>
+  <p:tag name="TABLE_SKINIDX" val="3"/>
+  <p:tag name="TABLE_COLORIDX" val="10"/>
+  <p:tag name="TABLE_COLOR_RGB" val="0x000000*0xFFFFFF*0x212121*0xFFFFFF*0xe74c3c*0xf89406*0xf7b619*0xc0ca33*0x7cb342*0x009688"/>
   <p:tag name="KSO_WM_BEAUTIFY_FLAG" val=""/>
 </p:tagLst>
 </file>
@@ -29915,11 +30159,6 @@
 
 <file path=ppt/tags/tag77.xml><?xml version="1.0" encoding="utf-8"?>
 <p:tagLst xmlns:p="http://schemas.openxmlformats.org/presentationml/2006/main">
-  <p:tag name="KSO_WM_UNIT_TABLE_BEAUTIFY" val="smartTable{93f34e1d-86a3-4a8e-92bc-d3747711a314}"/>
-  <p:tag name="TABLE_EMPHASIZE_COLOR" val="15158332"/>
-  <p:tag name="TABLE_SKINIDX" val="3"/>
-  <p:tag name="TABLE_COLORIDX" val="10"/>
-  <p:tag name="TABLE_COLOR_RGB" val="0x000000*0xFFFFFF*0x212121*0xFFFFFF*0xe74c3c*0xf89406*0xf7b619*0xc0ca33*0x7cb342*0x009688"/>
   <p:tag name="KSO_WM_BEAUTIFY_FLAG" val=""/>
 </p:tagLst>
 </file>
